--- a/presentation/RailPlan-AI-SIH26027.pptx
+++ b/presentation/RailPlan-AI-SIH26027.pptx
@@ -2280,7 +2280,7 @@
         </p:nvSpPr>
         <p:spPr>
           <a:xfrm>
-            <a:off x="987552" y="4105656"/>
+            <a:off x="987552" y="4096512"/>
             <a:ext cx="2185416" cy="219456"/>
           </a:xfrm>
           <a:prstGeom prst="rect">
@@ -2290,14 +2290,14 @@
           <a:ln/>
         </p:spPr>
         <p:txBody>
-          <a:bodyPr wrap="square" rtlCol="0" anchor="ctr"/>
+          <a:bodyPr wrap="square" lIns="0" tIns="0" rIns="0" bIns="0" rtlCol="0" anchor="ctr"/>
           <a:lstStyle/>
           <a:p>
             <a:pPr indent="0" marL="0">
               <a:buNone/>
             </a:pPr>
             <a:r>
-              <a:rPr lang="en-US" sz="900" b="1" spc="100" kern="0" dirty="0">
+              <a:rPr lang="en-US" sz="900" b="1" spc="80" kern="0" dirty="0">
                 <a:solidFill>
                   <a:srgbClr val="6B819A"/>
                 </a:solidFill>
@@ -2319,17 +2319,17 @@
         </p:nvSpPr>
         <p:spPr>
           <a:xfrm>
-            <a:off x="987552" y="4325112"/>
-            <a:ext cx="2185416" cy="457200"/>
-          </a:xfrm>
-          <a:prstGeom prst="rect">
-            <a:avLst/>
-          </a:prstGeom>
-          <a:noFill/>
-          <a:ln/>
-        </p:spPr>
-        <p:txBody>
-          <a:bodyPr wrap="square" rtlCol="0" anchor="ctr"/>
+            <a:off x="987552" y="4343400"/>
+            <a:ext cx="2185416" cy="420624"/>
+          </a:xfrm>
+          <a:prstGeom prst="rect">
+            <a:avLst/>
+          </a:prstGeom>
+          <a:noFill/>
+          <a:ln/>
+        </p:spPr>
+        <p:txBody>
+          <a:bodyPr wrap="square" lIns="0" tIns="0" rIns="0" bIns="0" rtlCol="0" anchor="ctr"/>
           <a:lstStyle/>
           <a:p>
             <a:pPr indent="0" marL="0">
@@ -2359,19 +2359,22 @@
         <p:spPr>
           <a:xfrm>
             <a:off x="987552" y="4800600"/>
-            <a:ext cx="2185416" cy="347472"/>
-          </a:xfrm>
-          <a:prstGeom prst="rect">
-            <a:avLst/>
-          </a:prstGeom>
-          <a:noFill/>
-          <a:ln/>
-        </p:spPr>
-        <p:txBody>
-          <a:bodyPr wrap="square" rtlCol="0" anchor="t"/>
+            <a:ext cx="2185416" cy="365760"/>
+          </a:xfrm>
+          <a:prstGeom prst="rect">
+            <a:avLst/>
+          </a:prstGeom>
+          <a:noFill/>
+          <a:ln/>
+        </p:spPr>
+        <p:txBody>
+          <a:bodyPr wrap="square" lIns="0" tIns="0" rIns="0" bIns="0" rtlCol="0" anchor="t"/>
           <a:lstStyle/>
           <a:p>
             <a:pPr indent="0" marL="0">
+              <a:lnSpc>
+                <a:spcPts val="1188"/>
+              </a:lnSpc>
               <a:buNone/>
             </a:pPr>
             <a:r>
@@ -2424,7 +2427,7 @@
         </p:nvSpPr>
         <p:spPr>
           <a:xfrm>
-            <a:off x="3730752" y="4105656"/>
+            <a:off x="3730752" y="4096512"/>
             <a:ext cx="2185416" cy="219456"/>
           </a:xfrm>
           <a:prstGeom prst="rect">
@@ -2434,14 +2437,14 @@
           <a:ln/>
         </p:spPr>
         <p:txBody>
-          <a:bodyPr wrap="square" rtlCol="0" anchor="ctr"/>
+          <a:bodyPr wrap="square" lIns="0" tIns="0" rIns="0" bIns="0" rtlCol="0" anchor="ctr"/>
           <a:lstStyle/>
           <a:p>
             <a:pPr indent="0" marL="0">
               <a:buNone/>
             </a:pPr>
             <a:r>
-              <a:rPr lang="en-US" sz="900" b="1" spc="100" kern="0" dirty="0">
+              <a:rPr lang="en-US" sz="900" b="1" spc="80" kern="0" dirty="0">
                 <a:solidFill>
                   <a:srgbClr val="6B819A"/>
                 </a:solidFill>
@@ -2463,24 +2466,24 @@
         </p:nvSpPr>
         <p:spPr>
           <a:xfrm>
-            <a:off x="3730752" y="4325112"/>
-            <a:ext cx="2185416" cy="457200"/>
-          </a:xfrm>
-          <a:prstGeom prst="rect">
-            <a:avLst/>
-          </a:prstGeom>
-          <a:noFill/>
-          <a:ln/>
-        </p:spPr>
-        <p:txBody>
-          <a:bodyPr wrap="square" rtlCol="0" anchor="ctr"/>
+            <a:off x="3730752" y="4343400"/>
+            <a:ext cx="2185416" cy="420624"/>
+          </a:xfrm>
+          <a:prstGeom prst="rect">
+            <a:avLst/>
+          </a:prstGeom>
+          <a:noFill/>
+          <a:ln/>
+        </p:spPr>
+        <p:txBody>
+          <a:bodyPr wrap="square" lIns="0" tIns="0" rIns="0" bIns="0" rtlCol="0" anchor="ctr"/>
           <a:lstStyle/>
           <a:p>
             <a:pPr indent="0" marL="0">
               <a:buNone/>
             </a:pPr>
             <a:r>
-              <a:rPr lang="en-US" sz="2400" b="1" dirty="0">
+              <a:rPr lang="en-US" sz="1800" b="1" dirty="0">
                 <a:solidFill>
                   <a:srgbClr val="2DD4BF"/>
                 </a:solidFill>
@@ -2490,7 +2493,7 @@
               </a:rPr>
               <a:t>Weekly + Monthly</a:t>
             </a:r>
-            <a:endParaRPr lang="en-US" sz="2400" dirty="0"/>
+            <a:endParaRPr lang="en-US" sz="1800" dirty="0"/>
           </a:p>
         </p:txBody>
       </p:sp>
@@ -2503,19 +2506,22 @@
         <p:spPr>
           <a:xfrm>
             <a:off x="3730752" y="4800600"/>
-            <a:ext cx="2185416" cy="347472"/>
-          </a:xfrm>
-          <a:prstGeom prst="rect">
-            <a:avLst/>
-          </a:prstGeom>
-          <a:noFill/>
-          <a:ln/>
-        </p:spPr>
-        <p:txBody>
-          <a:bodyPr wrap="square" rtlCol="0" anchor="t"/>
+            <a:ext cx="2185416" cy="365760"/>
+          </a:xfrm>
+          <a:prstGeom prst="rect">
+            <a:avLst/>
+          </a:prstGeom>
+          <a:noFill/>
+          <a:ln/>
+        </p:spPr>
+        <p:txBody>
+          <a:bodyPr wrap="square" lIns="0" tIns="0" rIns="0" bIns="0" rtlCol="0" anchor="t"/>
           <a:lstStyle/>
           <a:p>
             <a:pPr indent="0" marL="0">
+              <a:lnSpc>
+                <a:spcPts val="1188"/>
+              </a:lnSpc>
               <a:buNone/>
             </a:pPr>
             <a:r>
@@ -2568,7 +2574,7 @@
         </p:nvSpPr>
         <p:spPr>
           <a:xfrm>
-            <a:off x="6473952" y="4105656"/>
+            <a:off x="6473952" y="4096512"/>
             <a:ext cx="2185416" cy="219456"/>
           </a:xfrm>
           <a:prstGeom prst="rect">
@@ -2578,14 +2584,14 @@
           <a:ln/>
         </p:spPr>
         <p:txBody>
-          <a:bodyPr wrap="square" rtlCol="0" anchor="ctr"/>
+          <a:bodyPr wrap="square" lIns="0" tIns="0" rIns="0" bIns="0" rtlCol="0" anchor="ctr"/>
           <a:lstStyle/>
           <a:p>
             <a:pPr indent="0" marL="0">
               <a:buNone/>
             </a:pPr>
             <a:r>
-              <a:rPr lang="en-US" sz="900" b="1" spc="100" kern="0" dirty="0">
+              <a:rPr lang="en-US" sz="900" b="1" spc="80" kern="0" dirty="0">
                 <a:solidFill>
                   <a:srgbClr val="6B819A"/>
                 </a:solidFill>
@@ -2607,17 +2613,17 @@
         </p:nvSpPr>
         <p:spPr>
           <a:xfrm>
-            <a:off x="6473952" y="4325112"/>
-            <a:ext cx="2185416" cy="457200"/>
-          </a:xfrm>
-          <a:prstGeom prst="rect">
-            <a:avLst/>
-          </a:prstGeom>
-          <a:noFill/>
-          <a:ln/>
-        </p:spPr>
-        <p:txBody>
-          <a:bodyPr wrap="square" rtlCol="0" anchor="ctr"/>
+            <a:off x="6473952" y="4343400"/>
+            <a:ext cx="2185416" cy="420624"/>
+          </a:xfrm>
+          <a:prstGeom prst="rect">
+            <a:avLst/>
+          </a:prstGeom>
+          <a:noFill/>
+          <a:ln/>
+        </p:spPr>
+        <p:txBody>
+          <a:bodyPr wrap="square" lIns="0" tIns="0" rIns="0" bIns="0" rtlCol="0" anchor="ctr"/>
           <a:lstStyle/>
           <a:p>
             <a:pPr indent="0" marL="0">
@@ -2647,19 +2653,22 @@
         <p:spPr>
           <a:xfrm>
             <a:off x="6473952" y="4800600"/>
-            <a:ext cx="2185416" cy="347472"/>
-          </a:xfrm>
-          <a:prstGeom prst="rect">
-            <a:avLst/>
-          </a:prstGeom>
-          <a:noFill/>
-          <a:ln/>
-        </p:spPr>
-        <p:txBody>
-          <a:bodyPr wrap="square" rtlCol="0" anchor="t"/>
+            <a:ext cx="2185416" cy="365760"/>
+          </a:xfrm>
+          <a:prstGeom prst="rect">
+            <a:avLst/>
+          </a:prstGeom>
+          <a:noFill/>
+          <a:ln/>
+        </p:spPr>
+        <p:txBody>
+          <a:bodyPr wrap="square" lIns="0" tIns="0" rIns="0" bIns="0" rtlCol="0" anchor="t"/>
           <a:lstStyle/>
           <a:p>
             <a:pPr indent="0" marL="0">
+              <a:lnSpc>
+                <a:spcPts val="1188"/>
+              </a:lnSpc>
               <a:buNone/>
             </a:pPr>
             <a:r>
@@ -2712,7 +2721,7 @@
         </p:nvSpPr>
         <p:spPr>
           <a:xfrm>
-            <a:off x="9217152" y="4105656"/>
+            <a:off x="9217152" y="4096512"/>
             <a:ext cx="2185416" cy="219456"/>
           </a:xfrm>
           <a:prstGeom prst="rect">
@@ -2722,14 +2731,14 @@
           <a:ln/>
         </p:spPr>
         <p:txBody>
-          <a:bodyPr wrap="square" rtlCol="0" anchor="ctr"/>
+          <a:bodyPr wrap="square" lIns="0" tIns="0" rIns="0" bIns="0" rtlCol="0" anchor="ctr"/>
           <a:lstStyle/>
           <a:p>
             <a:pPr indent="0" marL="0">
               <a:buNone/>
             </a:pPr>
             <a:r>
-              <a:rPr lang="en-US" sz="900" b="1" spc="100" kern="0" dirty="0">
+              <a:rPr lang="en-US" sz="900" b="1" spc="80" kern="0" dirty="0">
                 <a:solidFill>
                   <a:srgbClr val="6B819A"/>
                 </a:solidFill>
@@ -2751,17 +2760,17 @@
         </p:nvSpPr>
         <p:spPr>
           <a:xfrm>
-            <a:off x="9217152" y="4325112"/>
-            <a:ext cx="2185416" cy="457200"/>
-          </a:xfrm>
-          <a:prstGeom prst="rect">
-            <a:avLst/>
-          </a:prstGeom>
-          <a:noFill/>
-          <a:ln/>
-        </p:spPr>
-        <p:txBody>
-          <a:bodyPr wrap="square" rtlCol="0" anchor="ctr"/>
+            <a:off x="9217152" y="4343400"/>
+            <a:ext cx="2185416" cy="420624"/>
+          </a:xfrm>
+          <a:prstGeom prst="rect">
+            <a:avLst/>
+          </a:prstGeom>
+          <a:noFill/>
+          <a:ln/>
+        </p:spPr>
+        <p:txBody>
+          <a:bodyPr wrap="square" lIns="0" tIns="0" rIns="0" bIns="0" rtlCol="0" anchor="ctr"/>
           <a:lstStyle/>
           <a:p>
             <a:pPr indent="0" marL="0">
@@ -2791,19 +2800,22 @@
         <p:spPr>
           <a:xfrm>
             <a:off x="9217152" y="4800600"/>
-            <a:ext cx="2185416" cy="347472"/>
-          </a:xfrm>
-          <a:prstGeom prst="rect">
-            <a:avLst/>
-          </a:prstGeom>
-          <a:noFill/>
-          <a:ln/>
-        </p:spPr>
-        <p:txBody>
-          <a:bodyPr wrap="square" rtlCol="0" anchor="t"/>
+            <a:ext cx="2185416" cy="365760"/>
+          </a:xfrm>
+          <a:prstGeom prst="rect">
+            <a:avLst/>
+          </a:prstGeom>
+          <a:noFill/>
+          <a:ln/>
+        </p:spPr>
+        <p:txBody>
+          <a:bodyPr wrap="square" lIns="0" tIns="0" rIns="0" bIns="0" rtlCol="0" anchor="t"/>
           <a:lstStyle/>
           <a:p>
             <a:pPr indent="0" marL="0">
+              <a:lnSpc>
+                <a:spcPts val="1188"/>
+              </a:lnSpc>
               <a:buNone/>
             </a:pPr>
             <a:r>
@@ -3011,11 +3023,11 @@
         <p:spPr>
           <a:xfrm>
             <a:off x="502920" y="1600200"/>
-            <a:ext cx="3657600" cy="2286000"/>
+            <a:ext cx="3657600" cy="2148840"/>
           </a:xfrm>
           <a:prstGeom prst="roundRect">
             <a:avLst>
-              <a:gd name="adj" fmla="val 3200"/>
+              <a:gd name="adj" fmla="val 3404"/>
             </a:avLst>
           </a:prstGeom>
           <a:solidFill>
@@ -3037,7 +3049,7 @@
         </p:nvSpPr>
         <p:spPr>
           <a:xfrm>
-            <a:off x="502920" y="1801368"/>
+            <a:off x="502920" y="1783080"/>
             <a:ext cx="45720" cy="256032"/>
           </a:xfrm>
           <a:prstGeom prst="rect">
@@ -3057,7 +3069,7 @@
         </p:nvSpPr>
         <p:spPr>
           <a:xfrm>
-            <a:off x="722376" y="1783080"/>
+            <a:off x="722376" y="1764792"/>
             <a:ext cx="3255264" cy="274320"/>
           </a:xfrm>
           <a:prstGeom prst="rect">
@@ -3067,7 +3079,7 @@
           <a:ln/>
         </p:spPr>
         <p:txBody>
-          <a:bodyPr wrap="square" rtlCol="0" anchor="ctr"/>
+          <a:bodyPr wrap="square" lIns="0" tIns="0" rIns="0" bIns="0" rtlCol="0" anchor="ctr"/>
           <a:lstStyle/>
           <a:p>
             <a:pPr indent="0" marL="0">
@@ -3096,28 +3108,28 @@
         </p:nvSpPr>
         <p:spPr>
           <a:xfrm>
-            <a:off x="758952" y="2185416"/>
-            <a:ext cx="3200400" cy="1554480"/>
-          </a:xfrm>
-          <a:prstGeom prst="rect">
-            <a:avLst/>
-          </a:prstGeom>
-          <a:noFill/>
-          <a:ln/>
-        </p:spPr>
-        <p:txBody>
-          <a:bodyPr wrap="square" rtlCol="0" anchor="t"/>
+            <a:off x="740664" y="2148840"/>
+            <a:ext cx="3218688" cy="1472184"/>
+          </a:xfrm>
+          <a:prstGeom prst="rect">
+            <a:avLst/>
+          </a:prstGeom>
+          <a:noFill/>
+          <a:ln/>
+        </p:spPr>
+        <p:txBody>
+          <a:bodyPr wrap="square" lIns="0" tIns="0" rIns="0" bIns="0" rtlCol="0" anchor="t"/>
           <a:lstStyle/>
           <a:p>
             <a:pPr marL="342900" indent="-342900">
               <a:lnSpc>
-                <a:spcPts val="1800"/>
+                <a:spcPts val="1320"/>
               </a:lnSpc>
               <a:buSzPct val="100000"/>
               <a:buChar char="•"/>
             </a:pPr>
             <a:r>
-              <a:rPr lang="en-US" sz="1100" dirty="0">
+              <a:rPr lang="en-US" sz="1000" dirty="0">
                 <a:solidFill>
                   <a:srgbClr val="9DB2C8"/>
                 </a:solidFill>
@@ -3127,18 +3139,18 @@
               </a:rPr>
               <a:t>Angular 22, standalone components, client-side rendering only.</a:t>
             </a:r>
-            <a:endParaRPr lang="en-US" sz="1100" dirty="0"/>
+            <a:endParaRPr lang="en-US" sz="1000" dirty="0"/>
           </a:p>
           <a:p>
             <a:pPr marL="342900" indent="-342900">
               <a:lnSpc>
-                <a:spcPts val="1800"/>
+                <a:spcPts val="1320"/>
               </a:lnSpc>
               <a:buSzPct val="100000"/>
               <a:buChar char="•"/>
             </a:pPr>
             <a:r>
-              <a:rPr lang="en-US" sz="1100" dirty="0">
+              <a:rPr lang="en-US" sz="1000" dirty="0">
                 <a:solidFill>
                   <a:srgbClr val="9DB2C8"/>
                 </a:solidFill>
@@ -3148,18 +3160,18 @@
               </a:rPr>
               <a:t>Signals for all state; Signal Forms; httpResource for reads.</a:t>
             </a:r>
-            <a:endParaRPr lang="en-US" sz="1100" dirty="0"/>
+            <a:endParaRPr lang="en-US" sz="1000" dirty="0"/>
           </a:p>
           <a:p>
             <a:pPr marL="342900" indent="-342900">
               <a:lnSpc>
-                <a:spcPts val="1800"/>
+                <a:spcPts val="1320"/>
               </a:lnSpc>
               <a:buSzPct val="100000"/>
               <a:buChar char="•"/>
             </a:pPr>
             <a:r>
-              <a:rPr lang="en-US" sz="1100" dirty="0">
+              <a:rPr lang="en-US" sz="1000" dirty="0">
                 <a:solidFill>
                   <a:srgbClr val="9DB2C8"/>
                 </a:solidFill>
@@ -3169,18 +3181,18 @@
               </a:rPr>
               <a:t>Tailwind CSS 4 as the only design system — no component library.</a:t>
             </a:r>
-            <a:endParaRPr lang="en-US" sz="1100" dirty="0"/>
+            <a:endParaRPr lang="en-US" sz="1000" dirty="0"/>
           </a:p>
           <a:p>
             <a:pPr marL="342900" indent="-342900">
               <a:lnSpc>
-                <a:spcPts val="1800"/>
+                <a:spcPts val="1320"/>
               </a:lnSpc>
               <a:buSzPct val="100000"/>
               <a:buChar char="•"/>
             </a:pPr>
             <a:r>
-              <a:rPr lang="en-US" sz="1100" dirty="0">
+              <a:rPr lang="en-US" sz="1000" dirty="0">
                 <a:solidFill>
                   <a:srgbClr val="9DB2C8"/>
                 </a:solidFill>
@@ -3190,7 +3202,7 @@
               </a:rPr>
               <a:t>Department shown by text and colour, never colour alone.</a:t>
             </a:r>
-            <a:endParaRPr lang="en-US" sz="1100" dirty="0"/>
+            <a:endParaRPr lang="en-US" sz="1000" dirty="0"/>
           </a:p>
         </p:txBody>
       </p:sp>
@@ -3203,11 +3215,11 @@
         <p:spPr>
           <a:xfrm>
             <a:off x="4279392" y="1600200"/>
-            <a:ext cx="3657600" cy="2286000"/>
+            <a:ext cx="3657600" cy="2148840"/>
           </a:xfrm>
           <a:prstGeom prst="roundRect">
             <a:avLst>
-              <a:gd name="adj" fmla="val 3200"/>
+              <a:gd name="adj" fmla="val 3404"/>
             </a:avLst>
           </a:prstGeom>
           <a:solidFill>
@@ -3229,7 +3241,7 @@
         </p:nvSpPr>
         <p:spPr>
           <a:xfrm>
-            <a:off x="4279392" y="1801368"/>
+            <a:off x="4279392" y="1783080"/>
             <a:ext cx="45720" cy="256032"/>
           </a:xfrm>
           <a:prstGeom prst="rect">
@@ -3249,7 +3261,7 @@
         </p:nvSpPr>
         <p:spPr>
           <a:xfrm>
-            <a:off x="4498848" y="1783080"/>
+            <a:off x="4498848" y="1764792"/>
             <a:ext cx="3255264" cy="274320"/>
           </a:xfrm>
           <a:prstGeom prst="rect">
@@ -3259,7 +3271,7 @@
           <a:ln/>
         </p:spPr>
         <p:txBody>
-          <a:bodyPr wrap="square" rtlCol="0" anchor="ctr"/>
+          <a:bodyPr wrap="square" lIns="0" tIns="0" rIns="0" bIns="0" rtlCol="0" anchor="ctr"/>
           <a:lstStyle/>
           <a:p>
             <a:pPr indent="0" marL="0">
@@ -3288,28 +3300,28 @@
         </p:nvSpPr>
         <p:spPr>
           <a:xfrm>
-            <a:off x="4535424" y="2185416"/>
-            <a:ext cx="3200400" cy="1554480"/>
-          </a:xfrm>
-          <a:prstGeom prst="rect">
-            <a:avLst/>
-          </a:prstGeom>
-          <a:noFill/>
-          <a:ln/>
-        </p:spPr>
-        <p:txBody>
-          <a:bodyPr wrap="square" rtlCol="0" anchor="t"/>
+            <a:off x="4517136" y="2148840"/>
+            <a:ext cx="3218688" cy="1472184"/>
+          </a:xfrm>
+          <a:prstGeom prst="rect">
+            <a:avLst/>
+          </a:prstGeom>
+          <a:noFill/>
+          <a:ln/>
+        </p:spPr>
+        <p:txBody>
+          <a:bodyPr wrap="square" lIns="0" tIns="0" rIns="0" bIns="0" rtlCol="0" anchor="t"/>
           <a:lstStyle/>
           <a:p>
             <a:pPr marL="342900" indent="-342900">
               <a:lnSpc>
-                <a:spcPts val="1800"/>
+                <a:spcPts val="1320"/>
               </a:lnSpc>
               <a:buSzPct val="100000"/>
               <a:buChar char="•"/>
             </a:pPr>
             <a:r>
-              <a:rPr lang="en-US" sz="1100" dirty="0">
+              <a:rPr lang="en-US" sz="1000" dirty="0">
                 <a:solidFill>
                   <a:srgbClr val="9DB2C8"/>
                 </a:solidFill>
@@ -3319,18 +3331,18 @@
               </a:rPr>
               <a:t>Node.js 24, plain JavaScript, ES modules, Express 5.</a:t>
             </a:r>
-            <a:endParaRPr lang="en-US" sz="1100" dirty="0"/>
+            <a:endParaRPr lang="en-US" sz="1000" dirty="0"/>
           </a:p>
           <a:p>
             <a:pPr marL="342900" indent="-342900">
               <a:lnSpc>
-                <a:spcPts val="1800"/>
+                <a:spcPts val="1320"/>
               </a:lnSpc>
               <a:buSzPct val="100000"/>
               <a:buChar char="•"/>
             </a:pPr>
             <a:r>
-              <a:rPr lang="en-US" sz="1100" dirty="0">
+              <a:rPr lang="en-US" sz="1000" dirty="0">
                 <a:solidFill>
                   <a:srgbClr val="9DB2C8"/>
                 </a:solidFill>
@@ -3340,18 +3352,18 @@
               </a:rPr>
               <a:t>MySQL 8.0 with handwritten SQL and mysql2/promise — no ORM.</a:t>
             </a:r>
-            <a:endParaRPr lang="en-US" sz="1100" dirty="0"/>
+            <a:endParaRPr lang="en-US" sz="1000" dirty="0"/>
           </a:p>
           <a:p>
             <a:pPr marL="342900" indent="-342900">
               <a:lnSpc>
-                <a:spcPts val="1800"/>
+                <a:spcPts val="1320"/>
               </a:lnSpc>
               <a:buSzPct val="100000"/>
               <a:buChar char="•"/>
             </a:pPr>
             <a:r>
-              <a:rPr lang="en-US" sz="1100" dirty="0">
+              <a:rPr lang="en-US" sz="1000" dirty="0">
                 <a:solidFill>
                   <a:srgbClr val="9DB2C8"/>
                 </a:solidFill>
@@ -3361,18 +3373,18 @@
               </a:rPr>
               <a:t>Domain modules: routes, controller, validation, service, repository.</a:t>
             </a:r>
-            <a:endParaRPr lang="en-US" sz="1100" dirty="0"/>
+            <a:endParaRPr lang="en-US" sz="1000" dirty="0"/>
           </a:p>
           <a:p>
             <a:pPr marL="342900" indent="-342900">
               <a:lnSpc>
-                <a:spcPts val="1800"/>
+                <a:spcPts val="1320"/>
               </a:lnSpc>
               <a:buSzPct val="100000"/>
               <a:buChar char="•"/>
             </a:pPr>
             <a:r>
-              <a:rPr lang="en-US" sz="1100" dirty="0">
+              <a:rPr lang="en-US" sz="1000" dirty="0">
                 <a:solidFill>
                   <a:srgbClr val="9DB2C8"/>
                 </a:solidFill>
@@ -3382,7 +3394,7 @@
               </a:rPr>
               <a:t>Engines and solvers are pure logic, with no Express inside.</a:t>
             </a:r>
-            <a:endParaRPr lang="en-US" sz="1100" dirty="0"/>
+            <a:endParaRPr lang="en-US" sz="1000" dirty="0"/>
           </a:p>
         </p:txBody>
       </p:sp>
@@ -3395,11 +3407,11 @@
         <p:spPr>
           <a:xfrm>
             <a:off x="8055864" y="1600200"/>
-            <a:ext cx="3657600" cy="2286000"/>
+            <a:ext cx="3657600" cy="2148840"/>
           </a:xfrm>
           <a:prstGeom prst="roundRect">
             <a:avLst>
-              <a:gd name="adj" fmla="val 3200"/>
+              <a:gd name="adj" fmla="val 3404"/>
             </a:avLst>
           </a:prstGeom>
           <a:solidFill>
@@ -3421,7 +3433,7 @@
         </p:nvSpPr>
         <p:spPr>
           <a:xfrm>
-            <a:off x="8055864" y="1801368"/>
+            <a:off x="8055864" y="1783080"/>
             <a:ext cx="45720" cy="256032"/>
           </a:xfrm>
           <a:prstGeom prst="rect">
@@ -3441,7 +3453,7 @@
         </p:nvSpPr>
         <p:spPr>
           <a:xfrm>
-            <a:off x="8275320" y="1783080"/>
+            <a:off x="8275320" y="1764792"/>
             <a:ext cx="3255264" cy="274320"/>
           </a:xfrm>
           <a:prstGeom prst="rect">
@@ -3451,7 +3463,7 @@
           <a:ln/>
         </p:spPr>
         <p:txBody>
-          <a:bodyPr wrap="square" rtlCol="0" anchor="ctr"/>
+          <a:bodyPr wrap="square" lIns="0" tIns="0" rIns="0" bIns="0" rtlCol="0" anchor="ctr"/>
           <a:lstStyle/>
           <a:p>
             <a:pPr indent="0" marL="0">
@@ -3480,28 +3492,28 @@
         </p:nvSpPr>
         <p:spPr>
           <a:xfrm>
-            <a:off x="8311896" y="2185416"/>
-            <a:ext cx="3200400" cy="1554480"/>
-          </a:xfrm>
-          <a:prstGeom prst="rect">
-            <a:avLst/>
-          </a:prstGeom>
-          <a:noFill/>
-          <a:ln/>
-        </p:spPr>
-        <p:txBody>
-          <a:bodyPr wrap="square" rtlCol="0" anchor="t"/>
+            <a:off x="8293608" y="2148840"/>
+            <a:ext cx="3218688" cy="1472184"/>
+          </a:xfrm>
+          <a:prstGeom prst="rect">
+            <a:avLst/>
+          </a:prstGeom>
+          <a:noFill/>
+          <a:ln/>
+        </p:spPr>
+        <p:txBody>
+          <a:bodyPr wrap="square" lIns="0" tIns="0" rIns="0" bIns="0" rtlCol="0" anchor="t"/>
           <a:lstStyle/>
           <a:p>
             <a:pPr marL="342900" indent="-342900">
               <a:lnSpc>
-                <a:spcPts val="1800"/>
+                <a:spcPts val="1320"/>
               </a:lnSpc>
               <a:buSzPct val="100000"/>
               <a:buChar char="•"/>
             </a:pPr>
             <a:r>
-              <a:rPr lang="en-US" sz="1100" dirty="0">
+              <a:rPr lang="en-US" sz="1000" dirty="0">
                 <a:solidFill>
                   <a:srgbClr val="9DB2C8"/>
                 </a:solidFill>
@@ -3511,18 +3523,18 @@
               </a:rPr>
               <a:t>glpk.js MILP behind a single solver adapter.</a:t>
             </a:r>
-            <a:endParaRPr lang="en-US" sz="1100" dirty="0"/>
+            <a:endParaRPr lang="en-US" sz="1000" dirty="0"/>
           </a:p>
           <a:p>
             <a:pPr marL="342900" indent="-342900">
               <a:lnSpc>
-                <a:spcPts val="1800"/>
+                <a:spcPts val="1320"/>
               </a:lnSpc>
               <a:buSzPct val="100000"/>
               <a:buChar char="•"/>
             </a:pPr>
             <a:r>
-              <a:rPr lang="en-US" sz="1100" dirty="0">
+              <a:rPr lang="en-US" sz="1000" dirty="0">
                 <a:solidFill>
                   <a:srgbClr val="9DB2C8"/>
                 </a:solidFill>
@@ -3532,18 +3544,18 @@
               </a:rPr>
               <a:t>Greedy fallback when the solver fails, reported as FALLBACK_FEASIBLE.</a:t>
             </a:r>
-            <a:endParaRPr lang="en-US" sz="1100" dirty="0"/>
+            <a:endParaRPr lang="en-US" sz="1000" dirty="0"/>
           </a:p>
           <a:p>
             <a:pPr marL="342900" indent="-342900">
               <a:lnSpc>
-                <a:spcPts val="1800"/>
+                <a:spcPts val="1320"/>
               </a:lnSpc>
               <a:buSzPct val="100000"/>
               <a:buChar char="•"/>
             </a:pPr>
             <a:r>
-              <a:rPr lang="en-US" sz="1100" dirty="0">
+              <a:rPr lang="en-US" sz="1000" dirty="0">
                 <a:solidFill>
                   <a:srgbClr val="9DB2C8"/>
                 </a:solidFill>
@@ -3553,18 +3565,18 @@
               </a:rPr>
               <a:t>An independent plan validator running after the solver, not inside it.</a:t>
             </a:r>
-            <a:endParaRPr lang="en-US" sz="1100" dirty="0"/>
+            <a:endParaRPr lang="en-US" sz="1000" dirty="0"/>
           </a:p>
           <a:p>
             <a:pPr marL="342900" indent="-342900">
               <a:lnSpc>
-                <a:spcPts val="1800"/>
+                <a:spcPts val="1320"/>
               </a:lnSpc>
               <a:buSzPct val="100000"/>
               <a:buChar char="•"/>
             </a:pPr>
             <a:r>
-              <a:rPr lang="en-US" sz="1100" dirty="0">
+              <a:rPr lang="en-US" sz="1000" dirty="0">
                 <a:solidFill>
                   <a:srgbClr val="9DB2C8"/>
                 </a:solidFill>
@@ -3574,7 +3586,7 @@
               </a:rPr>
               <a:t>The manual baseline planner as a first-class deliverable.</a:t>
             </a:r>
-            <a:endParaRPr lang="en-US" sz="1100" dirty="0"/>
+            <a:endParaRPr lang="en-US" sz="1000" dirty="0"/>
           </a:p>
         </p:txBody>
       </p:sp>
@@ -3586,12 +3598,12 @@
         </p:nvSpPr>
         <p:spPr>
           <a:xfrm>
-            <a:off x="502920" y="4023360"/>
-            <a:ext cx="5532120" cy="1828800"/>
+            <a:off x="502920" y="3931920"/>
+            <a:ext cx="5532120" cy="1600200"/>
           </a:xfrm>
           <a:prstGeom prst="roundRect">
             <a:avLst>
-              <a:gd name="adj" fmla="val 4000"/>
+              <a:gd name="adj" fmla="val 4571"/>
             </a:avLst>
           </a:prstGeom>
           <a:solidFill>
@@ -3613,7 +3625,7 @@
         </p:nvSpPr>
         <p:spPr>
           <a:xfrm>
-            <a:off x="502920" y="4224528"/>
+            <a:off x="502920" y="4114800"/>
             <a:ext cx="45720" cy="256032"/>
           </a:xfrm>
           <a:prstGeom prst="rect">
@@ -3633,7 +3645,7 @@
         </p:nvSpPr>
         <p:spPr>
           <a:xfrm>
-            <a:off x="722376" y="4206240"/>
+            <a:off x="722376" y="4096512"/>
             <a:ext cx="5129784" cy="274320"/>
           </a:xfrm>
           <a:prstGeom prst="rect">
@@ -3643,7 +3655,7 @@
           <a:ln/>
         </p:spPr>
         <p:txBody>
-          <a:bodyPr wrap="square" rtlCol="0" anchor="ctr"/>
+          <a:bodyPr wrap="square" lIns="0" tIns="0" rIns="0" bIns="0" rtlCol="0" anchor="ctr"/>
           <a:lstStyle/>
           <a:p>
             <a:pPr indent="0" marL="0">
@@ -3672,28 +3684,28 @@
         </p:nvSpPr>
         <p:spPr>
           <a:xfrm>
-            <a:off x="758952" y="4608576"/>
-            <a:ext cx="5074920" cy="1097280"/>
-          </a:xfrm>
-          <a:prstGeom prst="rect">
-            <a:avLst/>
-          </a:prstGeom>
-          <a:noFill/>
-          <a:ln/>
-        </p:spPr>
-        <p:txBody>
-          <a:bodyPr wrap="square" rtlCol="0" anchor="t"/>
+            <a:off x="740664" y="4480560"/>
+            <a:ext cx="5093208" cy="923544"/>
+          </a:xfrm>
+          <a:prstGeom prst="rect">
+            <a:avLst/>
+          </a:prstGeom>
+          <a:noFill/>
+          <a:ln/>
+        </p:spPr>
+        <p:txBody>
+          <a:bodyPr wrap="square" lIns="0" tIns="0" rIns="0" bIns="0" rtlCol="0" anchor="t"/>
           <a:lstStyle/>
           <a:p>
             <a:pPr marL="342900" indent="-342900">
               <a:lnSpc>
-                <a:spcPts val="1800"/>
+                <a:spcPts val="1254"/>
               </a:lnSpc>
               <a:buSzPct val="100000"/>
               <a:buChar char="•"/>
             </a:pPr>
             <a:r>
-              <a:rPr lang="en-US" sz="1100" dirty="0">
+              <a:rPr lang="en-US" sz="950" dirty="0">
                 <a:solidFill>
                   <a:srgbClr val="9DB2C8"/>
                 </a:solidFill>
@@ -3703,18 +3715,18 @@
               </a:rPr>
               <a:t>Backend on node --test: adapter validation and idempotency, priority fallback, logistic regression on a known dataset, duration P90, interval subtraction, rejection reasons, baseline, GLPK, fallback, validation and metrics.</a:t>
             </a:r>
-            <a:endParaRPr lang="en-US" sz="1100" dirty="0"/>
+            <a:endParaRPr lang="en-US" sz="950" dirty="0"/>
           </a:p>
           <a:p>
             <a:pPr marL="342900" indent="-342900">
               <a:lnSpc>
-                <a:spcPts val="1800"/>
+                <a:spcPts val="1254"/>
               </a:lnSpc>
               <a:buSzPct val="100000"/>
               <a:buChar char="•"/>
             </a:pPr>
             <a:r>
-              <a:rPr lang="en-US" sz="1100" dirty="0">
+              <a:rPr lang="en-US" sz="950" dirty="0">
                 <a:solidFill>
                   <a:srgbClr val="9DB2C8"/>
                 </a:solidFill>
@@ -3724,7 +3736,7 @@
               </a:rPr>
               <a:t>Frontend on Vitest + jsdom via @angular/build:unit-test — every generated spec kept and extended.</a:t>
             </a:r>
-            <a:endParaRPr lang="en-US" sz="1100" dirty="0"/>
+            <a:endParaRPr lang="en-US" sz="950" dirty="0"/>
           </a:p>
         </p:txBody>
       </p:sp>
@@ -3736,12 +3748,12 @@
         </p:nvSpPr>
         <p:spPr>
           <a:xfrm>
-            <a:off x="6190488" y="4023360"/>
-            <a:ext cx="5532120" cy="1828800"/>
+            <a:off x="6190488" y="3931920"/>
+            <a:ext cx="5532120" cy="1600200"/>
           </a:xfrm>
           <a:prstGeom prst="roundRect">
             <a:avLst>
-              <a:gd name="adj" fmla="val 4000"/>
+              <a:gd name="adj" fmla="val 4571"/>
             </a:avLst>
           </a:prstGeom>
           <a:solidFill>
@@ -3763,7 +3775,7 @@
         </p:nvSpPr>
         <p:spPr>
           <a:xfrm>
-            <a:off x="6190488" y="4224528"/>
+            <a:off x="6190488" y="4114800"/>
             <a:ext cx="45720" cy="256032"/>
           </a:xfrm>
           <a:prstGeom prst="rect">
@@ -3783,7 +3795,7 @@
         </p:nvSpPr>
         <p:spPr>
           <a:xfrm>
-            <a:off x="6409944" y="4206240"/>
+            <a:off x="6409944" y="4096512"/>
             <a:ext cx="5129784" cy="274320"/>
           </a:xfrm>
           <a:prstGeom prst="rect">
@@ -3793,7 +3805,7 @@
           <a:ln/>
         </p:spPr>
         <p:txBody>
-          <a:bodyPr wrap="square" rtlCol="0" anchor="ctr"/>
+          <a:bodyPr wrap="square" lIns="0" tIns="0" rIns="0" bIns="0" rtlCol="0" anchor="ctr"/>
           <a:lstStyle/>
           <a:p>
             <a:pPr indent="0" marL="0">
@@ -3822,28 +3834,28 @@
         </p:nvSpPr>
         <p:spPr>
           <a:xfrm>
-            <a:off x="6446520" y="4608576"/>
-            <a:ext cx="5074920" cy="1097280"/>
-          </a:xfrm>
-          <a:prstGeom prst="rect">
-            <a:avLst/>
-          </a:prstGeom>
-          <a:noFill/>
-          <a:ln/>
-        </p:spPr>
-        <p:txBody>
-          <a:bodyPr wrap="square" rtlCol="0" anchor="t"/>
+            <a:off x="6428232" y="4480560"/>
+            <a:ext cx="5093208" cy="923544"/>
+          </a:xfrm>
+          <a:prstGeom prst="rect">
+            <a:avLst/>
+          </a:prstGeom>
+          <a:noFill/>
+          <a:ln/>
+        </p:spPr>
+        <p:txBody>
+          <a:bodyPr wrap="square" lIns="0" tIns="0" rIns="0" bIns="0" rtlCol="0" anchor="t"/>
           <a:lstStyle/>
           <a:p>
             <a:pPr marL="342900" indent="-342900">
               <a:lnSpc>
-                <a:spcPts val="1800"/>
+                <a:spcPts val="1320"/>
               </a:lnSpc>
               <a:buSzPct val="100000"/>
               <a:buChar char="•"/>
             </a:pPr>
             <a:r>
-              <a:rPr lang="en-US" sz="1100" dirty="0">
+              <a:rPr lang="en-US" sz="1000" dirty="0">
                 <a:solidFill>
                   <a:srgbClr val="9DB2C8"/>
                 </a:solidFill>
@@ -3853,18 +3865,18 @@
               </a:rPr>
               <a:t>No auth, RBAC, approval workflow or audit framework — this is decision support.</a:t>
             </a:r>
-            <a:endParaRPr lang="en-US" sz="1100" dirty="0"/>
+            <a:endParaRPr lang="en-US" sz="1000" dirty="0"/>
           </a:p>
           <a:p>
             <a:pPr marL="342900" indent="-342900">
               <a:lnSpc>
-                <a:spcPts val="1800"/>
+                <a:spcPts val="1320"/>
               </a:lnSpc>
               <a:buSzPct val="100000"/>
               <a:buChar char="•"/>
             </a:pPr>
             <a:r>
-              <a:rPr lang="en-US" sz="1100" dirty="0">
+              <a:rPr lang="en-US" sz="1000" dirty="0">
                 <a:solidFill>
                   <a:srgbClr val="9DB2C8"/>
                 </a:solidFill>
@@ -3874,18 +3886,18 @@
               </a:rPr>
               <a:t>No BDMS write-back: no official API contract is published, so we do not pretend to have one.</a:t>
             </a:r>
-            <a:endParaRPr lang="en-US" sz="1100" dirty="0"/>
+            <a:endParaRPr lang="en-US" sz="1000" dirty="0"/>
           </a:p>
           <a:p>
             <a:pPr marL="342900" indent="-342900">
               <a:lnSpc>
-                <a:spcPts val="1800"/>
+                <a:spcPts val="1320"/>
               </a:lnSpc>
               <a:buSzPct val="100000"/>
               <a:buChar char="•"/>
             </a:pPr>
             <a:r>
-              <a:rPr lang="en-US" sz="1100" dirty="0">
+              <a:rPr lang="en-US" sz="1000" dirty="0">
                 <a:solidFill>
                   <a:srgbClr val="9DB2C8"/>
                 </a:solidFill>
@@ -3895,7 +3907,7 @@
               </a:rPr>
               <a:t>No Docker, CI/CD or cloud deployment in the MVP.</a:t>
             </a:r>
-            <a:endParaRPr lang="en-US" sz="1100" dirty="0"/>
+            <a:endParaRPr lang="en-US" sz="1000" dirty="0"/>
           </a:p>
         </p:txBody>
       </p:sp>
@@ -4085,7 +4097,7 @@
         </p:nvSpPr>
         <p:spPr>
           <a:xfrm>
-            <a:off x="502920" y="1801368"/>
+            <a:off x="502920" y="1783080"/>
             <a:ext cx="45720" cy="256032"/>
           </a:xfrm>
           <a:prstGeom prst="rect">
@@ -4105,7 +4117,7 @@
         </p:nvSpPr>
         <p:spPr>
           <a:xfrm>
-            <a:off x="722376" y="1783080"/>
+            <a:off x="722376" y="1764792"/>
             <a:ext cx="5129784" cy="274320"/>
           </a:xfrm>
           <a:prstGeom prst="rect">
@@ -4115,7 +4127,7 @@
           <a:ln/>
         </p:spPr>
         <p:txBody>
-          <a:bodyPr wrap="square" rtlCol="0" anchor="ctr"/>
+          <a:bodyPr wrap="square" lIns="0" tIns="0" rIns="0" bIns="0" rtlCol="0" anchor="ctr"/>
           <a:lstStyle/>
           <a:p>
             <a:pPr indent="0" marL="0">
@@ -4144,28 +4156,28 @@
         </p:nvSpPr>
         <p:spPr>
           <a:xfrm>
-            <a:off x="758952" y="2185416"/>
-            <a:ext cx="5074920" cy="1737360"/>
-          </a:xfrm>
-          <a:prstGeom prst="rect">
-            <a:avLst/>
-          </a:prstGeom>
-          <a:noFill/>
-          <a:ln/>
-        </p:spPr>
-        <p:txBody>
-          <a:bodyPr wrap="square" rtlCol="0" anchor="t"/>
+            <a:off x="740664" y="2148840"/>
+            <a:ext cx="5093208" cy="1792224"/>
+          </a:xfrm>
+          <a:prstGeom prst="rect">
+            <a:avLst/>
+          </a:prstGeom>
+          <a:noFill/>
+          <a:ln/>
+        </p:spPr>
+        <p:txBody>
+          <a:bodyPr wrap="square" lIns="0" tIns="0" rIns="0" bIns="0" rtlCol="0" anchor="t"/>
           <a:lstStyle/>
           <a:p>
             <a:pPr marL="342900" indent="-342900">
               <a:lnSpc>
-                <a:spcPts val="1800"/>
+                <a:spcPts val="1518"/>
               </a:lnSpc>
               <a:buSzPct val="100000"/>
               <a:buChar char="•"/>
             </a:pPr>
             <a:r>
-              <a:rPr lang="en-US" sz="1100" dirty="0">
+              <a:rPr lang="en-US" sz="1150" dirty="0">
                 <a:solidFill>
                   <a:srgbClr val="9DB2C8"/>
                 </a:solidFill>
@@ -4175,18 +4187,18 @@
               </a:rPr>
               <a:t>Swap each MOCK adapter for the REST adapter once a real TMS / SMMS / TDMS / COA feed exists — the code path is already there.</a:t>
             </a:r>
-            <a:endParaRPr lang="en-US" sz="1100" dirty="0"/>
+            <a:endParaRPr lang="en-US" sz="1150" dirty="0"/>
           </a:p>
           <a:p>
             <a:pPr marL="342900" indent="-342900">
               <a:lnSpc>
-                <a:spcPts val="1800"/>
+                <a:spcPts val="1518"/>
               </a:lnSpc>
               <a:buSzPct val="100000"/>
               <a:buChar char="•"/>
             </a:pPr>
             <a:r>
-              <a:rPr lang="en-US" sz="1100" dirty="0">
+              <a:rPr lang="en-US" sz="1150" dirty="0">
                 <a:solidFill>
                   <a:srgbClr val="9DB2C8"/>
                 </a:solidFill>
@@ -4196,18 +4208,18 @@
               </a:rPr>
               <a:t>Retrain the risk model on real maintenance history; the training pipeline is unchanged.</a:t>
             </a:r>
-            <a:endParaRPr lang="en-US" sz="1100" dirty="0"/>
+            <a:endParaRPr lang="en-US" sz="1150" dirty="0"/>
           </a:p>
           <a:p>
             <a:pPr marL="342900" indent="-342900">
               <a:lnSpc>
-                <a:spcPts val="1800"/>
+                <a:spcPts val="1518"/>
               </a:lnSpc>
               <a:buSzPct val="100000"/>
               <a:buChar char="•"/>
             </a:pPr>
             <a:r>
-              <a:rPr lang="en-US" sz="1100" dirty="0">
+              <a:rPr lang="en-US" sz="1150" dirty="0">
                 <a:solidFill>
                   <a:srgbClr val="9DB2C8"/>
                 </a:solidFill>
@@ -4217,18 +4229,18 @@
               </a:rPr>
               <a:t>BDMS write-back once an official API contract is published.</a:t>
             </a:r>
-            <a:endParaRPr lang="en-US" sz="1100" dirty="0"/>
+            <a:endParaRPr lang="en-US" sz="1150" dirty="0"/>
           </a:p>
           <a:p>
             <a:pPr marL="342900" indent="-342900">
               <a:lnSpc>
-                <a:spcPts val="1800"/>
+                <a:spcPts val="1518"/>
               </a:lnSpc>
               <a:buSzPct val="100000"/>
               <a:buChar char="•"/>
             </a:pPr>
             <a:r>
-              <a:rPr lang="en-US" sz="1100" dirty="0">
+              <a:rPr lang="en-US" sz="1150" dirty="0">
                 <a:solidFill>
                   <a:srgbClr val="9DB2C8"/>
                 </a:solidFill>
@@ -4238,7 +4250,7 @@
               </a:rPr>
               <a:t>Retrospective learning: feed executed block outcomes back into the duration and risk estimates.</a:t>
             </a:r>
-            <a:endParaRPr lang="en-US" sz="1100" dirty="0"/>
+            <a:endParaRPr lang="en-US" sz="1150" dirty="0"/>
           </a:p>
         </p:txBody>
       </p:sp>
@@ -4277,7 +4289,7 @@
         </p:nvSpPr>
         <p:spPr>
           <a:xfrm>
-            <a:off x="6190488" y="1801368"/>
+            <a:off x="6190488" y="1783080"/>
             <a:ext cx="45720" cy="256032"/>
           </a:xfrm>
           <a:prstGeom prst="rect">
@@ -4297,7 +4309,7 @@
         </p:nvSpPr>
         <p:spPr>
           <a:xfrm>
-            <a:off x="6409944" y="1783080"/>
+            <a:off x="6409944" y="1764792"/>
             <a:ext cx="5129784" cy="274320"/>
           </a:xfrm>
           <a:prstGeom prst="rect">
@@ -4307,7 +4319,7 @@
           <a:ln/>
         </p:spPr>
         <p:txBody>
-          <a:bodyPr wrap="square" rtlCol="0" anchor="ctr"/>
+          <a:bodyPr wrap="square" lIns="0" tIns="0" rIns="0" bIns="0" rtlCol="0" anchor="ctr"/>
           <a:lstStyle/>
           <a:p>
             <a:pPr indent="0" marL="0">
@@ -4336,28 +4348,28 @@
         </p:nvSpPr>
         <p:spPr>
           <a:xfrm>
-            <a:off x="6446520" y="2185416"/>
-            <a:ext cx="5074920" cy="1737360"/>
-          </a:xfrm>
-          <a:prstGeom prst="rect">
-            <a:avLst/>
-          </a:prstGeom>
-          <a:noFill/>
-          <a:ln/>
-        </p:spPr>
-        <p:txBody>
-          <a:bodyPr wrap="square" rtlCol="0" anchor="t"/>
+            <a:off x="6428232" y="2148840"/>
+            <a:ext cx="5093208" cy="1792224"/>
+          </a:xfrm>
+          <a:prstGeom prst="rect">
+            <a:avLst/>
+          </a:prstGeom>
+          <a:noFill/>
+          <a:ln/>
+        </p:spPr>
+        <p:txBody>
+          <a:bodyPr wrap="square" lIns="0" tIns="0" rIns="0" bIns="0" rtlCol="0" anchor="t"/>
           <a:lstStyle/>
           <a:p>
             <a:pPr marL="342900" indent="-342900">
               <a:lnSpc>
-                <a:spcPts val="1800"/>
+                <a:spcPts val="1518"/>
               </a:lnSpc>
               <a:buSzPct val="100000"/>
               <a:buChar char="•"/>
             </a:pPr>
             <a:r>
-              <a:rPr lang="en-US" sz="1100" dirty="0">
+              <a:rPr lang="en-US" sz="1150" dirty="0">
                 <a:solidFill>
                   <a:srgbClr val="9DB2C8"/>
                 </a:solidFill>
@@ -4367,18 +4379,18 @@
               </a:rPr>
               <a:t>The model is trained on synthetic history and is reported as such — no production accuracy is asserted.</a:t>
             </a:r>
-            <a:endParaRPr lang="en-US" sz="1100" dirty="0"/>
+            <a:endParaRPr lang="en-US" sz="1150" dirty="0"/>
           </a:p>
           <a:p>
             <a:pPr marL="342900" indent="-342900">
               <a:lnSpc>
-                <a:spcPts val="1800"/>
+                <a:spcPts val="1518"/>
               </a:lnSpc>
               <a:buSzPct val="100000"/>
               <a:buChar char="•"/>
             </a:pPr>
             <a:r>
-              <a:rPr lang="en-US" sz="1100" dirty="0">
+              <a:rPr lang="en-US" sz="1150" dirty="0">
                 <a:solidFill>
                   <a:srgbClr val="9DB2C8"/>
                 </a:solidFill>
@@ -4388,18 +4400,18 @@
               </a:rPr>
               <a:t>The system does not operate signalling, grant a traffic block, or switch traction power.</a:t>
             </a:r>
-            <a:endParaRPr lang="en-US" sz="1100" dirty="0"/>
+            <a:endParaRPr lang="en-US" sz="1150" dirty="0"/>
           </a:p>
           <a:p>
             <a:pPr marL="342900" indent="-342900">
               <a:lnSpc>
-                <a:spcPts val="1800"/>
+                <a:spcPts val="1518"/>
               </a:lnSpc>
               <a:buSzPct val="100000"/>
               <a:buChar char="•"/>
             </a:pPr>
             <a:r>
-              <a:rPr lang="en-US" sz="1100" dirty="0">
+              <a:rPr lang="en-US" sz="1150" dirty="0">
                 <a:solidFill>
                   <a:srgbClr val="9DB2C8"/>
                 </a:solidFill>
@@ -4409,18 +4421,18 @@
               </a:rPr>
               <a:t>It does not replace authorised railway officials; every plan is a recommendation.</a:t>
             </a:r>
-            <a:endParaRPr lang="en-US" sz="1100" dirty="0"/>
+            <a:endParaRPr lang="en-US" sz="1150" dirty="0"/>
           </a:p>
           <a:p>
             <a:pPr marL="342900" indent="-342900">
               <a:lnSpc>
-                <a:spcPts val="1800"/>
+                <a:spcPts val="1518"/>
               </a:lnSpc>
               <a:buSzPct val="100000"/>
               <a:buChar char="•"/>
             </a:pPr>
             <a:r>
-              <a:rPr lang="en-US" sz="1100" dirty="0">
+              <a:rPr lang="en-US" sz="1150" dirty="0">
                 <a:solidFill>
                   <a:srgbClr val="9DB2C8"/>
                 </a:solidFill>
@@ -4430,7 +4442,7 @@
               </a:rPr>
               <a:t>No improvement percentage is hard-coded anywhere in the codebase.</a:t>
             </a:r>
-            <a:endParaRPr lang="en-US" sz="1100" dirty="0"/>
+            <a:endParaRPr lang="en-US" sz="1150" dirty="0"/>
           </a:p>
         </p:txBody>
       </p:sp>
@@ -5170,7 +5182,7 @@
         </p:nvSpPr>
         <p:spPr>
           <a:xfrm>
-            <a:off x="502920" y="2121408"/>
+            <a:off x="502920" y="2103120"/>
             <a:ext cx="45720" cy="256032"/>
           </a:xfrm>
           <a:prstGeom prst="rect">
@@ -5190,7 +5202,7 @@
         </p:nvSpPr>
         <p:spPr>
           <a:xfrm>
-            <a:off x="722376" y="2103120"/>
+            <a:off x="722376" y="2084832"/>
             <a:ext cx="3118104" cy="274320"/>
           </a:xfrm>
           <a:prstGeom prst="rect">
@@ -5200,7 +5212,7 @@
           <a:ln/>
         </p:spPr>
         <p:txBody>
-          <a:bodyPr wrap="square" rtlCol="0" anchor="ctr"/>
+          <a:bodyPr wrap="square" lIns="0" tIns="0" rIns="0" bIns="0" rtlCol="0" anchor="ctr"/>
           <a:lstStyle/>
           <a:p>
             <a:pPr indent="0" marL="0">
@@ -5229,28 +5241,28 @@
         </p:nvSpPr>
         <p:spPr>
           <a:xfrm>
-            <a:off x="758952" y="2505456"/>
-            <a:ext cx="3063240" cy="1600200"/>
-          </a:xfrm>
-          <a:prstGeom prst="rect">
-            <a:avLst/>
-          </a:prstGeom>
-          <a:noFill/>
-          <a:ln/>
-        </p:spPr>
-        <p:txBody>
-          <a:bodyPr wrap="square" rtlCol="0" anchor="t"/>
+            <a:off x="740664" y="2468880"/>
+            <a:ext cx="3081528" cy="1655064"/>
+          </a:xfrm>
+          <a:prstGeom prst="rect">
+            <a:avLst/>
+          </a:prstGeom>
+          <a:noFill/>
+          <a:ln/>
+        </p:spPr>
+        <p:txBody>
+          <a:bodyPr wrap="square" lIns="0" tIns="0" rIns="0" bIns="0" rtlCol="0" anchor="t"/>
           <a:lstStyle/>
           <a:p>
             <a:pPr marL="342900" indent="-342900">
               <a:lnSpc>
-                <a:spcPts val="1800"/>
+                <a:spcPts val="1518"/>
               </a:lnSpc>
               <a:buSzPct val="100000"/>
               <a:buChar char="•"/>
             </a:pPr>
             <a:r>
-              <a:rPr lang="en-US" sz="1100" dirty="0">
+              <a:rPr lang="en-US" sz="1150" dirty="0">
                 <a:solidFill>
                   <a:srgbClr val="9DB2C8"/>
                 </a:solidFill>
@@ -5260,18 +5272,18 @@
               </a:rPr>
               <a:t>Track defects sit in TMS, signalling defects in SMMS, OHE work in TDMS.</a:t>
             </a:r>
-            <a:endParaRPr lang="en-US" sz="1100" dirty="0"/>
+            <a:endParaRPr lang="en-US" sz="1150" dirty="0"/>
           </a:p>
           <a:p>
             <a:pPr marL="342900" indent="-342900">
               <a:lnSpc>
-                <a:spcPts val="1800"/>
+                <a:spcPts val="1518"/>
               </a:lnSpc>
               <a:buSzPct val="100000"/>
               <a:buChar char="•"/>
             </a:pPr>
             <a:r>
-              <a:rPr lang="en-US" sz="1100" dirty="0">
+              <a:rPr lang="en-US" sz="1150" dirty="0">
                 <a:solidFill>
                   <a:srgbClr val="9DB2C8"/>
                 </a:solidFill>
@@ -5281,18 +5293,18 @@
               </a:rPr>
               <a:t>Corridor availability sits separately again, in COA.</a:t>
             </a:r>
-            <a:endParaRPr lang="en-US" sz="1100" dirty="0"/>
+            <a:endParaRPr lang="en-US" sz="1150" dirty="0"/>
           </a:p>
           <a:p>
             <a:pPr marL="342900" indent="-342900">
               <a:lnSpc>
-                <a:spcPts val="1800"/>
+                <a:spcPts val="1518"/>
               </a:lnSpc>
               <a:buSzPct val="100000"/>
               <a:buChar char="•"/>
             </a:pPr>
             <a:r>
-              <a:rPr lang="en-US" sz="1100" dirty="0">
+              <a:rPr lang="en-US" sz="1150" dirty="0">
                 <a:solidFill>
                   <a:srgbClr val="9DB2C8"/>
                 </a:solidFill>
@@ -5302,7 +5314,7 @@
               </a:rPr>
               <a:t>No single view of what the whole network actually needs.</a:t>
             </a:r>
-            <a:endParaRPr lang="en-US" sz="1100" dirty="0"/>
+            <a:endParaRPr lang="en-US" sz="1150" dirty="0"/>
           </a:p>
         </p:txBody>
       </p:sp>
@@ -5341,7 +5353,7 @@
         </p:nvSpPr>
         <p:spPr>
           <a:xfrm>
-            <a:off x="4297680" y="2121408"/>
+            <a:off x="4297680" y="2103120"/>
             <a:ext cx="45720" cy="256032"/>
           </a:xfrm>
           <a:prstGeom prst="rect">
@@ -5361,7 +5373,7 @@
         </p:nvSpPr>
         <p:spPr>
           <a:xfrm>
-            <a:off x="4517136" y="2103120"/>
+            <a:off x="4517136" y="2084832"/>
             <a:ext cx="3118104" cy="274320"/>
           </a:xfrm>
           <a:prstGeom prst="rect">
@@ -5371,7 +5383,7 @@
           <a:ln/>
         </p:spPr>
         <p:txBody>
-          <a:bodyPr wrap="square" rtlCol="0" anchor="ctr"/>
+          <a:bodyPr wrap="square" lIns="0" tIns="0" rIns="0" bIns="0" rtlCol="0" anchor="ctr"/>
           <a:lstStyle/>
           <a:p>
             <a:pPr indent="0" marL="0">
@@ -5400,28 +5412,28 @@
         </p:nvSpPr>
         <p:spPr>
           <a:xfrm>
-            <a:off x="4553712" y="2505456"/>
-            <a:ext cx="3063240" cy="1600200"/>
-          </a:xfrm>
-          <a:prstGeom prst="rect">
-            <a:avLst/>
-          </a:prstGeom>
-          <a:noFill/>
-          <a:ln/>
-        </p:spPr>
-        <p:txBody>
-          <a:bodyPr wrap="square" rtlCol="0" anchor="t"/>
+            <a:off x="4535424" y="2468880"/>
+            <a:ext cx="3081528" cy="1655064"/>
+          </a:xfrm>
+          <a:prstGeom prst="rect">
+            <a:avLst/>
+          </a:prstGeom>
+          <a:noFill/>
+          <a:ln/>
+        </p:spPr>
+        <p:txBody>
+          <a:bodyPr wrap="square" lIns="0" tIns="0" rIns="0" bIns="0" rtlCol="0" anchor="t"/>
           <a:lstStyle/>
           <a:p>
             <a:pPr marL="342900" indent="-342900">
               <a:lnSpc>
-                <a:spcPts val="1800"/>
+                <a:spcPts val="1518"/>
               </a:lnSpc>
               <a:buSzPct val="100000"/>
               <a:buChar char="•"/>
             </a:pPr>
             <a:r>
-              <a:rPr lang="en-US" sz="1100" dirty="0">
+              <a:rPr lang="en-US" sz="1150" dirty="0">
                 <a:solidFill>
                   <a:srgbClr val="9DB2C8"/>
                 </a:solidFill>
@@ -5431,18 +5443,18 @@
               </a:rPr>
               <a:t>Each department books in its own due-date order.</a:t>
             </a:r>
-            <a:endParaRPr lang="en-US" sz="1100" dirty="0"/>
+            <a:endParaRPr lang="en-US" sz="1150" dirty="0"/>
           </a:p>
           <a:p>
             <a:pPr marL="342900" indent="-342900">
               <a:lnSpc>
-                <a:spcPts val="1800"/>
+                <a:spcPts val="1518"/>
               </a:lnSpc>
               <a:buSzPct val="100000"/>
               <a:buChar char="•"/>
             </a:pPr>
             <a:r>
-              <a:rPr lang="en-US" sz="1100" dirty="0">
+              <a:rPr lang="en-US" sz="1150" dirty="0">
                 <a:solidFill>
                   <a:srgbClr val="9DB2C8"/>
                 </a:solidFill>
@@ -5452,18 +5464,18 @@
               </a:rPr>
               <a:t>A window taken by one is simply gone for the rest.</a:t>
             </a:r>
-            <a:endParaRPr lang="en-US" sz="1100" dirty="0"/>
+            <a:endParaRPr lang="en-US" sz="1150" dirty="0"/>
           </a:p>
           <a:p>
             <a:pPr marL="342900" indent="-342900">
               <a:lnSpc>
-                <a:spcPts val="1800"/>
+                <a:spcPts val="1518"/>
               </a:lnSpc>
               <a:buSzPct val="100000"/>
               <a:buChar char="•"/>
             </a:pPr>
             <a:r>
-              <a:rPr lang="en-US" sz="1100" dirty="0">
+              <a:rPr lang="en-US" sz="1150" dirty="0">
                 <a:solidFill>
                   <a:srgbClr val="9DB2C8"/>
                 </a:solidFill>
@@ -5473,7 +5485,7 @@
               </a:rPr>
               <a:t>Compatible work that could share one possession does not.</a:t>
             </a:r>
-            <a:endParaRPr lang="en-US" sz="1100" dirty="0"/>
+            <a:endParaRPr lang="en-US" sz="1150" dirty="0"/>
           </a:p>
         </p:txBody>
       </p:sp>
@@ -5512,7 +5524,7 @@
         </p:nvSpPr>
         <p:spPr>
           <a:xfrm>
-            <a:off x="8092440" y="2121408"/>
+            <a:off x="8092440" y="2103120"/>
             <a:ext cx="45720" cy="256032"/>
           </a:xfrm>
           <a:prstGeom prst="rect">
@@ -5532,7 +5544,7 @@
         </p:nvSpPr>
         <p:spPr>
           <a:xfrm>
-            <a:off x="8311896" y="2103120"/>
+            <a:off x="8311896" y="2084832"/>
             <a:ext cx="3118104" cy="274320"/>
           </a:xfrm>
           <a:prstGeom prst="rect">
@@ -5542,7 +5554,7 @@
           <a:ln/>
         </p:spPr>
         <p:txBody>
-          <a:bodyPr wrap="square" rtlCol="0" anchor="ctr"/>
+          <a:bodyPr wrap="square" lIns="0" tIns="0" rIns="0" bIns="0" rtlCol="0" anchor="ctr"/>
           <a:lstStyle/>
           <a:p>
             <a:pPr indent="0" marL="0">
@@ -5571,28 +5583,28 @@
         </p:nvSpPr>
         <p:spPr>
           <a:xfrm>
-            <a:off x="8348472" y="2505456"/>
-            <a:ext cx="3063240" cy="1600200"/>
-          </a:xfrm>
-          <a:prstGeom prst="rect">
-            <a:avLst/>
-          </a:prstGeom>
-          <a:noFill/>
-          <a:ln/>
-        </p:spPr>
-        <p:txBody>
-          <a:bodyPr wrap="square" rtlCol="0" anchor="t"/>
+            <a:off x="8330184" y="2468880"/>
+            <a:ext cx="3081528" cy="1655064"/>
+          </a:xfrm>
+          <a:prstGeom prst="rect">
+            <a:avLst/>
+          </a:prstGeom>
+          <a:noFill/>
+          <a:ln/>
+        </p:spPr>
+        <p:txBody>
+          <a:bodyPr wrap="square" lIns="0" tIns="0" rIns="0" bIns="0" rtlCol="0" anchor="t"/>
           <a:lstStyle/>
           <a:p>
             <a:pPr marL="342900" indent="-342900">
               <a:lnSpc>
-                <a:spcPts val="1800"/>
+                <a:spcPts val="1518"/>
               </a:lnSpc>
               <a:buSzPct val="100000"/>
               <a:buChar char="•"/>
             </a:pPr>
             <a:r>
-              <a:rPr lang="en-US" sz="1100" dirty="0">
+              <a:rPr lang="en-US" sz="1150" dirty="0">
                 <a:solidFill>
                   <a:srgbClr val="9DB2C8"/>
                 </a:solidFill>
@@ -5602,18 +5614,18 @@
               </a:rPr>
               <a:t>The line closes more times than the work itself requires.</a:t>
             </a:r>
-            <a:endParaRPr lang="en-US" sz="1100" dirty="0"/>
+            <a:endParaRPr lang="en-US" sz="1150" dirty="0"/>
           </a:p>
           <a:p>
             <a:pPr marL="342900" indent="-342900">
               <a:lnSpc>
-                <a:spcPts val="1800"/>
+                <a:spcPts val="1518"/>
               </a:lnSpc>
               <a:buSzPct val="100000"/>
               <a:buChar char="•"/>
             </a:pPr>
             <a:r>
-              <a:rPr lang="en-US" sz="1100" dirty="0">
+              <a:rPr lang="en-US" sz="1150" dirty="0">
                 <a:solidFill>
                   <a:srgbClr val="9DB2C8"/>
                 </a:solidFill>
@@ -5623,18 +5635,18 @@
               </a:rPr>
               <a:t>Overdue safety-critical work waits behind routine work.</a:t>
             </a:r>
-            <a:endParaRPr lang="en-US" sz="1100" dirty="0"/>
+            <a:endParaRPr lang="en-US" sz="1150" dirty="0"/>
           </a:p>
           <a:p>
             <a:pPr marL="342900" indent="-342900">
               <a:lnSpc>
-                <a:spcPts val="1800"/>
+                <a:spcPts val="1518"/>
               </a:lnSpc>
               <a:buSzPct val="100000"/>
               <a:buChar char="•"/>
             </a:pPr>
             <a:r>
-              <a:rPr lang="en-US" sz="1100" dirty="0">
+              <a:rPr lang="en-US" sz="1150" dirty="0">
                 <a:solidFill>
                   <a:srgbClr val="9DB2C8"/>
                 </a:solidFill>
@@ -5644,7 +5656,7 @@
               </a:rPr>
               <a:t>Train operations absorb avoidable downtime.</a:t>
             </a:r>
-            <a:endParaRPr lang="en-US" sz="1100" dirty="0"/>
+            <a:endParaRPr lang="en-US" sz="1150" dirty="0"/>
           </a:p>
         </p:txBody>
       </p:sp>
@@ -5951,8 +5963,8 @@
         </p:nvSpPr>
         <p:spPr>
           <a:xfrm>
-            <a:off x="502920" y="1965960"/>
-            <a:ext cx="2103120" cy="2377440"/>
+            <a:off x="502920" y="1874520"/>
+            <a:ext cx="2103120" cy="2286000"/>
           </a:xfrm>
           <a:prstGeom prst="roundRect">
             <a:avLst>
@@ -5978,8 +5990,8 @@
         </p:nvSpPr>
         <p:spPr>
           <a:xfrm>
-            <a:off x="667512" y="2148840"/>
-            <a:ext cx="384048" cy="384048"/>
+            <a:off x="667512" y="2057400"/>
+            <a:ext cx="365760" cy="365760"/>
           </a:xfrm>
           <a:prstGeom prst="ellipse">
             <a:avLst/>
@@ -5998,8 +6010,8 @@
         </p:nvSpPr>
         <p:spPr>
           <a:xfrm>
-            <a:off x="667512" y="2148840"/>
-            <a:ext cx="384048" cy="384048"/>
+            <a:off x="667512" y="2057400"/>
+            <a:ext cx="365760" cy="365760"/>
           </a:xfrm>
           <a:prstGeom prst="rect">
             <a:avLst/>
@@ -6037,24 +6049,24 @@
         </p:nvSpPr>
         <p:spPr>
           <a:xfrm>
-            <a:off x="667512" y="2633472"/>
-            <a:ext cx="1773936" cy="310896"/>
-          </a:xfrm>
-          <a:prstGeom prst="rect">
-            <a:avLst/>
-          </a:prstGeom>
-          <a:noFill/>
-          <a:ln/>
-        </p:spPr>
-        <p:txBody>
-          <a:bodyPr wrap="square" rtlCol="0" anchor="ctr"/>
+            <a:off x="667512" y="2514600"/>
+            <a:ext cx="1773936" cy="292608"/>
+          </a:xfrm>
+          <a:prstGeom prst="rect">
+            <a:avLst/>
+          </a:prstGeom>
+          <a:noFill/>
+          <a:ln/>
+        </p:spPr>
+        <p:txBody>
+          <a:bodyPr wrap="square" lIns="0" tIns="0" rIns="0" bIns="0" rtlCol="0" anchor="ctr"/>
           <a:lstStyle/>
           <a:p>
             <a:pPr indent="0" marL="0">
               <a:buNone/>
             </a:pPr>
             <a:r>
-              <a:rPr lang="en-US" sz="1450" b="1" dirty="0">
+              <a:rPr lang="en-US" sz="1350" b="1" dirty="0">
                 <a:solidFill>
                   <a:srgbClr val="F1F6FC"/>
                 </a:solidFill>
@@ -6064,7 +6076,7 @@
               </a:rPr>
               <a:t>Integrate</a:t>
             </a:r>
-            <a:endParaRPr lang="en-US" sz="1450" dirty="0"/>
+            <a:endParaRPr lang="en-US" sz="1350" dirty="0"/>
           </a:p>
         </p:txBody>
       </p:sp>
@@ -6076,22 +6088,22 @@
         </p:nvSpPr>
         <p:spPr>
           <a:xfrm>
-            <a:off x="667512" y="2980944"/>
-            <a:ext cx="1773936" cy="1234440"/>
-          </a:xfrm>
-          <a:prstGeom prst="rect">
-            <a:avLst/>
-          </a:prstGeom>
-          <a:noFill/>
-          <a:ln/>
-        </p:spPr>
-        <p:txBody>
-          <a:bodyPr wrap="square" rtlCol="0" anchor="t"/>
+            <a:off x="667512" y="2843784"/>
+            <a:ext cx="1773936" cy="1170432"/>
+          </a:xfrm>
+          <a:prstGeom prst="rect">
+            <a:avLst/>
+          </a:prstGeom>
+          <a:noFill/>
+          <a:ln/>
+        </p:spPr>
+        <p:txBody>
+          <a:bodyPr wrap="square" lIns="0" tIns="0" rIns="0" bIns="0" rtlCol="0" anchor="t"/>
           <a:lstStyle/>
           <a:p>
             <a:pPr indent="0" marL="0">
               <a:lnSpc>
-                <a:spcPts val="1400"/>
+                <a:spcPts val="1300"/>
               </a:lnSpc>
               <a:buNone/>
             </a:pPr>
@@ -6118,7 +6130,7 @@
         </p:nvSpPr>
         <p:spPr>
           <a:xfrm>
-            <a:off x="2624328" y="3017520"/>
+            <a:off x="2624328" y="2880360"/>
             <a:ext cx="384048" cy="256032"/>
           </a:xfrm>
           <a:prstGeom prst="rect">
@@ -6157,8 +6169,8 @@
         </p:nvSpPr>
         <p:spPr>
           <a:xfrm>
-            <a:off x="2770632" y="1965960"/>
-            <a:ext cx="2103120" cy="2377440"/>
+            <a:off x="2770632" y="1874520"/>
+            <a:ext cx="2103120" cy="2286000"/>
           </a:xfrm>
           <a:prstGeom prst="roundRect">
             <a:avLst>
@@ -6184,8 +6196,8 @@
         </p:nvSpPr>
         <p:spPr>
           <a:xfrm>
-            <a:off x="2935224" y="2148840"/>
-            <a:ext cx="384048" cy="384048"/>
+            <a:off x="2935224" y="2057400"/>
+            <a:ext cx="365760" cy="365760"/>
           </a:xfrm>
           <a:prstGeom prst="ellipse">
             <a:avLst/>
@@ -6204,8 +6216,8 @@
         </p:nvSpPr>
         <p:spPr>
           <a:xfrm>
-            <a:off x="2935224" y="2148840"/>
-            <a:ext cx="384048" cy="384048"/>
+            <a:off x="2935224" y="2057400"/>
+            <a:ext cx="365760" cy="365760"/>
           </a:xfrm>
           <a:prstGeom prst="rect">
             <a:avLst/>
@@ -6243,24 +6255,24 @@
         </p:nvSpPr>
         <p:spPr>
           <a:xfrm>
-            <a:off x="2935224" y="2633472"/>
-            <a:ext cx="1773936" cy="310896"/>
-          </a:xfrm>
-          <a:prstGeom prst="rect">
-            <a:avLst/>
-          </a:prstGeom>
-          <a:noFill/>
-          <a:ln/>
-        </p:spPr>
-        <p:txBody>
-          <a:bodyPr wrap="square" rtlCol="0" anchor="ctr"/>
+            <a:off x="2935224" y="2514600"/>
+            <a:ext cx="1773936" cy="292608"/>
+          </a:xfrm>
+          <a:prstGeom prst="rect">
+            <a:avLst/>
+          </a:prstGeom>
+          <a:noFill/>
+          <a:ln/>
+        </p:spPr>
+        <p:txBody>
+          <a:bodyPr wrap="square" lIns="0" tIns="0" rIns="0" bIns="0" rtlCol="0" anchor="ctr"/>
           <a:lstStyle/>
           <a:p>
             <a:pPr indent="0" marL="0">
               <a:buNone/>
             </a:pPr>
             <a:r>
-              <a:rPr lang="en-US" sz="1450" b="1" dirty="0">
+              <a:rPr lang="en-US" sz="1350" b="1" dirty="0">
                 <a:solidFill>
                   <a:srgbClr val="F1F6FC"/>
                 </a:solidFill>
@@ -6270,7 +6282,7 @@
               </a:rPr>
               <a:t>Prioritise</a:t>
             </a:r>
-            <a:endParaRPr lang="en-US" sz="1450" dirty="0"/>
+            <a:endParaRPr lang="en-US" sz="1350" dirty="0"/>
           </a:p>
         </p:txBody>
       </p:sp>
@@ -6282,22 +6294,22 @@
         </p:nvSpPr>
         <p:spPr>
           <a:xfrm>
-            <a:off x="2935224" y="2980944"/>
-            <a:ext cx="1773936" cy="1234440"/>
-          </a:xfrm>
-          <a:prstGeom prst="rect">
-            <a:avLst/>
-          </a:prstGeom>
-          <a:noFill/>
-          <a:ln/>
-        </p:spPr>
-        <p:txBody>
-          <a:bodyPr wrap="square" rtlCol="0" anchor="t"/>
+            <a:off x="2935224" y="2843784"/>
+            <a:ext cx="1773936" cy="1170432"/>
+          </a:xfrm>
+          <a:prstGeom prst="rect">
+            <a:avLst/>
+          </a:prstGeom>
+          <a:noFill/>
+          <a:ln/>
+        </p:spPr>
+        <p:txBody>
+          <a:bodyPr wrap="square" lIns="0" tIns="0" rIns="0" bIns="0" rtlCol="0" anchor="t"/>
           <a:lstStyle/>
           <a:p>
             <a:pPr indent="0" marL="0">
               <a:lnSpc>
-                <a:spcPts val="1400"/>
+                <a:spcPts val="1300"/>
               </a:lnSpc>
               <a:buNone/>
             </a:pPr>
@@ -6324,7 +6336,7 @@
         </p:nvSpPr>
         <p:spPr>
           <a:xfrm>
-            <a:off x="4892040" y="3017520"/>
+            <a:off x="4892040" y="2880360"/>
             <a:ext cx="384048" cy="256032"/>
           </a:xfrm>
           <a:prstGeom prst="rect">
@@ -6363,8 +6375,8 @@
         </p:nvSpPr>
         <p:spPr>
           <a:xfrm>
-            <a:off x="5038344" y="1965960"/>
-            <a:ext cx="2103120" cy="2377440"/>
+            <a:off x="5038344" y="1874520"/>
+            <a:ext cx="2103120" cy="2286000"/>
           </a:xfrm>
           <a:prstGeom prst="roundRect">
             <a:avLst>
@@ -6390,8 +6402,8 @@
         </p:nvSpPr>
         <p:spPr>
           <a:xfrm>
-            <a:off x="5202936" y="2148840"/>
-            <a:ext cx="384048" cy="384048"/>
+            <a:off x="5202936" y="2057400"/>
+            <a:ext cx="365760" cy="365760"/>
           </a:xfrm>
           <a:prstGeom prst="ellipse">
             <a:avLst/>
@@ -6410,8 +6422,8 @@
         </p:nvSpPr>
         <p:spPr>
           <a:xfrm>
-            <a:off x="5202936" y="2148840"/>
-            <a:ext cx="384048" cy="384048"/>
+            <a:off x="5202936" y="2057400"/>
+            <a:ext cx="365760" cy="365760"/>
           </a:xfrm>
           <a:prstGeom prst="rect">
             <a:avLst/>
@@ -6449,24 +6461,24 @@
         </p:nvSpPr>
         <p:spPr>
           <a:xfrm>
-            <a:off x="5202936" y="2633472"/>
-            <a:ext cx="1773936" cy="310896"/>
-          </a:xfrm>
-          <a:prstGeom prst="rect">
-            <a:avLst/>
-          </a:prstGeom>
-          <a:noFill/>
-          <a:ln/>
-        </p:spPr>
-        <p:txBody>
-          <a:bodyPr wrap="square" rtlCol="0" anchor="ctr"/>
+            <a:off x="5202936" y="2514600"/>
+            <a:ext cx="1773936" cy="292608"/>
+          </a:xfrm>
+          <a:prstGeom prst="rect">
+            <a:avLst/>
+          </a:prstGeom>
+          <a:noFill/>
+          <a:ln/>
+        </p:spPr>
+        <p:txBody>
+          <a:bodyPr wrap="square" lIns="0" tIns="0" rIns="0" bIns="0" rtlCol="0" anchor="ctr"/>
           <a:lstStyle/>
           <a:p>
             <a:pPr indent="0" marL="0">
               <a:buNone/>
             </a:pPr>
             <a:r>
-              <a:rPr lang="en-US" sz="1450" b="1" dirty="0">
+              <a:rPr lang="en-US" sz="1350" b="1" dirty="0">
                 <a:solidFill>
                   <a:srgbClr val="F1F6FC"/>
                 </a:solidFill>
@@ -6476,7 +6488,7 @@
               </a:rPr>
               <a:t>Find safe time</a:t>
             </a:r>
-            <a:endParaRPr lang="en-US" sz="1450" dirty="0"/>
+            <a:endParaRPr lang="en-US" sz="1350" dirty="0"/>
           </a:p>
         </p:txBody>
       </p:sp>
@@ -6488,22 +6500,22 @@
         </p:nvSpPr>
         <p:spPr>
           <a:xfrm>
-            <a:off x="5202936" y="2980944"/>
-            <a:ext cx="1773936" cy="1234440"/>
-          </a:xfrm>
-          <a:prstGeom prst="rect">
-            <a:avLst/>
-          </a:prstGeom>
-          <a:noFill/>
-          <a:ln/>
-        </p:spPr>
-        <p:txBody>
-          <a:bodyPr wrap="square" rtlCol="0" anchor="t"/>
+            <a:off x="5202936" y="2843784"/>
+            <a:ext cx="1773936" cy="1170432"/>
+          </a:xfrm>
+          <a:prstGeom prst="rect">
+            <a:avLst/>
+          </a:prstGeom>
+          <a:noFill/>
+          <a:ln/>
+        </p:spPr>
+        <p:txBody>
+          <a:bodyPr wrap="square" lIns="0" tIns="0" rIns="0" bIns="0" rtlCol="0" anchor="t"/>
           <a:lstStyle/>
           <a:p>
             <a:pPr indent="0" marL="0">
               <a:lnSpc>
-                <a:spcPts val="1400"/>
+                <a:spcPts val="1300"/>
               </a:lnSpc>
               <a:buNone/>
             </a:pPr>
@@ -6530,7 +6542,7 @@
         </p:nvSpPr>
         <p:spPr>
           <a:xfrm>
-            <a:off x="7159752" y="3017520"/>
+            <a:off x="7159752" y="2880360"/>
             <a:ext cx="384048" cy="256032"/>
           </a:xfrm>
           <a:prstGeom prst="rect">
@@ -6569,8 +6581,8 @@
         </p:nvSpPr>
         <p:spPr>
           <a:xfrm>
-            <a:off x="7306056" y="1965960"/>
-            <a:ext cx="2103120" cy="2377440"/>
+            <a:off x="7306056" y="1874520"/>
+            <a:ext cx="2103120" cy="2286000"/>
           </a:xfrm>
           <a:prstGeom prst="roundRect">
             <a:avLst>
@@ -6596,8 +6608,8 @@
         </p:nvSpPr>
         <p:spPr>
           <a:xfrm>
-            <a:off x="7470648" y="2148840"/>
-            <a:ext cx="384048" cy="384048"/>
+            <a:off x="7470648" y="2057400"/>
+            <a:ext cx="365760" cy="365760"/>
           </a:xfrm>
           <a:prstGeom prst="ellipse">
             <a:avLst/>
@@ -6616,8 +6628,8 @@
         </p:nvSpPr>
         <p:spPr>
           <a:xfrm>
-            <a:off x="7470648" y="2148840"/>
-            <a:ext cx="384048" cy="384048"/>
+            <a:off x="7470648" y="2057400"/>
+            <a:ext cx="365760" cy="365760"/>
           </a:xfrm>
           <a:prstGeom prst="rect">
             <a:avLst/>
@@ -6655,24 +6667,24 @@
         </p:nvSpPr>
         <p:spPr>
           <a:xfrm>
-            <a:off x="7470648" y="2633472"/>
-            <a:ext cx="1773936" cy="310896"/>
-          </a:xfrm>
-          <a:prstGeom prst="rect">
-            <a:avLst/>
-          </a:prstGeom>
-          <a:noFill/>
-          <a:ln/>
-        </p:spPr>
-        <p:txBody>
-          <a:bodyPr wrap="square" rtlCol="0" anchor="ctr"/>
+            <a:off x="7470648" y="2514600"/>
+            <a:ext cx="1773936" cy="292608"/>
+          </a:xfrm>
+          <a:prstGeom prst="rect">
+            <a:avLst/>
+          </a:prstGeom>
+          <a:noFill/>
+          <a:ln/>
+        </p:spPr>
+        <p:txBody>
+          <a:bodyPr wrap="square" lIns="0" tIns="0" rIns="0" bIns="0" rtlCol="0" anchor="ctr"/>
           <a:lstStyle/>
           <a:p>
             <a:pPr indent="0" marL="0">
               <a:buNone/>
             </a:pPr>
             <a:r>
-              <a:rPr lang="en-US" sz="1450" b="1" dirty="0">
+              <a:rPr lang="en-US" sz="1350" b="1" dirty="0">
                 <a:solidFill>
                   <a:srgbClr val="F1F6FC"/>
                 </a:solidFill>
@@ -6682,7 +6694,7 @@
               </a:rPr>
               <a:t>Optimise</a:t>
             </a:r>
-            <a:endParaRPr lang="en-US" sz="1450" dirty="0"/>
+            <a:endParaRPr lang="en-US" sz="1350" dirty="0"/>
           </a:p>
         </p:txBody>
       </p:sp>
@@ -6694,22 +6706,22 @@
         </p:nvSpPr>
         <p:spPr>
           <a:xfrm>
-            <a:off x="7470648" y="2980944"/>
-            <a:ext cx="1773936" cy="1234440"/>
-          </a:xfrm>
-          <a:prstGeom prst="rect">
-            <a:avLst/>
-          </a:prstGeom>
-          <a:noFill/>
-          <a:ln/>
-        </p:spPr>
-        <p:txBody>
-          <a:bodyPr wrap="square" rtlCol="0" anchor="t"/>
+            <a:off x="7470648" y="2843784"/>
+            <a:ext cx="1773936" cy="1170432"/>
+          </a:xfrm>
+          <a:prstGeom prst="rect">
+            <a:avLst/>
+          </a:prstGeom>
+          <a:noFill/>
+          <a:ln/>
+        </p:spPr>
+        <p:txBody>
+          <a:bodyPr wrap="square" lIns="0" tIns="0" rIns="0" bIns="0" rtlCol="0" anchor="t"/>
           <a:lstStyle/>
           <a:p>
             <a:pPr indent="0" marL="0">
               <a:lnSpc>
-                <a:spcPts val="1400"/>
+                <a:spcPts val="1300"/>
               </a:lnSpc>
               <a:buNone/>
             </a:pPr>
@@ -6736,7 +6748,7 @@
         </p:nvSpPr>
         <p:spPr>
           <a:xfrm>
-            <a:off x="9427464" y="3017520"/>
+            <a:off x="9427464" y="2880360"/>
             <a:ext cx="384048" cy="256032"/>
           </a:xfrm>
           <a:prstGeom prst="rect">
@@ -6775,8 +6787,8 @@
         </p:nvSpPr>
         <p:spPr>
           <a:xfrm>
-            <a:off x="9573768" y="1965960"/>
-            <a:ext cx="2103120" cy="2377440"/>
+            <a:off x="9573768" y="1874520"/>
+            <a:ext cx="2103120" cy="2286000"/>
           </a:xfrm>
           <a:prstGeom prst="roundRect">
             <a:avLst>
@@ -6802,8 +6814,8 @@
         </p:nvSpPr>
         <p:spPr>
           <a:xfrm>
-            <a:off x="9738360" y="2148840"/>
-            <a:ext cx="384048" cy="384048"/>
+            <a:off x="9738360" y="2057400"/>
+            <a:ext cx="365760" cy="365760"/>
           </a:xfrm>
           <a:prstGeom prst="ellipse">
             <a:avLst/>
@@ -6822,8 +6834,8 @@
         </p:nvSpPr>
         <p:spPr>
           <a:xfrm>
-            <a:off x="9738360" y="2148840"/>
-            <a:ext cx="384048" cy="384048"/>
+            <a:off x="9738360" y="2057400"/>
+            <a:ext cx="365760" cy="365760"/>
           </a:xfrm>
           <a:prstGeom prst="rect">
             <a:avLst/>
@@ -6861,24 +6873,24 @@
         </p:nvSpPr>
         <p:spPr>
           <a:xfrm>
-            <a:off x="9738360" y="2633472"/>
-            <a:ext cx="1773936" cy="310896"/>
-          </a:xfrm>
-          <a:prstGeom prst="rect">
-            <a:avLst/>
-          </a:prstGeom>
-          <a:noFill/>
-          <a:ln/>
-        </p:spPr>
-        <p:txBody>
-          <a:bodyPr wrap="square" rtlCol="0" anchor="ctr"/>
+            <a:off x="9738360" y="2514600"/>
+            <a:ext cx="1773936" cy="292608"/>
+          </a:xfrm>
+          <a:prstGeom prst="rect">
+            <a:avLst/>
+          </a:prstGeom>
+          <a:noFill/>
+          <a:ln/>
+        </p:spPr>
+        <p:txBody>
+          <a:bodyPr wrap="square" lIns="0" tIns="0" rIns="0" bIns="0" rtlCol="0" anchor="ctr"/>
           <a:lstStyle/>
           <a:p>
             <a:pPr indent="0" marL="0">
               <a:buNone/>
             </a:pPr>
             <a:r>
-              <a:rPr lang="en-US" sz="1450" b="1" dirty="0">
+              <a:rPr lang="en-US" sz="1350" b="1" dirty="0">
                 <a:solidFill>
                   <a:srgbClr val="F1F6FC"/>
                 </a:solidFill>
@@ -6888,7 +6900,7 @@
               </a:rPr>
               <a:t>Re-check</a:t>
             </a:r>
-            <a:endParaRPr lang="en-US" sz="1450" dirty="0"/>
+            <a:endParaRPr lang="en-US" sz="1350" dirty="0"/>
           </a:p>
         </p:txBody>
       </p:sp>
@@ -6900,22 +6912,22 @@
         </p:nvSpPr>
         <p:spPr>
           <a:xfrm>
-            <a:off x="9738360" y="2980944"/>
-            <a:ext cx="1773936" cy="1234440"/>
-          </a:xfrm>
-          <a:prstGeom prst="rect">
-            <a:avLst/>
-          </a:prstGeom>
-          <a:noFill/>
-          <a:ln/>
-        </p:spPr>
-        <p:txBody>
-          <a:bodyPr wrap="square" rtlCol="0" anchor="t"/>
+            <a:off x="9738360" y="2843784"/>
+            <a:ext cx="1773936" cy="1170432"/>
+          </a:xfrm>
+          <a:prstGeom prst="rect">
+            <a:avLst/>
+          </a:prstGeom>
+          <a:noFill/>
+          <a:ln/>
+        </p:spPr>
+        <p:txBody>
+          <a:bodyPr wrap="square" lIns="0" tIns="0" rIns="0" bIns="0" rtlCol="0" anchor="t"/>
           <a:lstStyle/>
           <a:p>
             <a:pPr indent="0" marL="0">
               <a:lnSpc>
-                <a:spcPts val="1400"/>
+                <a:spcPts val="1300"/>
               </a:lnSpc>
               <a:buNone/>
             </a:pPr>
@@ -6942,12 +6954,12 @@
         </p:nvSpPr>
         <p:spPr>
           <a:xfrm>
-            <a:off x="502920" y="4526280"/>
-            <a:ext cx="5532120" cy="1417320"/>
+            <a:off x="502920" y="4343400"/>
+            <a:ext cx="5532120" cy="1463040"/>
           </a:xfrm>
           <a:prstGeom prst="roundRect">
             <a:avLst>
-              <a:gd name="adj" fmla="val 5161"/>
+              <a:gd name="adj" fmla="val 5000"/>
             </a:avLst>
           </a:prstGeom>
           <a:solidFill>
@@ -6969,7 +6981,7 @@
         </p:nvSpPr>
         <p:spPr>
           <a:xfrm>
-            <a:off x="502920" y="4727448"/>
+            <a:off x="502920" y="4526280"/>
             <a:ext cx="45720" cy="256032"/>
           </a:xfrm>
           <a:prstGeom prst="rect">
@@ -6989,7 +7001,7 @@
         </p:nvSpPr>
         <p:spPr>
           <a:xfrm>
-            <a:off x="722376" y="4709160"/>
+            <a:off x="722376" y="4507992"/>
             <a:ext cx="5129784" cy="274320"/>
           </a:xfrm>
           <a:prstGeom prst="rect">
@@ -6999,7 +7011,7 @@
           <a:ln/>
         </p:spPr>
         <p:txBody>
-          <a:bodyPr wrap="square" rtlCol="0" anchor="ctr"/>
+          <a:bodyPr wrap="square" lIns="0" tIns="0" rIns="0" bIns="0" rtlCol="0" anchor="ctr"/>
           <a:lstStyle/>
           <a:p>
             <a:pPr indent="0" marL="0">
@@ -7028,28 +7040,28 @@
         </p:nvSpPr>
         <p:spPr>
           <a:xfrm>
-            <a:off x="758952" y="5111496"/>
-            <a:ext cx="5074920" cy="685800"/>
-          </a:xfrm>
-          <a:prstGeom prst="rect">
-            <a:avLst/>
-          </a:prstGeom>
-          <a:noFill/>
-          <a:ln/>
-        </p:spPr>
-        <p:txBody>
-          <a:bodyPr wrap="square" rtlCol="0" anchor="t"/>
+            <a:off x="740664" y="4892040"/>
+            <a:ext cx="5093208" cy="786384"/>
+          </a:xfrm>
+          <a:prstGeom prst="rect">
+            <a:avLst/>
+          </a:prstGeom>
+          <a:noFill/>
+          <a:ln/>
+        </p:spPr>
+        <p:txBody>
+          <a:bodyPr wrap="square" lIns="0" tIns="0" rIns="0" bIns="0" rtlCol="0" anchor="t"/>
           <a:lstStyle/>
           <a:p>
             <a:pPr marL="342900" indent="-342900">
               <a:lnSpc>
-                <a:spcPts val="1800"/>
+                <a:spcPts val="1188"/>
               </a:lnSpc>
               <a:buSzPct val="100000"/>
               <a:buChar char="•"/>
             </a:pPr>
             <a:r>
-              <a:rPr lang="en-US" sz="1100" dirty="0">
+              <a:rPr lang="en-US" sz="900" dirty="0">
                 <a:solidFill>
                   <a:srgbClr val="9DB2C8"/>
                 </a:solidFill>
@@ -7059,18 +7071,18 @@
               </a:rPr>
               <a:t>A block may never overlap a protected train path plus its safety buffer.</a:t>
             </a:r>
-            <a:endParaRPr lang="en-US" sz="1100" dirty="0"/>
+            <a:endParaRPr lang="en-US" sz="900" dirty="0"/>
           </a:p>
           <a:p>
             <a:pPr marL="342900" indent="-342900">
               <a:lnSpc>
-                <a:spcPts val="1800"/>
+                <a:spcPts val="1188"/>
               </a:lnSpc>
               <a:buSzPct val="100000"/>
               <a:buChar char="•"/>
             </a:pPr>
             <a:r>
-              <a:rPr lang="en-US" sz="1100" dirty="0">
+              <a:rPr lang="en-US" sz="900" dirty="0">
                 <a:solidFill>
                   <a:srgbClr val="9DB2C8"/>
                 </a:solidFill>
@@ -7080,18 +7092,18 @@
               </a:rPr>
               <a:t>Traction work without power isolation, S&amp;T work without a disconnection: rejected.</a:t>
             </a:r>
-            <a:endParaRPr lang="en-US" sz="1100" dirty="0"/>
+            <a:endParaRPr lang="en-US" sz="900" dirty="0"/>
           </a:p>
           <a:p>
             <a:pPr marL="342900" indent="-342900">
               <a:lnSpc>
-                <a:spcPts val="1800"/>
+                <a:spcPts val="1188"/>
               </a:lnSpc>
               <a:buSzPct val="100000"/>
               <a:buChar char="•"/>
             </a:pPr>
             <a:r>
-              <a:rPr lang="en-US" sz="1100" dirty="0">
+              <a:rPr lang="en-US" sz="900" dirty="0">
                 <a:solidFill>
                   <a:srgbClr val="9DB2C8"/>
                 </a:solidFill>
@@ -7101,7 +7113,7 @@
               </a:rPr>
               <a:t>A task that does not fit the window stays unscheduled, with its reason shown.</a:t>
             </a:r>
-            <a:endParaRPr lang="en-US" sz="1100" dirty="0"/>
+            <a:endParaRPr lang="en-US" sz="900" dirty="0"/>
           </a:p>
         </p:txBody>
       </p:sp>
@@ -7113,12 +7125,12 @@
         </p:nvSpPr>
         <p:spPr>
           <a:xfrm>
-            <a:off x="6190488" y="4526280"/>
-            <a:ext cx="5532120" cy="1417320"/>
+            <a:off x="6190488" y="4343400"/>
+            <a:ext cx="5532120" cy="1463040"/>
           </a:xfrm>
           <a:prstGeom prst="roundRect">
             <a:avLst>
-              <a:gd name="adj" fmla="val 5161"/>
+              <a:gd name="adj" fmla="val 5000"/>
             </a:avLst>
           </a:prstGeom>
           <a:solidFill>
@@ -7140,7 +7152,7 @@
         </p:nvSpPr>
         <p:spPr>
           <a:xfrm>
-            <a:off x="6190488" y="4727448"/>
+            <a:off x="6190488" y="4526280"/>
             <a:ext cx="45720" cy="256032"/>
           </a:xfrm>
           <a:prstGeom prst="rect">
@@ -7160,7 +7172,7 @@
         </p:nvSpPr>
         <p:spPr>
           <a:xfrm>
-            <a:off x="6409944" y="4709160"/>
+            <a:off x="6409944" y="4507992"/>
             <a:ext cx="5129784" cy="274320"/>
           </a:xfrm>
           <a:prstGeom prst="rect">
@@ -7170,7 +7182,7 @@
           <a:ln/>
         </p:spPr>
         <p:txBody>
-          <a:bodyPr wrap="square" rtlCol="0" anchor="ctr"/>
+          <a:bodyPr wrap="square" lIns="0" tIns="0" rIns="0" bIns="0" rtlCol="0" anchor="ctr"/>
           <a:lstStyle/>
           <a:p>
             <a:pPr indent="0" marL="0">
@@ -7199,28 +7211,28 @@
         </p:nvSpPr>
         <p:spPr>
           <a:xfrm>
-            <a:off x="6446520" y="5111496"/>
-            <a:ext cx="5074920" cy="685800"/>
-          </a:xfrm>
-          <a:prstGeom prst="rect">
-            <a:avLst/>
-          </a:prstGeom>
-          <a:noFill/>
-          <a:ln/>
-        </p:spPr>
-        <p:txBody>
-          <a:bodyPr wrap="square" rtlCol="0" anchor="t"/>
+            <a:off x="6428232" y="4892040"/>
+            <a:ext cx="5093208" cy="786384"/>
+          </a:xfrm>
+          <a:prstGeom prst="rect">
+            <a:avLst/>
+          </a:prstGeom>
+          <a:noFill/>
+          <a:ln/>
+        </p:spPr>
+        <p:txBody>
+          <a:bodyPr wrap="square" lIns="0" tIns="0" rIns="0" bIns="0" rtlCol="0" anchor="t"/>
           <a:lstStyle/>
           <a:p>
             <a:pPr marL="342900" indent="-342900">
               <a:lnSpc>
-                <a:spcPts val="1800"/>
+                <a:spcPts val="1122"/>
               </a:lnSpc>
               <a:buSzPct val="100000"/>
               <a:buChar char="•"/>
             </a:pPr>
             <a:r>
-              <a:rPr lang="en-US" sz="1100" dirty="0">
+              <a:rPr lang="en-US" sz="850" dirty="0">
                 <a:solidFill>
                   <a:srgbClr val="9DB2C8"/>
                 </a:solidFill>
@@ -7230,18 +7242,18 @@
               </a:rPr>
               <a:t>Weights, train buffer and slot size each live in one config object — change one, re-run.</a:t>
             </a:r>
-            <a:endParaRPr lang="en-US" sz="1100" dirty="0"/>
+            <a:endParaRPr lang="en-US" sz="850" dirty="0"/>
           </a:p>
           <a:p>
             <a:pPr marL="342900" indent="-342900">
               <a:lnSpc>
-                <a:spcPts val="1800"/>
+                <a:spcPts val="1122"/>
               </a:lnSpc>
               <a:buSzPct val="100000"/>
               <a:buChar char="•"/>
             </a:pPr>
             <a:r>
-              <a:rPr lang="en-US" sz="1100" dirty="0">
+              <a:rPr lang="en-US" sz="850" dirty="0">
                 <a:solidFill>
                   <a:srgbClr val="9DB2C8"/>
                 </a:solidFill>
@@ -7251,18 +7263,18 @@
               </a:rPr>
               <a:t>Every adapter is swappable (MOCK / JSON / REST) if a real feed is unavailable.</a:t>
             </a:r>
-            <a:endParaRPr lang="en-US" sz="1100" dirty="0"/>
+            <a:endParaRPr lang="en-US" sz="850" dirty="0"/>
           </a:p>
           <a:p>
             <a:pPr marL="342900" indent="-342900">
               <a:lnSpc>
-                <a:spcPts val="1800"/>
+                <a:spcPts val="1122"/>
               </a:lnSpc>
               <a:buSzPct val="100000"/>
               <a:buChar char="•"/>
             </a:pPr>
             <a:r>
-              <a:rPr lang="en-US" sz="1100" dirty="0">
+              <a:rPr lang="en-US" sz="850" dirty="0">
                 <a:solidFill>
                   <a:srgbClr val="9DB2C8"/>
                 </a:solidFill>
@@ -7272,7 +7284,7 @@
               </a:rPr>
               <a:t>Solver status is reported as returned: OPTIMAL, FEASIBLE, FALLBACK_FEASIBLE, INFEASIBLE, FAILED.</a:t>
             </a:r>
-            <a:endParaRPr lang="en-US" sz="1100" dirty="0"/>
+            <a:endParaRPr lang="en-US" sz="850" dirty="0"/>
           </a:p>
         </p:txBody>
       </p:sp>
@@ -7483,7 +7495,7 @@
         <p:spPr>
           <a:xfrm>
             <a:off x="502920" y="1810512"/>
-            <a:ext cx="6766560" cy="4699000"/>
+            <a:ext cx="5806440" cy="4032250"/>
           </a:xfrm>
           <a:prstGeom prst="rect">
             <a:avLst/>
@@ -7499,7 +7511,7 @@
         <p:spPr>
           <a:xfrm>
             <a:off x="502920" y="1810512"/>
-            <a:ext cx="6766560" cy="4699000"/>
+            <a:ext cx="5806440" cy="4032250"/>
           </a:xfrm>
           <a:prstGeom prst="rect">
             <a:avLst/>
@@ -7520,8 +7532,8 @@
         </p:nvSpPr>
         <p:spPr>
           <a:xfrm>
-            <a:off x="502920" y="6564376"/>
-            <a:ext cx="6766560" cy="256032"/>
+            <a:off x="502920" y="5897626"/>
+            <a:ext cx="5806440" cy="256032"/>
           </a:xfrm>
           <a:prstGeom prst="rect">
             <a:avLst/>
@@ -7559,12 +7571,12 @@
         </p:nvSpPr>
         <p:spPr>
           <a:xfrm>
-            <a:off x="7543800" y="1810512"/>
-            <a:ext cx="4178808" cy="3200400"/>
+            <a:off x="6537960" y="1810512"/>
+            <a:ext cx="5184648" cy="2880360"/>
           </a:xfrm>
           <a:prstGeom prst="roundRect">
             <a:avLst>
-              <a:gd name="adj" fmla="val 2286"/>
+              <a:gd name="adj" fmla="val 2540"/>
             </a:avLst>
           </a:prstGeom>
           <a:solidFill>
@@ -7586,17 +7598,17 @@
         </p:nvSpPr>
         <p:spPr>
           <a:xfrm>
-            <a:off x="7772400" y="1956816"/>
-            <a:ext cx="3703320" cy="237744"/>
-          </a:xfrm>
-          <a:prstGeom prst="rect">
-            <a:avLst/>
-          </a:prstGeom>
-          <a:noFill/>
-          <a:ln/>
-        </p:spPr>
-        <p:txBody>
-          <a:bodyPr wrap="square" rtlCol="0" anchor="ctr"/>
+            <a:off x="6766560" y="1947672"/>
+            <a:ext cx="4727448" cy="237744"/>
+          </a:xfrm>
+          <a:prstGeom prst="rect">
+            <a:avLst/>
+          </a:prstGeom>
+          <a:noFill/>
+          <a:ln/>
+        </p:spPr>
+        <p:txBody>
+          <a:bodyPr wrap="square" lIns="0" tIns="0" rIns="0" bIns="0" rtlCol="0" anchor="ctr"/>
           <a:lstStyle/>
           <a:p>
             <a:pPr indent="0" marL="0">
@@ -7625,8 +7637,8 @@
         </p:nvSpPr>
         <p:spPr>
           <a:xfrm>
-            <a:off x="7772400" y="2359152"/>
-            <a:ext cx="45720" cy="292608"/>
+            <a:off x="6766560" y="2340864"/>
+            <a:ext cx="45720" cy="274320"/>
           </a:xfrm>
           <a:prstGeom prst="rect">
             <a:avLst/>
@@ -7645,24 +7657,24 @@
         </p:nvSpPr>
         <p:spPr>
           <a:xfrm>
-            <a:off x="7936992" y="2322576"/>
-            <a:ext cx="2377440" cy="201168"/>
-          </a:xfrm>
-          <a:prstGeom prst="rect">
-            <a:avLst/>
-          </a:prstGeom>
-          <a:noFill/>
-          <a:ln/>
-        </p:spPr>
-        <p:txBody>
-          <a:bodyPr wrap="square" rtlCol="0" anchor="ctr"/>
+            <a:off x="6922008" y="2313432"/>
+            <a:ext cx="2377440" cy="182880"/>
+          </a:xfrm>
+          <a:prstGeom prst="rect">
+            <a:avLst/>
+          </a:prstGeom>
+          <a:noFill/>
+          <a:ln/>
+        </p:spPr>
+        <p:txBody>
+          <a:bodyPr wrap="square" lIns="0" tIns="0" rIns="0" bIns="0" rtlCol="0" anchor="ctr"/>
           <a:lstStyle/>
           <a:p>
             <a:pPr indent="0" marL="0">
               <a:buNone/>
             </a:pPr>
             <a:r>
-              <a:rPr lang="en-US" sz="1100" b="1" dirty="0">
+              <a:rPr lang="en-US" sz="1050" b="1" dirty="0">
                 <a:solidFill>
                   <a:srgbClr val="F1F6FC"/>
                 </a:solidFill>
@@ -7672,7 +7684,7 @@
               </a:rPr>
               <a:t>TMS</a:t>
             </a:r>
-            <a:endParaRPr lang="en-US" sz="1100" dirty="0"/>
+            <a:endParaRPr lang="en-US" sz="1050" dirty="0"/>
           </a:p>
         </p:txBody>
       </p:sp>
@@ -7684,24 +7696,24 @@
         </p:nvSpPr>
         <p:spPr>
           <a:xfrm>
-            <a:off x="7936992" y="2496312"/>
-            <a:ext cx="2651760" cy="182880"/>
-          </a:xfrm>
-          <a:prstGeom prst="rect">
-            <a:avLst/>
-          </a:prstGeom>
-          <a:noFill/>
-          <a:ln/>
-        </p:spPr>
-        <p:txBody>
-          <a:bodyPr wrap="square" rtlCol="0" anchor="ctr"/>
+            <a:off x="6922008" y="2478024"/>
+            <a:ext cx="2834640" cy="164592"/>
+          </a:xfrm>
+          <a:prstGeom prst="rect">
+            <a:avLst/>
+          </a:prstGeom>
+          <a:noFill/>
+          <a:ln/>
+        </p:spPr>
+        <p:txBody>
+          <a:bodyPr wrap="square" lIns="0" tIns="0" rIns="0" bIns="0" rtlCol="0" anchor="ctr"/>
           <a:lstStyle/>
           <a:p>
             <a:pPr indent="0" marL="0">
               <a:buNone/>
             </a:pPr>
             <a:r>
-              <a:rPr lang="en-US" sz="850" dirty="0">
+              <a:rPr lang="en-US" sz="800" dirty="0">
                 <a:solidFill>
                   <a:srgbClr val="6B819A"/>
                 </a:solidFill>
@@ -7711,7 +7723,7 @@
               </a:rPr>
               <a:t>Track Management System</a:t>
             </a:r>
-            <a:endParaRPr lang="en-US" sz="850" dirty="0"/>
+            <a:endParaRPr lang="en-US" sz="800" dirty="0"/>
           </a:p>
         </p:txBody>
       </p:sp>
@@ -7723,24 +7735,24 @@
         </p:nvSpPr>
         <p:spPr>
           <a:xfrm>
-            <a:off x="10561320" y="2340864"/>
-            <a:ext cx="914400" cy="274320"/>
-          </a:xfrm>
-          <a:prstGeom prst="rect">
-            <a:avLst/>
-          </a:prstGeom>
-          <a:noFill/>
-          <a:ln/>
-        </p:spPr>
-        <p:txBody>
-          <a:bodyPr wrap="square" rtlCol="0" anchor="ctr"/>
+            <a:off x="9829800" y="2331720"/>
+            <a:ext cx="1645920" cy="256032"/>
+          </a:xfrm>
+          <a:prstGeom prst="rect">
+            <a:avLst/>
+          </a:prstGeom>
+          <a:noFill/>
+          <a:ln/>
+        </p:spPr>
+        <p:txBody>
+          <a:bodyPr wrap="square" lIns="0" tIns="0" rIns="0" bIns="0" rtlCol="0" anchor="ctr"/>
           <a:lstStyle/>
           <a:p>
             <a:pPr algn="r" indent="0" marL="0">
               <a:buNone/>
             </a:pPr>
             <a:r>
-              <a:rPr lang="en-US" sz="1300" b="1" dirty="0">
+              <a:rPr lang="en-US" sz="1250" b="1" dirty="0">
                 <a:solidFill>
                   <a:srgbClr val="3B9BE8"/>
                 </a:solidFill>
@@ -7750,7 +7762,7 @@
               </a:rPr>
               <a:t>68</a:t>
             </a:r>
-            <a:endParaRPr lang="en-US" sz="1300" dirty="0"/>
+            <a:endParaRPr lang="en-US" sz="1250" dirty="0"/>
           </a:p>
         </p:txBody>
       </p:sp>
@@ -7762,8 +7774,8 @@
         </p:nvSpPr>
         <p:spPr>
           <a:xfrm>
-            <a:off x="7772400" y="2788920"/>
-            <a:ext cx="45720" cy="292608"/>
+            <a:off x="6766560" y="2724912"/>
+            <a:ext cx="45720" cy="274320"/>
           </a:xfrm>
           <a:prstGeom prst="rect">
             <a:avLst/>
@@ -7782,24 +7794,24 @@
         </p:nvSpPr>
         <p:spPr>
           <a:xfrm>
-            <a:off x="7936992" y="2752344"/>
-            <a:ext cx="2377440" cy="201168"/>
-          </a:xfrm>
-          <a:prstGeom prst="rect">
-            <a:avLst/>
-          </a:prstGeom>
-          <a:noFill/>
-          <a:ln/>
-        </p:spPr>
-        <p:txBody>
-          <a:bodyPr wrap="square" rtlCol="0" anchor="ctr"/>
+            <a:off x="6922008" y="2697480"/>
+            <a:ext cx="2377440" cy="182880"/>
+          </a:xfrm>
+          <a:prstGeom prst="rect">
+            <a:avLst/>
+          </a:prstGeom>
+          <a:noFill/>
+          <a:ln/>
+        </p:spPr>
+        <p:txBody>
+          <a:bodyPr wrap="square" lIns="0" tIns="0" rIns="0" bIns="0" rtlCol="0" anchor="ctr"/>
           <a:lstStyle/>
           <a:p>
             <a:pPr indent="0" marL="0">
               <a:buNone/>
             </a:pPr>
             <a:r>
-              <a:rPr lang="en-US" sz="1100" b="1" dirty="0">
+              <a:rPr lang="en-US" sz="1050" b="1" dirty="0">
                 <a:solidFill>
                   <a:srgbClr val="F1F6FC"/>
                 </a:solidFill>
@@ -7809,7 +7821,7 @@
               </a:rPr>
               <a:t>SMMS</a:t>
             </a:r>
-            <a:endParaRPr lang="en-US" sz="1100" dirty="0"/>
+            <a:endParaRPr lang="en-US" sz="1050" dirty="0"/>
           </a:p>
         </p:txBody>
       </p:sp>
@@ -7821,24 +7833,24 @@
         </p:nvSpPr>
         <p:spPr>
           <a:xfrm>
-            <a:off x="7936992" y="2926080"/>
-            <a:ext cx="2651760" cy="182880"/>
-          </a:xfrm>
-          <a:prstGeom prst="rect">
-            <a:avLst/>
-          </a:prstGeom>
-          <a:noFill/>
-          <a:ln/>
-        </p:spPr>
-        <p:txBody>
-          <a:bodyPr wrap="square" rtlCol="0" anchor="ctr"/>
+            <a:off x="6922008" y="2862072"/>
+            <a:ext cx="2834640" cy="164592"/>
+          </a:xfrm>
+          <a:prstGeom prst="rect">
+            <a:avLst/>
+          </a:prstGeom>
+          <a:noFill/>
+          <a:ln/>
+        </p:spPr>
+        <p:txBody>
+          <a:bodyPr wrap="square" lIns="0" tIns="0" rIns="0" bIns="0" rtlCol="0" anchor="ctr"/>
           <a:lstStyle/>
           <a:p>
             <a:pPr indent="0" marL="0">
               <a:buNone/>
             </a:pPr>
             <a:r>
-              <a:rPr lang="en-US" sz="850" dirty="0">
+              <a:rPr lang="en-US" sz="800" dirty="0">
                 <a:solidFill>
                   <a:srgbClr val="6B819A"/>
                 </a:solidFill>
@@ -7848,7 +7860,7 @@
               </a:rPr>
               <a:t>Signalling Maintenance &amp; Mgmt</a:t>
             </a:r>
-            <a:endParaRPr lang="en-US" sz="850" dirty="0"/>
+            <a:endParaRPr lang="en-US" sz="800" dirty="0"/>
           </a:p>
         </p:txBody>
       </p:sp>
@@ -7860,24 +7872,24 @@
         </p:nvSpPr>
         <p:spPr>
           <a:xfrm>
-            <a:off x="10561320" y="2770632"/>
-            <a:ext cx="914400" cy="274320"/>
-          </a:xfrm>
-          <a:prstGeom prst="rect">
-            <a:avLst/>
-          </a:prstGeom>
-          <a:noFill/>
-          <a:ln/>
-        </p:spPr>
-        <p:txBody>
-          <a:bodyPr wrap="square" rtlCol="0" anchor="ctr"/>
+            <a:off x="9829800" y="2715768"/>
+            <a:ext cx="1645920" cy="256032"/>
+          </a:xfrm>
+          <a:prstGeom prst="rect">
+            <a:avLst/>
+          </a:prstGeom>
+          <a:noFill/>
+          <a:ln/>
+        </p:spPr>
+        <p:txBody>
+          <a:bodyPr wrap="square" lIns="0" tIns="0" rIns="0" bIns="0" rtlCol="0" anchor="ctr"/>
           <a:lstStyle/>
           <a:p>
             <a:pPr algn="r" indent="0" marL="0">
               <a:buNone/>
             </a:pPr>
             <a:r>
-              <a:rPr lang="en-US" sz="1300" b="1" dirty="0">
+              <a:rPr lang="en-US" sz="1250" b="1" dirty="0">
                 <a:solidFill>
                   <a:srgbClr val="A78BFA"/>
                 </a:solidFill>
@@ -7887,7 +7899,7 @@
               </a:rPr>
               <a:t>60</a:t>
             </a:r>
-            <a:endParaRPr lang="en-US" sz="1300" dirty="0"/>
+            <a:endParaRPr lang="en-US" sz="1250" dirty="0"/>
           </a:p>
         </p:txBody>
       </p:sp>
@@ -7899,8 +7911,8 @@
         </p:nvSpPr>
         <p:spPr>
           <a:xfrm>
-            <a:off x="7772400" y="3218688"/>
-            <a:ext cx="45720" cy="292608"/>
+            <a:off x="6766560" y="3108960"/>
+            <a:ext cx="45720" cy="274320"/>
           </a:xfrm>
           <a:prstGeom prst="rect">
             <a:avLst/>
@@ -7919,24 +7931,24 @@
         </p:nvSpPr>
         <p:spPr>
           <a:xfrm>
-            <a:off x="7936992" y="3182112"/>
-            <a:ext cx="2377440" cy="201168"/>
-          </a:xfrm>
-          <a:prstGeom prst="rect">
-            <a:avLst/>
-          </a:prstGeom>
-          <a:noFill/>
-          <a:ln/>
-        </p:spPr>
-        <p:txBody>
-          <a:bodyPr wrap="square" rtlCol="0" anchor="ctr"/>
+            <a:off x="6922008" y="3081528"/>
+            <a:ext cx="2377440" cy="182880"/>
+          </a:xfrm>
+          <a:prstGeom prst="rect">
+            <a:avLst/>
+          </a:prstGeom>
+          <a:noFill/>
+          <a:ln/>
+        </p:spPr>
+        <p:txBody>
+          <a:bodyPr wrap="square" lIns="0" tIns="0" rIns="0" bIns="0" rtlCol="0" anchor="ctr"/>
           <a:lstStyle/>
           <a:p>
             <a:pPr indent="0" marL="0">
               <a:buNone/>
             </a:pPr>
             <a:r>
-              <a:rPr lang="en-US" sz="1100" b="1" dirty="0">
+              <a:rPr lang="en-US" sz="1050" b="1" dirty="0">
                 <a:solidFill>
                   <a:srgbClr val="F1F6FC"/>
                 </a:solidFill>
@@ -7946,7 +7958,7 @@
               </a:rPr>
               <a:t>TDMS</a:t>
             </a:r>
-            <a:endParaRPr lang="en-US" sz="1100" dirty="0"/>
+            <a:endParaRPr lang="en-US" sz="1050" dirty="0"/>
           </a:p>
         </p:txBody>
       </p:sp>
@@ -7958,24 +7970,24 @@
         </p:nvSpPr>
         <p:spPr>
           <a:xfrm>
-            <a:off x="7936992" y="3355848"/>
-            <a:ext cx="2651760" cy="182880"/>
-          </a:xfrm>
-          <a:prstGeom prst="rect">
-            <a:avLst/>
-          </a:prstGeom>
-          <a:noFill/>
-          <a:ln/>
-        </p:spPr>
-        <p:txBody>
-          <a:bodyPr wrap="square" rtlCol="0" anchor="ctr"/>
+            <a:off x="6922008" y="3246120"/>
+            <a:ext cx="2834640" cy="164592"/>
+          </a:xfrm>
+          <a:prstGeom prst="rect">
+            <a:avLst/>
+          </a:prstGeom>
+          <a:noFill/>
+          <a:ln/>
+        </p:spPr>
+        <p:txBody>
+          <a:bodyPr wrap="square" lIns="0" tIns="0" rIns="0" bIns="0" rtlCol="0" anchor="ctr"/>
           <a:lstStyle/>
           <a:p>
             <a:pPr indent="0" marL="0">
               <a:buNone/>
             </a:pPr>
             <a:r>
-              <a:rPr lang="en-US" sz="850" dirty="0">
+              <a:rPr lang="en-US" sz="800" dirty="0">
                 <a:solidFill>
                   <a:srgbClr val="6B819A"/>
                 </a:solidFill>
@@ -7985,7 +7997,7 @@
               </a:rPr>
               <a:t>Traction Distribution Mgmt</a:t>
             </a:r>
-            <a:endParaRPr lang="en-US" sz="850" dirty="0"/>
+            <a:endParaRPr lang="en-US" sz="800" dirty="0"/>
           </a:p>
         </p:txBody>
       </p:sp>
@@ -7997,24 +8009,24 @@
         </p:nvSpPr>
         <p:spPr>
           <a:xfrm>
-            <a:off x="10561320" y="3200400"/>
-            <a:ext cx="914400" cy="274320"/>
-          </a:xfrm>
-          <a:prstGeom prst="rect">
-            <a:avLst/>
-          </a:prstGeom>
-          <a:noFill/>
-          <a:ln/>
-        </p:spPr>
-        <p:txBody>
-          <a:bodyPr wrap="square" rtlCol="0" anchor="ctr"/>
+            <a:off x="9829800" y="3099816"/>
+            <a:ext cx="1645920" cy="256032"/>
+          </a:xfrm>
+          <a:prstGeom prst="rect">
+            <a:avLst/>
+          </a:prstGeom>
+          <a:noFill/>
+          <a:ln/>
+        </p:spPr>
+        <p:txBody>
+          <a:bodyPr wrap="square" lIns="0" tIns="0" rIns="0" bIns="0" rtlCol="0" anchor="ctr"/>
           <a:lstStyle/>
           <a:p>
             <a:pPr algn="r" indent="0" marL="0">
               <a:buNone/>
             </a:pPr>
             <a:r>
-              <a:rPr lang="en-US" sz="1300" b="1" dirty="0">
+              <a:rPr lang="en-US" sz="1250" b="1" dirty="0">
                 <a:solidFill>
                   <a:srgbClr val="F0A93B"/>
                 </a:solidFill>
@@ -8024,7 +8036,7 @@
               </a:rPr>
               <a:t>59</a:t>
             </a:r>
-            <a:endParaRPr lang="en-US" sz="1300" dirty="0"/>
+            <a:endParaRPr lang="en-US" sz="1250" dirty="0"/>
           </a:p>
         </p:txBody>
       </p:sp>
@@ -8036,8 +8048,8 @@
         </p:nvSpPr>
         <p:spPr>
           <a:xfrm>
-            <a:off x="7772400" y="3648456"/>
-            <a:ext cx="45720" cy="292608"/>
+            <a:off x="6766560" y="3493008"/>
+            <a:ext cx="45720" cy="274320"/>
           </a:xfrm>
           <a:prstGeom prst="rect">
             <a:avLst/>
@@ -8056,24 +8068,24 @@
         </p:nvSpPr>
         <p:spPr>
           <a:xfrm>
-            <a:off x="7936992" y="3611880"/>
-            <a:ext cx="2377440" cy="201168"/>
-          </a:xfrm>
-          <a:prstGeom prst="rect">
-            <a:avLst/>
-          </a:prstGeom>
-          <a:noFill/>
-          <a:ln/>
-        </p:spPr>
-        <p:txBody>
-          <a:bodyPr wrap="square" rtlCol="0" anchor="ctr"/>
+            <a:off x="6922008" y="3465576"/>
+            <a:ext cx="2377440" cy="182880"/>
+          </a:xfrm>
+          <a:prstGeom prst="rect">
+            <a:avLst/>
+          </a:prstGeom>
+          <a:noFill/>
+          <a:ln/>
+        </p:spPr>
+        <p:txBody>
+          <a:bodyPr wrap="square" lIns="0" tIns="0" rIns="0" bIns="0" rtlCol="0" anchor="ctr"/>
           <a:lstStyle/>
           <a:p>
             <a:pPr indent="0" marL="0">
               <a:buNone/>
             </a:pPr>
             <a:r>
-              <a:rPr lang="en-US" sz="1100" b="1" dirty="0">
+              <a:rPr lang="en-US" sz="1050" b="1" dirty="0">
                 <a:solidFill>
                   <a:srgbClr val="F1F6FC"/>
                 </a:solidFill>
@@ -8083,7 +8095,7 @@
               </a:rPr>
               <a:t>COA</a:t>
             </a:r>
-            <a:endParaRPr lang="en-US" sz="1100" dirty="0"/>
+            <a:endParaRPr lang="en-US" sz="1050" dirty="0"/>
           </a:p>
         </p:txBody>
       </p:sp>
@@ -8095,24 +8107,24 @@
         </p:nvSpPr>
         <p:spPr>
           <a:xfrm>
-            <a:off x="7936992" y="3785616"/>
-            <a:ext cx="2651760" cy="182880"/>
-          </a:xfrm>
-          <a:prstGeom prst="rect">
-            <a:avLst/>
-          </a:prstGeom>
-          <a:noFill/>
-          <a:ln/>
-        </p:spPr>
-        <p:txBody>
-          <a:bodyPr wrap="square" rtlCol="0" anchor="ctr"/>
+            <a:off x="6922008" y="3630168"/>
+            <a:ext cx="2834640" cy="164592"/>
+          </a:xfrm>
+          <a:prstGeom prst="rect">
+            <a:avLst/>
+          </a:prstGeom>
+          <a:noFill/>
+          <a:ln/>
+        </p:spPr>
+        <p:txBody>
+          <a:bodyPr wrap="square" lIns="0" tIns="0" rIns="0" bIns="0" rtlCol="0" anchor="ctr"/>
           <a:lstStyle/>
           <a:p>
             <a:pPr indent="0" marL="0">
               <a:buNone/>
             </a:pPr>
             <a:r>
-              <a:rPr lang="en-US" sz="850" dirty="0">
+              <a:rPr lang="en-US" sz="800" dirty="0">
                 <a:solidFill>
                   <a:srgbClr val="6B819A"/>
                 </a:solidFill>
@@ -8122,7 +8134,7 @@
               </a:rPr>
               <a:t>Control Office Application</a:t>
             </a:r>
-            <a:endParaRPr lang="en-US" sz="850" dirty="0"/>
+            <a:endParaRPr lang="en-US" sz="800" dirty="0"/>
           </a:p>
         </p:txBody>
       </p:sp>
@@ -8134,24 +8146,24 @@
         </p:nvSpPr>
         <p:spPr>
           <a:xfrm>
-            <a:off x="10561320" y="3630168"/>
-            <a:ext cx="914400" cy="274320"/>
-          </a:xfrm>
-          <a:prstGeom prst="rect">
-            <a:avLst/>
-          </a:prstGeom>
-          <a:noFill/>
-          <a:ln/>
-        </p:spPr>
-        <p:txBody>
-          <a:bodyPr wrap="square" rtlCol="0" anchor="ctr"/>
+            <a:off x="9829800" y="3483864"/>
+            <a:ext cx="1645920" cy="256032"/>
+          </a:xfrm>
+          <a:prstGeom prst="rect">
+            <a:avLst/>
+          </a:prstGeom>
+          <a:noFill/>
+          <a:ln/>
+        </p:spPr>
+        <p:txBody>
+          <a:bodyPr wrap="square" lIns="0" tIns="0" rIns="0" bIns="0" rtlCol="0" anchor="ctr"/>
           <a:lstStyle/>
           <a:p>
             <a:pPr algn="r" indent="0" marL="0">
               <a:buNone/>
             </a:pPr>
             <a:r>
-              <a:rPr lang="en-US" sz="1300" b="1" dirty="0">
+              <a:rPr lang="en-US" sz="1250" b="1" dirty="0">
                 <a:solidFill>
                   <a:srgbClr val="2DD4BF"/>
                 </a:solidFill>
@@ -8161,7 +8173,7 @@
               </a:rPr>
               <a:t>315</a:t>
             </a:r>
-            <a:endParaRPr lang="en-US" sz="1300" dirty="0"/>
+            <a:endParaRPr lang="en-US" sz="1250" dirty="0"/>
           </a:p>
         </p:txBody>
       </p:sp>
@@ -8173,8 +8185,8 @@
         </p:nvSpPr>
         <p:spPr>
           <a:xfrm>
-            <a:off x="7772400" y="4078224"/>
-            <a:ext cx="45720" cy="292608"/>
+            <a:off x="6766560" y="3877056"/>
+            <a:ext cx="45720" cy="274320"/>
           </a:xfrm>
           <a:prstGeom prst="rect">
             <a:avLst/>
@@ -8193,24 +8205,24 @@
         </p:nvSpPr>
         <p:spPr>
           <a:xfrm>
-            <a:off x="7936992" y="4041648"/>
-            <a:ext cx="2377440" cy="201168"/>
-          </a:xfrm>
-          <a:prstGeom prst="rect">
-            <a:avLst/>
-          </a:prstGeom>
-          <a:noFill/>
-          <a:ln/>
-        </p:spPr>
-        <p:txBody>
-          <a:bodyPr wrap="square" rtlCol="0" anchor="ctr"/>
+            <a:off x="6922008" y="3849624"/>
+            <a:ext cx="2377440" cy="182880"/>
+          </a:xfrm>
+          <a:prstGeom prst="rect">
+            <a:avLst/>
+          </a:prstGeom>
+          <a:noFill/>
+          <a:ln/>
+        </p:spPr>
+        <p:txBody>
+          <a:bodyPr wrap="square" lIns="0" tIns="0" rIns="0" bIns="0" rtlCol="0" anchor="ctr"/>
           <a:lstStyle/>
           <a:p>
             <a:pPr indent="0" marL="0">
               <a:buNone/>
             </a:pPr>
             <a:r>
-              <a:rPr lang="en-US" sz="1100" b="1" dirty="0">
+              <a:rPr lang="en-US" sz="1050" b="1" dirty="0">
                 <a:solidFill>
                   <a:srgbClr val="F1F6FC"/>
                 </a:solidFill>
@@ -8220,7 +8232,7 @@
               </a:rPr>
               <a:t>TIMETABLE</a:t>
             </a:r>
-            <a:endParaRPr lang="en-US" sz="1100" dirty="0"/>
+            <a:endParaRPr lang="en-US" sz="1050" dirty="0"/>
           </a:p>
         </p:txBody>
       </p:sp>
@@ -8232,24 +8244,24 @@
         </p:nvSpPr>
         <p:spPr>
           <a:xfrm>
-            <a:off x="7936992" y="4215384"/>
-            <a:ext cx="2651760" cy="182880"/>
-          </a:xfrm>
-          <a:prstGeom prst="rect">
-            <a:avLst/>
-          </a:prstGeom>
-          <a:noFill/>
-          <a:ln/>
-        </p:spPr>
-        <p:txBody>
-          <a:bodyPr wrap="square" rtlCol="0" anchor="ctr"/>
+            <a:off x="6922008" y="4014216"/>
+            <a:ext cx="2834640" cy="164592"/>
+          </a:xfrm>
+          <a:prstGeom prst="rect">
+            <a:avLst/>
+          </a:prstGeom>
+          <a:noFill/>
+          <a:ln/>
+        </p:spPr>
+        <p:txBody>
+          <a:bodyPr wrap="square" lIns="0" tIns="0" rIns="0" bIns="0" rtlCol="0" anchor="ctr"/>
           <a:lstStyle/>
           <a:p>
             <a:pPr indent="0" marL="0">
               <a:buNone/>
             </a:pPr>
             <a:r>
-              <a:rPr lang="en-US" sz="850" dirty="0">
+              <a:rPr lang="en-US" sz="800" dirty="0">
                 <a:solidFill>
                   <a:srgbClr val="6B819A"/>
                 </a:solidFill>
@@ -8259,7 +8271,7 @@
               </a:rPr>
               <a:t>Train Time Table</a:t>
             </a:r>
-            <a:endParaRPr lang="en-US" sz="850" dirty="0"/>
+            <a:endParaRPr lang="en-US" sz="800" dirty="0"/>
           </a:p>
         </p:txBody>
       </p:sp>
@@ -8271,24 +8283,24 @@
         </p:nvSpPr>
         <p:spPr>
           <a:xfrm>
-            <a:off x="10561320" y="4059936"/>
-            <a:ext cx="914400" cy="274320"/>
-          </a:xfrm>
-          <a:prstGeom prst="rect">
-            <a:avLst/>
-          </a:prstGeom>
-          <a:noFill/>
-          <a:ln/>
-        </p:spPr>
-        <p:txBody>
-          <a:bodyPr wrap="square" rtlCol="0" anchor="ctr"/>
+            <a:off x="9829800" y="3867912"/>
+            <a:ext cx="1645920" cy="256032"/>
+          </a:xfrm>
+          <a:prstGeom prst="rect">
+            <a:avLst/>
+          </a:prstGeom>
+          <a:noFill/>
+          <a:ln/>
+        </p:spPr>
+        <p:txBody>
+          <a:bodyPr wrap="square" lIns="0" tIns="0" rIns="0" bIns="0" rtlCol="0" anchor="ctr"/>
           <a:lstStyle/>
           <a:p>
             <a:pPr algn="r" indent="0" marL="0">
               <a:buNone/>
             </a:pPr>
             <a:r>
-              <a:rPr lang="en-US" sz="1300" b="1" dirty="0">
+              <a:rPr lang="en-US" sz="1250" b="1" dirty="0">
                 <a:solidFill>
                   <a:srgbClr val="34D399"/>
                 </a:solidFill>
@@ -8298,7 +8310,7 @@
               </a:rPr>
               <a:t>1,007</a:t>
             </a:r>
-            <a:endParaRPr lang="en-US" sz="1300" dirty="0"/>
+            <a:endParaRPr lang="en-US" sz="1250" dirty="0"/>
           </a:p>
         </p:txBody>
       </p:sp>
@@ -8310,8 +8322,8 @@
         </p:nvSpPr>
         <p:spPr>
           <a:xfrm>
-            <a:off x="7772400" y="4507992"/>
-            <a:ext cx="45720" cy="292608"/>
+            <a:off x="6766560" y="4261104"/>
+            <a:ext cx="45720" cy="274320"/>
           </a:xfrm>
           <a:prstGeom prst="rect">
             <a:avLst/>
@@ -8330,24 +8342,24 @@
         </p:nvSpPr>
         <p:spPr>
           <a:xfrm>
-            <a:off x="7936992" y="4471416"/>
-            <a:ext cx="2377440" cy="201168"/>
-          </a:xfrm>
-          <a:prstGeom prst="rect">
-            <a:avLst/>
-          </a:prstGeom>
-          <a:noFill/>
-          <a:ln/>
-        </p:spPr>
-        <p:txBody>
-          <a:bodyPr wrap="square" rtlCol="0" anchor="ctr"/>
+            <a:off x="6922008" y="4233672"/>
+            <a:ext cx="2377440" cy="182880"/>
+          </a:xfrm>
+          <a:prstGeom prst="rect">
+            <a:avLst/>
+          </a:prstGeom>
+          <a:noFill/>
+          <a:ln/>
+        </p:spPr>
+        <p:txBody>
+          <a:bodyPr wrap="square" lIns="0" tIns="0" rIns="0" bIns="0" rtlCol="0" anchor="ctr"/>
           <a:lstStyle/>
           <a:p>
             <a:pPr indent="0" marL="0">
               <a:buNone/>
             </a:pPr>
             <a:r>
-              <a:rPr lang="en-US" sz="1100" b="1" dirty="0">
+              <a:rPr lang="en-US" sz="1050" b="1" dirty="0">
                 <a:solidFill>
                   <a:srgbClr val="F1F6FC"/>
                 </a:solidFill>
@@ -8357,7 +8369,7 @@
               </a:rPr>
               <a:t>GOODS_FORECAST</a:t>
             </a:r>
-            <a:endParaRPr lang="en-US" sz="1100" dirty="0"/>
+            <a:endParaRPr lang="en-US" sz="1050" dirty="0"/>
           </a:p>
         </p:txBody>
       </p:sp>
@@ -8369,24 +8381,24 @@
         </p:nvSpPr>
         <p:spPr>
           <a:xfrm>
-            <a:off x="7936992" y="4645152"/>
-            <a:ext cx="2651760" cy="182880"/>
-          </a:xfrm>
-          <a:prstGeom prst="rect">
-            <a:avLst/>
-          </a:prstGeom>
-          <a:noFill/>
-          <a:ln/>
-        </p:spPr>
-        <p:txBody>
-          <a:bodyPr wrap="square" rtlCol="0" anchor="ctr"/>
+            <a:off x="6922008" y="4398264"/>
+            <a:ext cx="2834640" cy="164592"/>
+          </a:xfrm>
+          <a:prstGeom prst="rect">
+            <a:avLst/>
+          </a:prstGeom>
+          <a:noFill/>
+          <a:ln/>
+        </p:spPr>
+        <p:txBody>
+          <a:bodyPr wrap="square" lIns="0" tIns="0" rIns="0" bIns="0" rtlCol="0" anchor="ctr"/>
           <a:lstStyle/>
           <a:p>
             <a:pPr indent="0" marL="0">
               <a:buNone/>
             </a:pPr>
             <a:r>
-              <a:rPr lang="en-US" sz="850" dirty="0">
+              <a:rPr lang="en-US" sz="800" dirty="0">
                 <a:solidFill>
                   <a:srgbClr val="6B819A"/>
                 </a:solidFill>
@@ -8396,7 +8408,7 @@
               </a:rPr>
               <a:t>Goods-train forecast</a:t>
             </a:r>
-            <a:endParaRPr lang="en-US" sz="850" dirty="0"/>
+            <a:endParaRPr lang="en-US" sz="800" dirty="0"/>
           </a:p>
         </p:txBody>
       </p:sp>
@@ -8408,24 +8420,24 @@
         </p:nvSpPr>
         <p:spPr>
           <a:xfrm>
-            <a:off x="10561320" y="4489704"/>
-            <a:ext cx="914400" cy="274320"/>
-          </a:xfrm>
-          <a:prstGeom prst="rect">
-            <a:avLst/>
-          </a:prstGeom>
-          <a:noFill/>
-          <a:ln/>
-        </p:spPr>
-        <p:txBody>
-          <a:bodyPr wrap="square" rtlCol="0" anchor="ctr"/>
+            <a:off x="9829800" y="4251960"/>
+            <a:ext cx="1645920" cy="256032"/>
+          </a:xfrm>
+          <a:prstGeom prst="rect">
+            <a:avLst/>
+          </a:prstGeom>
+          <a:noFill/>
+          <a:ln/>
+        </p:spPr>
+        <p:txBody>
+          <a:bodyPr wrap="square" lIns="0" tIns="0" rIns="0" bIns="0" rtlCol="0" anchor="ctr"/>
           <a:lstStyle/>
           <a:p>
             <a:pPr algn="r" indent="0" marL="0">
               <a:buNone/>
             </a:pPr>
             <a:r>
-              <a:rPr lang="en-US" sz="1300" b="1" dirty="0">
+              <a:rPr lang="en-US" sz="1250" b="1" dirty="0">
                 <a:solidFill>
                   <a:srgbClr val="F0616D"/>
                 </a:solidFill>
@@ -8435,7 +8447,7 @@
               </a:rPr>
               <a:t>980</a:t>
             </a:r>
-            <a:endParaRPr lang="en-US" sz="1300" dirty="0"/>
+            <a:endParaRPr lang="en-US" sz="1250" dirty="0"/>
           </a:p>
         </p:txBody>
       </p:sp>
@@ -8447,12 +8459,12 @@
         </p:nvSpPr>
         <p:spPr>
           <a:xfrm>
-            <a:off x="7543800" y="5148072"/>
-            <a:ext cx="4178808" cy="1600200"/>
+            <a:off x="6537960" y="4828032"/>
+            <a:ext cx="5184648" cy="1298448"/>
           </a:xfrm>
           <a:prstGeom prst="roundRect">
             <a:avLst>
-              <a:gd name="adj" fmla="val 4571"/>
+              <a:gd name="adj" fmla="val 5634"/>
             </a:avLst>
           </a:prstGeom>
           <a:solidFill>
@@ -8474,7 +8486,7 @@
         </p:nvSpPr>
         <p:spPr>
           <a:xfrm>
-            <a:off x="7543800" y="5349240"/>
+            <a:off x="6537960" y="5010912"/>
             <a:ext cx="45720" cy="256032"/>
           </a:xfrm>
           <a:prstGeom prst="rect">
@@ -8494,17 +8506,17 @@
         </p:nvSpPr>
         <p:spPr>
           <a:xfrm>
-            <a:off x="7763256" y="5330952"/>
-            <a:ext cx="3776472" cy="274320"/>
-          </a:xfrm>
-          <a:prstGeom prst="rect">
-            <a:avLst/>
-          </a:prstGeom>
-          <a:noFill/>
-          <a:ln/>
-        </p:spPr>
-        <p:txBody>
-          <a:bodyPr wrap="square" rtlCol="0" anchor="ctr"/>
+            <a:off x="6757416" y="4992624"/>
+            <a:ext cx="4782312" cy="274320"/>
+          </a:xfrm>
+          <a:prstGeom prst="rect">
+            <a:avLst/>
+          </a:prstGeom>
+          <a:noFill/>
+          <a:ln/>
+        </p:spPr>
+        <p:txBody>
+          <a:bodyPr wrap="square" lIns="0" tIns="0" rIns="0" bIns="0" rtlCol="0" anchor="ctr"/>
           <a:lstStyle/>
           <a:p>
             <a:pPr indent="0" marL="0">
@@ -8533,28 +8545,28 @@
         </p:nvSpPr>
         <p:spPr>
           <a:xfrm>
-            <a:off x="7799832" y="5733288"/>
-            <a:ext cx="3721608" cy="868680"/>
-          </a:xfrm>
-          <a:prstGeom prst="rect">
-            <a:avLst/>
-          </a:prstGeom>
-          <a:noFill/>
-          <a:ln/>
-        </p:spPr>
-        <p:txBody>
-          <a:bodyPr wrap="square" rtlCol="0" anchor="t"/>
+            <a:off x="6775704" y="5376672"/>
+            <a:ext cx="4745736" cy="621792"/>
+          </a:xfrm>
+          <a:prstGeom prst="rect">
+            <a:avLst/>
+          </a:prstGeom>
+          <a:noFill/>
+          <a:ln/>
+        </p:spPr>
+        <p:txBody>
+          <a:bodyPr wrap="square" lIns="0" tIns="0" rIns="0" bIns="0" rtlCol="0" anchor="t"/>
           <a:lstStyle/>
           <a:p>
             <a:pPr marL="342900" indent="-342900">
               <a:lnSpc>
-                <a:spcPts val="1800"/>
+                <a:spcPts val="1188"/>
               </a:lnSpc>
               <a:buSzPct val="100000"/>
               <a:buChar char="•"/>
             </a:pPr>
             <a:r>
-              <a:rPr lang="en-US" sz="1100" dirty="0">
+              <a:rPr lang="en-US" sz="900" dirty="0">
                 <a:solidFill>
                   <a:srgbClr val="9DB2C8"/>
                 </a:solidFill>
@@ -8564,18 +8576,18 @@
               </a:rPr>
               <a:t>Zod-validated input; accepted and rejected counts recorded per sync run.</a:t>
             </a:r>
-            <a:endParaRPr lang="en-US" sz="1100" dirty="0"/>
+            <a:endParaRPr lang="en-US" sz="900" dirty="0"/>
           </a:p>
           <a:p>
             <a:pPr marL="342900" indent="-342900">
               <a:lnSpc>
-                <a:spcPts val="1800"/>
+                <a:spcPts val="1188"/>
               </a:lnSpc>
               <a:buSzPct val="100000"/>
               <a:buChar char="•"/>
             </a:pPr>
             <a:r>
-              <a:rPr lang="en-US" sz="1100" dirty="0">
+              <a:rPr lang="en-US" sz="900" dirty="0">
                 <a:solidFill>
                   <a:srgbClr val="9DB2C8"/>
                 </a:solidFill>
@@ -8585,18 +8597,18 @@
               </a:rPr>
               <a:t>Idempotent upsert — re-loading a feed changes nothing.</a:t>
             </a:r>
-            <a:endParaRPr lang="en-US" sz="1100" dirty="0"/>
+            <a:endParaRPr lang="en-US" sz="900" dirty="0"/>
           </a:p>
           <a:p>
             <a:pPr marL="342900" indent="-342900">
               <a:lnSpc>
-                <a:spcPts val="1800"/>
+                <a:spcPts val="1188"/>
               </a:lnSpc>
               <a:buSzPct val="100000"/>
               <a:buChar char="•"/>
             </a:pPr>
             <a:r>
-              <a:rPr lang="en-US" sz="1100" dirty="0">
+              <a:rPr lang="en-US" sz="900" dirty="0">
                 <a:solidFill>
                   <a:srgbClr val="9DB2C8"/>
                 </a:solidFill>
@@ -8606,7 +8618,7 @@
               </a:rPr>
               <a:t>Fixtures are deterministic and labelled synthetic on every screen.</a:t>
             </a:r>
-            <a:endParaRPr lang="en-US" sz="1100" dirty="0"/>
+            <a:endParaRPr lang="en-US" sz="900" dirty="0"/>
           </a:p>
         </p:txBody>
       </p:sp>
@@ -8817,7 +8829,7 @@
         <p:spPr>
           <a:xfrm>
             <a:off x="502920" y="1810512"/>
-            <a:ext cx="6766560" cy="4699000"/>
+            <a:ext cx="5806440" cy="4032250"/>
           </a:xfrm>
           <a:prstGeom prst="rect">
             <a:avLst/>
@@ -8833,7 +8845,7 @@
         <p:spPr>
           <a:xfrm>
             <a:off x="502920" y="1810512"/>
-            <a:ext cx="6766560" cy="4699000"/>
+            <a:ext cx="5806440" cy="4032250"/>
           </a:xfrm>
           <a:prstGeom prst="rect">
             <a:avLst/>
@@ -8854,8 +8866,8 @@
         </p:nvSpPr>
         <p:spPr>
           <a:xfrm>
-            <a:off x="502920" y="6564376"/>
-            <a:ext cx="6766560" cy="256032"/>
+            <a:off x="502920" y="5897626"/>
+            <a:ext cx="5806440" cy="256032"/>
           </a:xfrm>
           <a:prstGeom prst="rect">
             <a:avLst/>
@@ -8893,12 +8905,12 @@
         </p:nvSpPr>
         <p:spPr>
           <a:xfrm>
-            <a:off x="7543800" y="1810512"/>
-            <a:ext cx="4178808" cy="2194560"/>
+            <a:off x="6537960" y="1810512"/>
+            <a:ext cx="5184648" cy="2240280"/>
           </a:xfrm>
           <a:prstGeom prst="roundRect">
             <a:avLst>
-              <a:gd name="adj" fmla="val 3333"/>
+              <a:gd name="adj" fmla="val 3265"/>
             </a:avLst>
           </a:prstGeom>
           <a:solidFill>
@@ -8920,17 +8932,17 @@
         </p:nvSpPr>
         <p:spPr>
           <a:xfrm>
-            <a:off x="7772400" y="1956816"/>
-            <a:ext cx="3703320" cy="237744"/>
-          </a:xfrm>
-          <a:prstGeom prst="rect">
-            <a:avLst/>
-          </a:prstGeom>
-          <a:noFill/>
-          <a:ln/>
-        </p:spPr>
-        <p:txBody>
-          <a:bodyPr wrap="square" rtlCol="0" anchor="ctr"/>
+            <a:off x="6766560" y="1947672"/>
+            <a:ext cx="4727448" cy="237744"/>
+          </a:xfrm>
+          <a:prstGeom prst="rect">
+            <a:avLst/>
+          </a:prstGeom>
+          <a:noFill/>
+          <a:ln/>
+        </p:spPr>
+        <p:txBody>
+          <a:bodyPr wrap="square" lIns="0" tIns="0" rIns="0" bIns="0" rtlCol="0" anchor="ctr"/>
           <a:lstStyle/>
           <a:p>
             <a:pPr indent="0" marL="0">
@@ -8959,20 +8971,23 @@
         </p:nvSpPr>
         <p:spPr>
           <a:xfrm>
-            <a:off x="7772400" y="2212848"/>
-            <a:ext cx="3703320" cy="457200"/>
-          </a:xfrm>
-          <a:prstGeom prst="rect">
-            <a:avLst/>
-          </a:prstGeom>
-          <a:noFill/>
-          <a:ln/>
-        </p:spPr>
-        <p:txBody>
-          <a:bodyPr wrap="square" rtlCol="0" anchor="ctr"/>
+            <a:off x="6766560" y="2212848"/>
+            <a:ext cx="4727448" cy="402336"/>
+          </a:xfrm>
+          <a:prstGeom prst="rect">
+            <a:avLst/>
+          </a:prstGeom>
+          <a:noFill/>
+          <a:ln/>
+        </p:spPr>
+        <p:txBody>
+          <a:bodyPr wrap="square" lIns="0" tIns="0" rIns="0" bIns="0" rtlCol="0" anchor="ctr"/>
           <a:lstStyle/>
           <a:p>
             <a:pPr indent="0" marL="0">
+              <a:lnSpc>
+                <a:spcPts val="1300"/>
+              </a:lnSpc>
               <a:buNone/>
             </a:pPr>
             <a:r>
@@ -8998,17 +9013,17 @@
         </p:nvSpPr>
         <p:spPr>
           <a:xfrm>
-            <a:off x="7772400" y="2743200"/>
-            <a:ext cx="2651760" cy="256032"/>
-          </a:xfrm>
-          <a:prstGeom prst="rect">
-            <a:avLst/>
-          </a:prstGeom>
-          <a:noFill/>
-          <a:ln/>
-        </p:spPr>
-        <p:txBody>
-          <a:bodyPr wrap="square" rtlCol="0" anchor="ctr"/>
+            <a:off x="6766560" y="2670048"/>
+            <a:ext cx="2743200" cy="237744"/>
+          </a:xfrm>
+          <a:prstGeom prst="rect">
+            <a:avLst/>
+          </a:prstGeom>
+          <a:noFill/>
+          <a:ln/>
+        </p:spPr>
+        <p:txBody>
+          <a:bodyPr wrap="square" lIns="0" tIns="0" rIns="0" bIns="0" rtlCol="0" anchor="ctr"/>
           <a:lstStyle/>
           <a:p>
             <a:pPr indent="0" marL="0">
@@ -9037,17 +9052,17 @@
         </p:nvSpPr>
         <p:spPr>
           <a:xfrm>
-            <a:off x="10287000" y="2743200"/>
-            <a:ext cx="1188720" cy="256032"/>
-          </a:xfrm>
-          <a:prstGeom prst="rect">
-            <a:avLst/>
-          </a:prstGeom>
-          <a:noFill/>
-          <a:ln/>
-        </p:spPr>
-        <p:txBody>
-          <a:bodyPr wrap="square" rtlCol="0" anchor="ctr"/>
+            <a:off x="9555480" y="2670048"/>
+            <a:ext cx="1938528" cy="237744"/>
+          </a:xfrm>
+          <a:prstGeom prst="rect">
+            <a:avLst/>
+          </a:prstGeom>
+          <a:noFill/>
+          <a:ln/>
+        </p:spPr>
+        <p:txBody>
+          <a:bodyPr wrap="square" lIns="0" tIns="0" rIns="0" bIns="0" rtlCol="0" anchor="ctr"/>
           <a:lstStyle/>
           <a:p>
             <a:pPr algn="r" indent="0" marL="0">
@@ -9076,17 +9091,17 @@
         </p:nvSpPr>
         <p:spPr>
           <a:xfrm>
-            <a:off x="7772400" y="3035808"/>
-            <a:ext cx="2651760" cy="256032"/>
-          </a:xfrm>
-          <a:prstGeom prst="rect">
-            <a:avLst/>
-          </a:prstGeom>
-          <a:noFill/>
-          <a:ln/>
-        </p:spPr>
-        <p:txBody>
-          <a:bodyPr wrap="square" rtlCol="0" anchor="ctr"/>
+            <a:off x="6766560" y="2935224"/>
+            <a:ext cx="2743200" cy="237744"/>
+          </a:xfrm>
+          <a:prstGeom prst="rect">
+            <a:avLst/>
+          </a:prstGeom>
+          <a:noFill/>
+          <a:ln/>
+        </p:spPr>
+        <p:txBody>
+          <a:bodyPr wrap="square" lIns="0" tIns="0" rIns="0" bIns="0" rtlCol="0" anchor="ctr"/>
           <a:lstStyle/>
           <a:p>
             <a:pPr indent="0" marL="0">
@@ -9115,17 +9130,17 @@
         </p:nvSpPr>
         <p:spPr>
           <a:xfrm>
-            <a:off x="10287000" y="3035808"/>
-            <a:ext cx="1188720" cy="256032"/>
-          </a:xfrm>
-          <a:prstGeom prst="rect">
-            <a:avLst/>
-          </a:prstGeom>
-          <a:noFill/>
-          <a:ln/>
-        </p:spPr>
-        <p:txBody>
-          <a:bodyPr wrap="square" rtlCol="0" anchor="ctr"/>
+            <a:off x="9555480" y="2935224"/>
+            <a:ext cx="1938528" cy="237744"/>
+          </a:xfrm>
+          <a:prstGeom prst="rect">
+            <a:avLst/>
+          </a:prstGeom>
+          <a:noFill/>
+          <a:ln/>
+        </p:spPr>
+        <p:txBody>
+          <a:bodyPr wrap="square" lIns="0" tIns="0" rIns="0" bIns="0" rtlCol="0" anchor="ctr"/>
           <a:lstStyle/>
           <a:p>
             <a:pPr algn="r" indent="0" marL="0">
@@ -9154,17 +9169,17 @@
         </p:nvSpPr>
         <p:spPr>
           <a:xfrm>
-            <a:off x="7772400" y="3328416"/>
-            <a:ext cx="2651760" cy="256032"/>
-          </a:xfrm>
-          <a:prstGeom prst="rect">
-            <a:avLst/>
-          </a:prstGeom>
-          <a:noFill/>
-          <a:ln/>
-        </p:spPr>
-        <p:txBody>
-          <a:bodyPr wrap="square" rtlCol="0" anchor="ctr"/>
+            <a:off x="6766560" y="3200400"/>
+            <a:ext cx="2743200" cy="237744"/>
+          </a:xfrm>
+          <a:prstGeom prst="rect">
+            <a:avLst/>
+          </a:prstGeom>
+          <a:noFill/>
+          <a:ln/>
+        </p:spPr>
+        <p:txBody>
+          <a:bodyPr wrap="square" lIns="0" tIns="0" rIns="0" bIns="0" rtlCol="0" anchor="ctr"/>
           <a:lstStyle/>
           <a:p>
             <a:pPr indent="0" marL="0">
@@ -9193,17 +9208,17 @@
         </p:nvSpPr>
         <p:spPr>
           <a:xfrm>
-            <a:off x="10287000" y="3328416"/>
-            <a:ext cx="1188720" cy="256032"/>
-          </a:xfrm>
-          <a:prstGeom prst="rect">
-            <a:avLst/>
-          </a:prstGeom>
-          <a:noFill/>
-          <a:ln/>
-        </p:spPr>
-        <p:txBody>
-          <a:bodyPr wrap="square" rtlCol="0" anchor="ctr"/>
+            <a:off x="9555480" y="3200400"/>
+            <a:ext cx="1938528" cy="237744"/>
+          </a:xfrm>
+          <a:prstGeom prst="rect">
+            <a:avLst/>
+          </a:prstGeom>
+          <a:noFill/>
+          <a:ln/>
+        </p:spPr>
+        <p:txBody>
+          <a:bodyPr wrap="square" lIns="0" tIns="0" rIns="0" bIns="0" rtlCol="0" anchor="ctr"/>
           <a:lstStyle/>
           <a:p>
             <a:pPr algn="r" indent="0" marL="0">
@@ -9232,17 +9247,17 @@
         </p:nvSpPr>
         <p:spPr>
           <a:xfrm>
-            <a:off x="7772400" y="3621024"/>
-            <a:ext cx="2651760" cy="256032"/>
-          </a:xfrm>
-          <a:prstGeom prst="rect">
-            <a:avLst/>
-          </a:prstGeom>
-          <a:noFill/>
-          <a:ln/>
-        </p:spPr>
-        <p:txBody>
-          <a:bodyPr wrap="square" rtlCol="0" anchor="ctr"/>
+            <a:off x="6766560" y="3465576"/>
+            <a:ext cx="2743200" cy="237744"/>
+          </a:xfrm>
+          <a:prstGeom prst="rect">
+            <a:avLst/>
+          </a:prstGeom>
+          <a:noFill/>
+          <a:ln/>
+        </p:spPr>
+        <p:txBody>
+          <a:bodyPr wrap="square" lIns="0" tIns="0" rIns="0" bIns="0" rtlCol="0" anchor="ctr"/>
           <a:lstStyle/>
           <a:p>
             <a:pPr indent="0" marL="0">
@@ -9271,17 +9286,17 @@
         </p:nvSpPr>
         <p:spPr>
           <a:xfrm>
-            <a:off x="10287000" y="3621024"/>
-            <a:ext cx="1188720" cy="256032"/>
-          </a:xfrm>
-          <a:prstGeom prst="rect">
-            <a:avLst/>
-          </a:prstGeom>
-          <a:noFill/>
-          <a:ln/>
-        </p:spPr>
-        <p:txBody>
-          <a:bodyPr wrap="square" rtlCol="0" anchor="ctr"/>
+            <a:off x="9555480" y="3465576"/>
+            <a:ext cx="1938528" cy="237744"/>
+          </a:xfrm>
+          <a:prstGeom prst="rect">
+            <a:avLst/>
+          </a:prstGeom>
+          <a:noFill/>
+          <a:ln/>
+        </p:spPr>
+        <p:txBody>
+          <a:bodyPr wrap="square" lIns="0" tIns="0" rIns="0" bIns="0" rtlCol="0" anchor="ctr"/>
           <a:lstStyle/>
           <a:p>
             <a:pPr algn="r" indent="0" marL="0">
@@ -9310,17 +9325,17 @@
         </p:nvSpPr>
         <p:spPr>
           <a:xfrm>
-            <a:off x="7772400" y="3675888"/>
-            <a:ext cx="3703320" cy="256032"/>
-          </a:xfrm>
-          <a:prstGeom prst="rect">
-            <a:avLst/>
-          </a:prstGeom>
-          <a:noFill/>
-          <a:ln/>
-        </p:spPr>
-        <p:txBody>
-          <a:bodyPr wrap="square" rtlCol="0" anchor="ctr"/>
+            <a:off x="6766560" y="3739896"/>
+            <a:ext cx="4727448" cy="237744"/>
+          </a:xfrm>
+          <a:prstGeom prst="rect">
+            <a:avLst/>
+          </a:prstGeom>
+          <a:noFill/>
+          <a:ln/>
+        </p:spPr>
+        <p:txBody>
+          <a:bodyPr wrap="square" lIns="0" tIns="0" rIns="0" bIns="0" rtlCol="0" anchor="ctr"/>
           <a:lstStyle/>
           <a:p>
             <a:pPr indent="0" marL="0">
@@ -9335,7 +9350,7 @@
                 <a:ea typeface="Segoe UI" pitchFamily="34" charset="-122"/>
                 <a:cs typeface="Segoe UI" pitchFamily="34" charset="-120"/>
               </a:rPr>
-              <a:t>Trained on synthetic history — reported as SYNTHETIC, never as production accuracy.</a:t>
+              <a:t>Trained on synthetic history — reported as SYNTHETIC, not production accuracy.</a:t>
             </a:r>
             <a:endParaRPr lang="en-US" sz="850" dirty="0"/>
           </a:p>
@@ -9349,12 +9364,12 @@
         </p:nvSpPr>
         <p:spPr>
           <a:xfrm>
-            <a:off x="7543800" y="4142232"/>
-            <a:ext cx="4178808" cy="1463040"/>
+            <a:off x="6537960" y="4187952"/>
+            <a:ext cx="5184648" cy="1938528"/>
           </a:xfrm>
           <a:prstGeom prst="roundRect">
             <a:avLst>
-              <a:gd name="adj" fmla="val 5000"/>
+              <a:gd name="adj" fmla="val 3774"/>
             </a:avLst>
           </a:prstGeom>
           <a:solidFill>
@@ -9376,7 +9391,7 @@
         </p:nvSpPr>
         <p:spPr>
           <a:xfrm>
-            <a:off x="7543800" y="4343400"/>
+            <a:off x="6537960" y="4370832"/>
             <a:ext cx="45720" cy="256032"/>
           </a:xfrm>
           <a:prstGeom prst="rect">
@@ -9396,17 +9411,17 @@
         </p:nvSpPr>
         <p:spPr>
           <a:xfrm>
-            <a:off x="7763256" y="4325112"/>
-            <a:ext cx="3776472" cy="274320"/>
-          </a:xfrm>
-          <a:prstGeom prst="rect">
-            <a:avLst/>
-          </a:prstGeom>
-          <a:noFill/>
-          <a:ln/>
-        </p:spPr>
-        <p:txBody>
-          <a:bodyPr wrap="square" rtlCol="0" anchor="ctr"/>
+            <a:off x="6757416" y="4352544"/>
+            <a:ext cx="4782312" cy="274320"/>
+          </a:xfrm>
+          <a:prstGeom prst="rect">
+            <a:avLst/>
+          </a:prstGeom>
+          <a:noFill/>
+          <a:ln/>
+        </p:spPr>
+        <p:txBody>
+          <a:bodyPr wrap="square" lIns="0" tIns="0" rIns="0" bIns="0" rtlCol="0" anchor="ctr"/>
           <a:lstStyle/>
           <a:p>
             <a:pPr indent="0" marL="0">
@@ -9421,7 +9436,7 @@
                 <a:ea typeface="Segoe UI" pitchFamily="34" charset="-122"/>
                 <a:cs typeface="Segoe UI" pitchFamily="34" charset="-120"/>
               </a:rPr>
-              <a:t>Rule fallback (Level 1)</a:t>
+              <a:t>Fallbacks that keep it honest</a:t>
             </a:r>
             <a:endParaRPr lang="en-US" sz="1350" dirty="0"/>
           </a:p>
@@ -9435,28 +9450,28 @@
         </p:nvSpPr>
         <p:spPr>
           <a:xfrm>
-            <a:off x="7799832" y="4727448"/>
-            <a:ext cx="3721608" cy="731520"/>
-          </a:xfrm>
-          <a:prstGeom prst="rect">
-            <a:avLst/>
-          </a:prstGeom>
-          <a:noFill/>
-          <a:ln/>
-        </p:spPr>
-        <p:txBody>
-          <a:bodyPr wrap="square" rtlCol="0" anchor="t"/>
+            <a:off x="6775704" y="4736592"/>
+            <a:ext cx="4745736" cy="1261872"/>
+          </a:xfrm>
+          <a:prstGeom prst="rect">
+            <a:avLst/>
+          </a:prstGeom>
+          <a:noFill/>
+          <a:ln/>
+        </p:spPr>
+        <p:txBody>
+          <a:bodyPr wrap="square" lIns="0" tIns="0" rIns="0" bIns="0" rtlCol="0" anchor="t"/>
           <a:lstStyle/>
           <a:p>
             <a:pPr marL="342900" indent="-342900">
               <a:lnSpc>
-                <a:spcPts val="1800"/>
+                <a:spcPts val="1122"/>
               </a:lnSpc>
               <a:buSzPct val="100000"/>
               <a:buChar char="•"/>
             </a:pPr>
             <a:r>
-              <a:rPr lang="en-US" sz="1100" dirty="0">
+              <a:rPr lang="en-US" sz="850" dirty="0">
                 <a:solidFill>
                   <a:srgbClr val="9DB2C8"/>
                 </a:solidFill>
@@ -9464,20 +9479,20 @@
                 <a:ea typeface="Segoe UI" pitchFamily="34" charset="-122"/>
                 <a:cs typeface="Segoe UI" pitchFamily="34" charset="-120"/>
               </a:rPr>
-              <a:t>Weighted sum of severity, asset criticality, overdue days, safety flag, speed restriction, corridor importance and repeat defects.</a:t>
-            </a:r>
-            <a:endParaRPr lang="en-US" sz="1100" dirty="0"/>
+              <a:t>Rule engine (Level 1): weighted sum of severity, asset criticality, overdue days, safety flag, speed restriction, corridor importance and repeat defects.</a:t>
+            </a:r>
+            <a:endParaRPr lang="en-US" sz="850" dirty="0"/>
           </a:p>
           <a:p>
             <a:pPr marL="342900" indent="-342900">
               <a:lnSpc>
-                <a:spcPts val="1800"/>
+                <a:spcPts val="1122"/>
               </a:lnSpc>
               <a:buSzPct val="100000"/>
               <a:buChar char="•"/>
             </a:pPr>
             <a:r>
-              <a:rPr lang="en-US" sz="1100" dirty="0">
+              <a:rPr lang="en-US" sz="850" dirty="0">
                 <a:solidFill>
                   <a:srgbClr val="9DB2C8"/>
                 </a:solidFill>
@@ -9487,126 +9502,18 @@
               </a:rPr>
               <a:t>Used whenever history is thin or the model fails to load — always labelled RULE_FALLBACK.</a:t>
             </a:r>
-            <a:endParaRPr lang="en-US" sz="1100" dirty="0"/>
-          </a:p>
-        </p:txBody>
-      </p:sp>
-      <p:sp>
-        <p:nvSpPr>
-          <p:cNvPr id="24" name="Shape 21"/>
-          <p:cNvSpPr/>
-          <p:nvPr/>
-        </p:nvSpPr>
-        <p:spPr>
-          <a:xfrm>
-            <a:off x="7543800" y="5696712"/>
-            <a:ext cx="4178808" cy="1051560"/>
-          </a:xfrm>
-          <a:prstGeom prst="roundRect">
-            <a:avLst>
-              <a:gd name="adj" fmla="val 6957"/>
-            </a:avLst>
-          </a:prstGeom>
-          <a:solidFill>
-            <a:srgbClr val="132133"/>
-          </a:solidFill>
-          <a:ln w="12700">
-            <a:solidFill>
-              <a:srgbClr val="223449"/>
-            </a:solidFill>
-            <a:prstDash val="solid"/>
-          </a:ln>
-        </p:spPr>
-      </p:sp>
-      <p:sp>
-        <p:nvSpPr>
-          <p:cNvPr id="25" name="Shape 22"/>
-          <p:cNvSpPr/>
-          <p:nvPr/>
-        </p:nvSpPr>
-        <p:spPr>
-          <a:xfrm>
-            <a:off x="7543800" y="5897880"/>
-            <a:ext cx="45720" cy="256032"/>
-          </a:xfrm>
-          <a:prstGeom prst="rect">
-            <a:avLst/>
-          </a:prstGeom>
-          <a:solidFill>
-            <a:srgbClr val="2DD4BF"/>
-          </a:solidFill>
-          <a:ln/>
-        </p:spPr>
-      </p:sp>
-      <p:sp>
-        <p:nvSpPr>
-          <p:cNvPr id="26" name="Text 23"/>
-          <p:cNvSpPr/>
-          <p:nvPr/>
-        </p:nvSpPr>
-        <p:spPr>
-          <a:xfrm>
-            <a:off x="7763256" y="5879592"/>
-            <a:ext cx="3776472" cy="274320"/>
-          </a:xfrm>
-          <a:prstGeom prst="rect">
-            <a:avLst/>
-          </a:prstGeom>
-          <a:noFill/>
-          <a:ln/>
-        </p:spPr>
-        <p:txBody>
-          <a:bodyPr wrap="square" rtlCol="0" anchor="ctr"/>
-          <a:lstStyle/>
-          <a:p>
-            <a:pPr indent="0" marL="0">
-              <a:buNone/>
-            </a:pPr>
-            <a:r>
-              <a:rPr lang="en-US" sz="1350" b="1" dirty="0">
-                <a:solidFill>
-                  <a:srgbClr val="F1F6FC"/>
-                </a:solidFill>
-                <a:latin typeface="Segoe UI" pitchFamily="34" charset="0"/>
-                <a:ea typeface="Segoe UI" pitchFamily="34" charset="-122"/>
-                <a:cs typeface="Segoe UI" pitchFamily="34" charset="-120"/>
-              </a:rPr>
-              <a:t>Duration engine</a:t>
-            </a:r>
-            <a:endParaRPr lang="en-US" sz="1350" dirty="0"/>
-          </a:p>
-        </p:txBody>
-      </p:sp>
-      <p:sp>
-        <p:nvSpPr>
-          <p:cNvPr id="27" name="Text 24"/>
-          <p:cNvSpPr/>
-          <p:nvPr/>
-        </p:nvSpPr>
-        <p:spPr>
-          <a:xfrm>
-            <a:off x="7799832" y="6281928"/>
-            <a:ext cx="3721608" cy="320040"/>
-          </a:xfrm>
-          <a:prstGeom prst="rect">
-            <a:avLst/>
-          </a:prstGeom>
-          <a:noFill/>
-          <a:ln/>
-        </p:spPr>
-        <p:txBody>
-          <a:bodyPr wrap="square" rtlCol="0" anchor="t"/>
-          <a:lstStyle/>
+            <a:endParaRPr lang="en-US" sz="850" dirty="0"/>
+          </a:p>
           <a:p>
             <a:pPr marL="342900" indent="-342900">
               <a:lnSpc>
-                <a:spcPts val="1800"/>
+                <a:spcPts val="1122"/>
               </a:lnSpc>
               <a:buSzPct val="100000"/>
               <a:buChar char="•"/>
             </a:pPr>
             <a:r>
-              <a:rPr lang="en-US" sz="1100" dirty="0">
+              <a:rPr lang="en-US" sz="850" dirty="0">
                 <a:solidFill>
                   <a:srgbClr val="9DB2C8"/>
                 </a:solidFill>
@@ -9614,20 +9521,20 @@
                 <a:ea typeface="Segoe UI" pitchFamily="34" charset="-122"/>
                 <a:cs typeface="Segoe UI" pitchFamily="34" charset="-120"/>
               </a:rPr>
-              <a:t>Historical median and P90 per task type and department.</a:t>
-            </a:r>
-            <a:endParaRPr lang="en-US" sz="1100" dirty="0"/>
+              <a:t>Duration engine: historical median and P90 per task type and department.</a:t>
+            </a:r>
+            <a:endParaRPr lang="en-US" sz="850" dirty="0"/>
           </a:p>
           <a:p>
             <a:pPr marL="342900" indent="-342900">
               <a:lnSpc>
-                <a:spcPts val="1800"/>
+                <a:spcPts val="1122"/>
               </a:lnSpc>
               <a:buSzPct val="100000"/>
               <a:buChar char="•"/>
             </a:pPr>
             <a:r>
-              <a:rPr lang="en-US" sz="1100" dirty="0">
+              <a:rPr lang="en-US" sz="850" dirty="0">
                 <a:solidFill>
                   <a:srgbClr val="9DB2C8"/>
                 </a:solidFill>
@@ -9637,7 +9544,7 @@
               </a:rPr>
               <a:t>P90 drives feasibility; requested, predicted and sample count are all shown.</a:t>
             </a:r>
-            <a:endParaRPr lang="en-US" sz="1100" dirty="0"/>
+            <a:endParaRPr lang="en-US" sz="850" dirty="0"/>
           </a:p>
         </p:txBody>
       </p:sp>
@@ -9848,7 +9755,7 @@
         <p:spPr>
           <a:xfrm>
             <a:off x="502920" y="1810512"/>
-            <a:ext cx="6766560" cy="4699000"/>
+            <a:ext cx="5806440" cy="4032250"/>
           </a:xfrm>
           <a:prstGeom prst="rect">
             <a:avLst/>
@@ -9864,7 +9771,7 @@
         <p:spPr>
           <a:xfrm>
             <a:off x="502920" y="1810512"/>
-            <a:ext cx="6766560" cy="4699000"/>
+            <a:ext cx="5806440" cy="4032250"/>
           </a:xfrm>
           <a:prstGeom prst="rect">
             <a:avLst/>
@@ -9885,8 +9792,8 @@
         </p:nvSpPr>
         <p:spPr>
           <a:xfrm>
-            <a:off x="502920" y="6564376"/>
-            <a:ext cx="6766560" cy="256032"/>
+            <a:off x="502920" y="5897626"/>
+            <a:ext cx="5806440" cy="256032"/>
           </a:xfrm>
           <a:prstGeom prst="rect">
             <a:avLst/>
@@ -9924,12 +9831,12 @@
         </p:nvSpPr>
         <p:spPr>
           <a:xfrm>
-            <a:off x="7543800" y="1810512"/>
-            <a:ext cx="4178808" cy="2194560"/>
+            <a:off x="6537960" y="1810512"/>
+            <a:ext cx="5184648" cy="2011680"/>
           </a:xfrm>
           <a:prstGeom prst="roundRect">
             <a:avLst>
-              <a:gd name="adj" fmla="val 3333"/>
+              <a:gd name="adj" fmla="val 3636"/>
             </a:avLst>
           </a:prstGeom>
           <a:solidFill>
@@ -9951,7 +9858,7 @@
         </p:nvSpPr>
         <p:spPr>
           <a:xfrm>
-            <a:off x="7543800" y="2011680"/>
+            <a:off x="6537960" y="1993392"/>
             <a:ext cx="45720" cy="256032"/>
           </a:xfrm>
           <a:prstGeom prst="rect">
@@ -9971,17 +9878,17 @@
         </p:nvSpPr>
         <p:spPr>
           <a:xfrm>
-            <a:off x="7763256" y="1993392"/>
-            <a:ext cx="3776472" cy="274320"/>
-          </a:xfrm>
-          <a:prstGeom prst="rect">
-            <a:avLst/>
-          </a:prstGeom>
-          <a:noFill/>
-          <a:ln/>
-        </p:spPr>
-        <p:txBody>
-          <a:bodyPr wrap="square" rtlCol="0" anchor="ctr"/>
+            <a:off x="6757416" y="1975104"/>
+            <a:ext cx="4782312" cy="274320"/>
+          </a:xfrm>
+          <a:prstGeom prst="rect">
+            <a:avLst/>
+          </a:prstGeom>
+          <a:noFill/>
+          <a:ln/>
+        </p:spPr>
+        <p:txBody>
+          <a:bodyPr wrap="square" lIns="0" tIns="0" rIns="0" bIns="0" rtlCol="0" anchor="ctr"/>
           <a:lstStyle/>
           <a:p>
             <a:pPr indent="0" marL="0">
@@ -10010,28 +9917,28 @@
         </p:nvSpPr>
         <p:spPr>
           <a:xfrm>
-            <a:off x="7799832" y="2395728"/>
-            <a:ext cx="3721608" cy="1463040"/>
-          </a:xfrm>
-          <a:prstGeom prst="rect">
-            <a:avLst/>
-          </a:prstGeom>
-          <a:noFill/>
-          <a:ln/>
-        </p:spPr>
-        <p:txBody>
-          <a:bodyPr wrap="square" rtlCol="0" anchor="t"/>
+            <a:off x="6775704" y="2359152"/>
+            <a:ext cx="4745736" cy="1335024"/>
+          </a:xfrm>
+          <a:prstGeom prst="rect">
+            <a:avLst/>
+          </a:prstGeom>
+          <a:noFill/>
+          <a:ln/>
+        </p:spPr>
+        <p:txBody>
+          <a:bodyPr wrap="square" lIns="0" tIns="0" rIns="0" bIns="0" rtlCol="0" anchor="t"/>
           <a:lstStyle/>
           <a:p>
             <a:pPr marL="342900" indent="-342900">
               <a:lnSpc>
-                <a:spcPts val="1800"/>
+                <a:spcPts val="1518"/>
               </a:lnSpc>
               <a:buSzPct val="100000"/>
               <a:buChar char="•"/>
             </a:pPr>
             <a:r>
-              <a:rPr lang="en-US" sz="1100" dirty="0">
+              <a:rPr lang="en-US" sz="1150" dirty="0">
                 <a:solidFill>
                   <a:srgbClr val="9DB2C8"/>
                 </a:solidFill>
@@ -10041,18 +9948,18 @@
               </a:rPr>
               <a:t>No overlap, full overlap, partial at start, partial at end.</a:t>
             </a:r>
-            <a:endParaRPr lang="en-US" sz="1100" dirty="0"/>
+            <a:endParaRPr lang="en-US" sz="1150" dirty="0"/>
           </a:p>
           <a:p>
             <a:pPr marL="342900" indent="-342900">
               <a:lnSpc>
-                <a:spcPts val="1800"/>
+                <a:spcPts val="1518"/>
               </a:lnSpc>
               <a:buSzPct val="100000"/>
               <a:buChar char="•"/>
             </a:pPr>
             <a:r>
-              <a:rPr lang="en-US" sz="1100" dirty="0">
+              <a:rPr lang="en-US" sz="1150" dirty="0">
                 <a:solidFill>
                   <a:srgbClr val="9DB2C8"/>
                 </a:solidFill>
@@ -10062,18 +9969,18 @@
               </a:rPr>
               <a:t>One train splitting a window; several trains splitting a window.</a:t>
             </a:r>
-            <a:endParaRPr lang="en-US" sz="1100" dirty="0"/>
+            <a:endParaRPr lang="en-US" sz="1150" dirty="0"/>
           </a:p>
           <a:p>
             <a:pPr marL="342900" indent="-342900">
               <a:lnSpc>
-                <a:spcPts val="1800"/>
+                <a:spcPts val="1518"/>
               </a:lnSpc>
               <a:buSzPct val="100000"/>
               <a:buChar char="•"/>
             </a:pPr>
             <a:r>
-              <a:rPr lang="en-US" sz="1100" dirty="0">
+              <a:rPr lang="en-US" sz="1150" dirty="0">
                 <a:solidFill>
                   <a:srgbClr val="9DB2C8"/>
                 </a:solidFill>
@@ -10083,7 +9990,7 @@
               </a:rPr>
               <a:t>Touching intervals — [start, end) never double-counts a boundary minute.</a:t>
             </a:r>
-            <a:endParaRPr lang="en-US" sz="1100" dirty="0"/>
+            <a:endParaRPr lang="en-US" sz="1150" dirty="0"/>
           </a:p>
         </p:txBody>
       </p:sp>
@@ -10095,12 +10002,12 @@
         </p:nvSpPr>
         <p:spPr>
           <a:xfrm>
-            <a:off x="7543800" y="4142232"/>
-            <a:ext cx="4178808" cy="2606040"/>
+            <a:off x="6537960" y="3959352"/>
+            <a:ext cx="5184648" cy="2167128"/>
           </a:xfrm>
           <a:prstGeom prst="roundRect">
             <a:avLst>
-              <a:gd name="adj" fmla="val 2807"/>
+              <a:gd name="adj" fmla="val 3376"/>
             </a:avLst>
           </a:prstGeom>
           <a:solidFill>
@@ -10122,17 +10029,17 @@
         </p:nvSpPr>
         <p:spPr>
           <a:xfrm>
-            <a:off x="7772400" y="4297680"/>
-            <a:ext cx="3703320" cy="237744"/>
-          </a:xfrm>
-          <a:prstGeom prst="rect">
-            <a:avLst/>
-          </a:prstGeom>
-          <a:noFill/>
-          <a:ln/>
-        </p:spPr>
-        <p:txBody>
-          <a:bodyPr wrap="square" rtlCol="0" anchor="ctr"/>
+            <a:off x="6766560" y="4096512"/>
+            <a:ext cx="4727448" cy="237744"/>
+          </a:xfrm>
+          <a:prstGeom prst="rect">
+            <a:avLst/>
+          </a:prstGeom>
+          <a:noFill/>
+          <a:ln/>
+        </p:spPr>
+        <p:txBody>
+          <a:bodyPr wrap="square" lIns="0" tIns="0" rIns="0" bIns="0" rtlCol="0" anchor="ctr"/>
           <a:lstStyle/>
           <a:p>
             <a:pPr indent="0" marL="0">
@@ -10161,28 +10068,28 @@
         </p:nvSpPr>
         <p:spPr>
           <a:xfrm>
-            <a:off x="7882128" y="4590288"/>
-            <a:ext cx="3657600" cy="1828800"/>
-          </a:xfrm>
-          <a:prstGeom prst="rect">
-            <a:avLst/>
-          </a:prstGeom>
-          <a:noFill/>
-          <a:ln/>
-        </p:spPr>
-        <p:txBody>
-          <a:bodyPr wrap="square" rtlCol="0" anchor="ctr"/>
+            <a:off x="6830568" y="4370832"/>
+            <a:ext cx="4636008" cy="1371600"/>
+          </a:xfrm>
+          <a:prstGeom prst="rect">
+            <a:avLst/>
+          </a:prstGeom>
+          <a:noFill/>
+          <a:ln/>
+        </p:spPr>
+        <p:txBody>
+          <a:bodyPr wrap="square" lIns="0" tIns="0" rIns="0" bIns="0" rtlCol="0" anchor="t"/>
           <a:lstStyle/>
           <a:p>
             <a:pPr marL="342900" indent="-342900">
               <a:lnSpc>
-                <a:spcPts val="1600"/>
+                <a:spcPts val="1320"/>
               </a:lnSpc>
               <a:buSzPct val="100000"/>
               <a:buChar char="•"/>
             </a:pPr>
             <a:r>
-              <a:rPr lang="en-US" sz="1050" dirty="0">
+              <a:rPr lang="en-US" sz="1000" dirty="0">
                 <a:solidFill>
                   <a:srgbClr val="9DB2C8"/>
                 </a:solidFill>
@@ -10192,18 +10099,18 @@
               </a:rPr>
               <a:t>NO_BLOCK_WINDOW</a:t>
             </a:r>
-            <a:endParaRPr lang="en-US" sz="1050" dirty="0"/>
+            <a:endParaRPr lang="en-US" sz="1000" dirty="0"/>
           </a:p>
           <a:p>
             <a:pPr marL="342900" indent="-342900">
               <a:lnSpc>
-                <a:spcPts val="1600"/>
+                <a:spcPts val="1320"/>
               </a:lnSpc>
               <a:buSzPct val="100000"/>
               <a:buChar char="•"/>
             </a:pPr>
             <a:r>
-              <a:rPr lang="en-US" sz="1050" dirty="0">
+              <a:rPr lang="en-US" sz="1000" dirty="0">
                 <a:solidFill>
                   <a:srgbClr val="9DB2C8"/>
                 </a:solidFill>
@@ -10213,18 +10120,18 @@
               </a:rPr>
               <a:t>TRAIN_CONFLICT</a:t>
             </a:r>
-            <a:endParaRPr lang="en-US" sz="1050" dirty="0"/>
+            <a:endParaRPr lang="en-US" sz="1000" dirty="0"/>
           </a:p>
           <a:p>
             <a:pPr marL="342900" indent="-342900">
               <a:lnSpc>
-                <a:spcPts val="1600"/>
+                <a:spcPts val="1320"/>
               </a:lnSpc>
               <a:buSzPct val="100000"/>
               <a:buChar char="•"/>
             </a:pPr>
             <a:r>
-              <a:rPr lang="en-US" sz="1050" dirty="0">
+              <a:rPr lang="en-US" sz="1000" dirty="0">
                 <a:solidFill>
                   <a:srgbClr val="9DB2C8"/>
                 </a:solidFill>
@@ -10234,18 +10141,18 @@
               </a:rPr>
               <a:t>INSUFFICIENT_DURATION</a:t>
             </a:r>
-            <a:endParaRPr lang="en-US" sz="1050" dirty="0"/>
+            <a:endParaRPr lang="en-US" sz="1000" dirty="0"/>
           </a:p>
           <a:p>
             <a:pPr marL="342900" indent="-342900">
               <a:lnSpc>
-                <a:spcPts val="1600"/>
+                <a:spcPts val="1320"/>
               </a:lnSpc>
               <a:buSzPct val="100000"/>
               <a:buChar char="•"/>
             </a:pPr>
             <a:r>
-              <a:rPr lang="en-US" sz="1050" dirty="0">
+              <a:rPr lang="en-US" sz="1000" dirty="0">
                 <a:solidFill>
                   <a:srgbClr val="9DB2C8"/>
                 </a:solidFill>
@@ -10255,18 +10162,18 @@
               </a:rPr>
               <a:t>POWER_ISOLATION_UNAVAILABLE</a:t>
             </a:r>
-            <a:endParaRPr lang="en-US" sz="1050" dirty="0"/>
+            <a:endParaRPr lang="en-US" sz="1000" dirty="0"/>
           </a:p>
           <a:p>
             <a:pPr marL="342900" indent="-342900">
               <a:lnSpc>
-                <a:spcPts val="1600"/>
+                <a:spcPts val="1320"/>
               </a:lnSpc>
               <a:buSzPct val="100000"/>
               <a:buChar char="•"/>
             </a:pPr>
             <a:r>
-              <a:rPr lang="en-US" sz="1050" dirty="0">
+              <a:rPr lang="en-US" sz="1000" dirty="0">
                 <a:solidFill>
                   <a:srgbClr val="9DB2C8"/>
                 </a:solidFill>
@@ -10276,18 +10183,18 @@
               </a:rPr>
               <a:t>DISCONNECTION_UNAVAILABLE</a:t>
             </a:r>
-            <a:endParaRPr lang="en-US" sz="1050" dirty="0"/>
+            <a:endParaRPr lang="en-US" sz="1000" dirty="0"/>
           </a:p>
           <a:p>
             <a:pPr marL="342900" indent="-342900">
               <a:lnSpc>
-                <a:spcPts val="1600"/>
+                <a:spcPts val="1320"/>
               </a:lnSpc>
               <a:buSzPct val="100000"/>
               <a:buChar char="•"/>
             </a:pPr>
             <a:r>
-              <a:rPr lang="en-US" sz="1050" dirty="0">
+              <a:rPr lang="en-US" sz="1000" dirty="0">
                 <a:solidFill>
                   <a:srgbClr val="9DB2C8"/>
                 </a:solidFill>
@@ -10297,18 +10204,18 @@
               </a:rPr>
               <a:t>INCOMPATIBLE_TASK</a:t>
             </a:r>
-            <a:endParaRPr lang="en-US" sz="1050" dirty="0"/>
+            <a:endParaRPr lang="en-US" sz="1000" dirty="0"/>
           </a:p>
           <a:p>
             <a:pPr marL="342900" indent="-342900">
               <a:lnSpc>
-                <a:spcPts val="1600"/>
+                <a:spcPts val="1320"/>
               </a:lnSpc>
               <a:buSzPct val="100000"/>
               <a:buChar char="•"/>
             </a:pPr>
             <a:r>
-              <a:rPr lang="en-US" sz="1050" dirty="0">
+              <a:rPr lang="en-US" sz="1000" dirty="0">
                 <a:solidFill>
                   <a:srgbClr val="9DB2C8"/>
                 </a:solidFill>
@@ -10318,7 +10225,7 @@
               </a:rPr>
               <a:t>OUTSIDE_HORIZON</a:t>
             </a:r>
-            <a:endParaRPr lang="en-US" sz="1050" dirty="0"/>
+            <a:endParaRPr lang="en-US" sz="1000" dirty="0"/>
           </a:p>
         </p:txBody>
       </p:sp>
@@ -10330,17 +10237,17 @@
         </p:nvSpPr>
         <p:spPr>
           <a:xfrm>
-            <a:off x="7772400" y="6400800"/>
-            <a:ext cx="3703320" cy="274320"/>
-          </a:xfrm>
-          <a:prstGeom prst="rect">
-            <a:avLst/>
-          </a:prstGeom>
-          <a:noFill/>
-          <a:ln/>
-        </p:spPr>
-        <p:txBody>
-          <a:bodyPr wrap="square" rtlCol="0" anchor="ctr"/>
+            <a:off x="6766560" y="5815584"/>
+            <a:ext cx="4727448" cy="237744"/>
+          </a:xfrm>
+          <a:prstGeom prst="rect">
+            <a:avLst/>
+          </a:prstGeom>
+          <a:noFill/>
+          <a:ln/>
+        </p:spPr>
+        <p:txBody>
+          <a:bodyPr wrap="square" lIns="0" tIns="0" rIns="0" bIns="0" rtlCol="0" anchor="ctr"/>
           <a:lstStyle/>
           <a:p>
             <a:pPr indent="0" marL="0">
@@ -10568,7 +10475,7 @@
         <p:spPr>
           <a:xfrm>
             <a:off x="502920" y="1810512"/>
-            <a:ext cx="6766560" cy="4699000"/>
+            <a:ext cx="5806440" cy="4032250"/>
           </a:xfrm>
           <a:prstGeom prst="rect">
             <a:avLst/>
@@ -10584,7 +10491,7 @@
         <p:spPr>
           <a:xfrm>
             <a:off x="502920" y="1810512"/>
-            <a:ext cx="6766560" cy="4699000"/>
+            <a:ext cx="5806440" cy="4032250"/>
           </a:xfrm>
           <a:prstGeom prst="rect">
             <a:avLst/>
@@ -10605,8 +10512,8 @@
         </p:nvSpPr>
         <p:spPr>
           <a:xfrm>
-            <a:off x="502920" y="6564376"/>
-            <a:ext cx="6766560" cy="256032"/>
+            <a:off x="502920" y="5897626"/>
+            <a:ext cx="5806440" cy="256032"/>
           </a:xfrm>
           <a:prstGeom prst="rect">
             <a:avLst/>
@@ -10644,12 +10551,12 @@
         </p:nvSpPr>
         <p:spPr>
           <a:xfrm>
-            <a:off x="7543800" y="1810512"/>
-            <a:ext cx="2011680" cy="1280160"/>
+            <a:off x="6537960" y="1810512"/>
+            <a:ext cx="2532888" cy="1188720"/>
           </a:xfrm>
           <a:prstGeom prst="roundRect">
             <a:avLst>
-              <a:gd name="adj" fmla="val 5714"/>
+              <a:gd name="adj" fmla="val 6154"/>
             </a:avLst>
           </a:prstGeom>
           <a:solidFill>
@@ -10671,24 +10578,24 @@
         </p:nvSpPr>
         <p:spPr>
           <a:xfrm>
-            <a:off x="7708392" y="1938528"/>
-            <a:ext cx="1682496" cy="219456"/>
-          </a:xfrm>
-          <a:prstGeom prst="rect">
-            <a:avLst/>
-          </a:prstGeom>
-          <a:noFill/>
-          <a:ln/>
-        </p:spPr>
-        <p:txBody>
-          <a:bodyPr wrap="square" rtlCol="0" anchor="ctr"/>
+            <a:off x="6702552" y="1929384"/>
+            <a:ext cx="2203704" cy="219456"/>
+          </a:xfrm>
+          <a:prstGeom prst="rect">
+            <a:avLst/>
+          </a:prstGeom>
+          <a:noFill/>
+          <a:ln/>
+        </p:spPr>
+        <p:txBody>
+          <a:bodyPr wrap="square" lIns="0" tIns="0" rIns="0" bIns="0" rtlCol="0" anchor="ctr"/>
           <a:lstStyle/>
           <a:p>
             <a:pPr indent="0" marL="0">
               <a:buNone/>
             </a:pPr>
             <a:r>
-              <a:rPr lang="en-US" sz="900" b="1" spc="100" kern="0" dirty="0">
+              <a:rPr lang="en-US" sz="900" b="1" spc="80" kern="0" dirty="0">
                 <a:solidFill>
                   <a:srgbClr val="6B819A"/>
                 </a:solidFill>
@@ -10710,17 +10617,17 @@
         </p:nvSpPr>
         <p:spPr>
           <a:xfrm>
-            <a:off x="7708392" y="2157984"/>
-            <a:ext cx="1682496" cy="457200"/>
-          </a:xfrm>
-          <a:prstGeom prst="rect">
-            <a:avLst/>
-          </a:prstGeom>
-          <a:noFill/>
-          <a:ln/>
-        </p:spPr>
-        <p:txBody>
-          <a:bodyPr wrap="square" rtlCol="0" anchor="ctr"/>
+            <a:off x="6702552" y="2176272"/>
+            <a:ext cx="2203704" cy="420624"/>
+          </a:xfrm>
+          <a:prstGeom prst="rect">
+            <a:avLst/>
+          </a:prstGeom>
+          <a:noFill/>
+          <a:ln/>
+        </p:spPr>
+        <p:txBody>
+          <a:bodyPr wrap="square" lIns="0" tIns="0" rIns="0" bIns="0" rtlCol="0" anchor="ctr"/>
           <a:lstStyle/>
           <a:p>
             <a:pPr indent="0" marL="0">
@@ -10749,24 +10656,27 @@
         </p:nvSpPr>
         <p:spPr>
           <a:xfrm>
-            <a:off x="7708392" y="2633472"/>
-            <a:ext cx="1682496" cy="347472"/>
-          </a:xfrm>
-          <a:prstGeom prst="rect">
-            <a:avLst/>
-          </a:prstGeom>
-          <a:noFill/>
-          <a:ln/>
-        </p:spPr>
-        <p:txBody>
-          <a:bodyPr wrap="square" rtlCol="0" anchor="t"/>
+            <a:off x="6702552" y="2633472"/>
+            <a:ext cx="2203704" cy="256032"/>
+          </a:xfrm>
+          <a:prstGeom prst="rect">
+            <a:avLst/>
+          </a:prstGeom>
+          <a:noFill/>
+          <a:ln/>
+        </p:spPr>
+        <p:txBody>
+          <a:bodyPr wrap="square" lIns="0" tIns="0" rIns="0" bIns="0" rtlCol="0" anchor="t"/>
           <a:lstStyle/>
           <a:p>
             <a:pPr indent="0" marL="0">
-              <a:buNone/>
-            </a:pPr>
-            <a:r>
-              <a:rPr lang="en-US" sz="950" dirty="0">
+              <a:lnSpc>
+                <a:spcPts val="875"/>
+              </a:lnSpc>
+              <a:buNone/>
+            </a:pPr>
+            <a:r>
+              <a:rPr lang="en-US" sz="700" dirty="0">
                 <a:solidFill>
                   <a:srgbClr val="9DB2C8"/>
                 </a:solidFill>
@@ -10776,7 +10686,7 @@
               </a:rPr>
               <a:t>No better plan exists for these jobs, windows and rules</a:t>
             </a:r>
-            <a:endParaRPr lang="en-US" sz="950" dirty="0"/>
+            <a:endParaRPr lang="en-US" sz="700" dirty="0"/>
           </a:p>
         </p:txBody>
       </p:sp>
@@ -10788,12 +10698,12 @@
         </p:nvSpPr>
         <p:spPr>
           <a:xfrm>
-            <a:off x="9710928" y="1810512"/>
-            <a:ext cx="2011680" cy="1280160"/>
+            <a:off x="9189720" y="1810512"/>
+            <a:ext cx="2532888" cy="1188720"/>
           </a:xfrm>
           <a:prstGeom prst="roundRect">
             <a:avLst>
-              <a:gd name="adj" fmla="val 5714"/>
+              <a:gd name="adj" fmla="val 6154"/>
             </a:avLst>
           </a:prstGeom>
           <a:solidFill>
@@ -10815,24 +10725,24 @@
         </p:nvSpPr>
         <p:spPr>
           <a:xfrm>
-            <a:off x="9875520" y="1938528"/>
-            <a:ext cx="1682496" cy="219456"/>
-          </a:xfrm>
-          <a:prstGeom prst="rect">
-            <a:avLst/>
-          </a:prstGeom>
-          <a:noFill/>
-          <a:ln/>
-        </p:spPr>
-        <p:txBody>
-          <a:bodyPr wrap="square" rtlCol="0" anchor="ctr"/>
+            <a:off x="9354312" y="1929384"/>
+            <a:ext cx="2203704" cy="219456"/>
+          </a:xfrm>
+          <a:prstGeom prst="rect">
+            <a:avLst/>
+          </a:prstGeom>
+          <a:noFill/>
+          <a:ln/>
+        </p:spPr>
+        <p:txBody>
+          <a:bodyPr wrap="square" lIns="0" tIns="0" rIns="0" bIns="0" rtlCol="0" anchor="ctr"/>
           <a:lstStyle/>
           <a:p>
             <a:pPr indent="0" marL="0">
               <a:buNone/>
             </a:pPr>
             <a:r>
-              <a:rPr lang="en-US" sz="900" b="1" spc="100" kern="0" dirty="0">
+              <a:rPr lang="en-US" sz="900" b="1" spc="80" kern="0" dirty="0">
                 <a:solidFill>
                   <a:srgbClr val="6B819A"/>
                 </a:solidFill>
@@ -10854,17 +10764,17 @@
         </p:nvSpPr>
         <p:spPr>
           <a:xfrm>
-            <a:off x="9875520" y="2157984"/>
-            <a:ext cx="1682496" cy="457200"/>
-          </a:xfrm>
-          <a:prstGeom prst="rect">
-            <a:avLst/>
-          </a:prstGeom>
-          <a:noFill/>
-          <a:ln/>
-        </p:spPr>
-        <p:txBody>
-          <a:bodyPr wrap="square" rtlCol="0" anchor="ctr"/>
+            <a:off x="9354312" y="2176272"/>
+            <a:ext cx="2203704" cy="420624"/>
+          </a:xfrm>
+          <a:prstGeom prst="rect">
+            <a:avLst/>
+          </a:prstGeom>
+          <a:noFill/>
+          <a:ln/>
+        </p:spPr>
+        <p:txBody>
+          <a:bodyPr wrap="square" lIns="0" tIns="0" rIns="0" bIns="0" rtlCol="0" anchor="ctr"/>
           <a:lstStyle/>
           <a:p>
             <a:pPr indent="0" marL="0">
@@ -10893,24 +10803,27 @@
         </p:nvSpPr>
         <p:spPr>
           <a:xfrm>
-            <a:off x="9875520" y="2633472"/>
-            <a:ext cx="1682496" cy="347472"/>
-          </a:xfrm>
-          <a:prstGeom prst="rect">
-            <a:avLst/>
-          </a:prstGeom>
-          <a:noFill/>
-          <a:ln/>
-        </p:spPr>
-        <p:txBody>
-          <a:bodyPr wrap="square" rtlCol="0" anchor="t"/>
+            <a:off x="9354312" y="2633472"/>
+            <a:ext cx="2203704" cy="256032"/>
+          </a:xfrm>
+          <a:prstGeom prst="rect">
+            <a:avLst/>
+          </a:prstGeom>
+          <a:noFill/>
+          <a:ln/>
+        </p:spPr>
+        <p:txBody>
+          <a:bodyPr wrap="square" lIns="0" tIns="0" rIns="0" bIns="0" rtlCol="0" anchor="t"/>
           <a:lstStyle/>
           <a:p>
             <a:pPr indent="0" marL="0">
-              <a:buNone/>
-            </a:pPr>
-            <a:r>
-              <a:rPr lang="en-US" sz="950" dirty="0">
+              <a:lnSpc>
+                <a:spcPts val="1063"/>
+              </a:lnSpc>
+              <a:buNone/>
+            </a:pPr>
+            <a:r>
+              <a:rPr lang="en-US" sz="850" dirty="0">
                 <a:solidFill>
                   <a:srgbClr val="9DB2C8"/>
                 </a:solidFill>
@@ -10920,7 +10833,7 @@
               </a:rPr>
               <a:t>Share of section time not under block</a:t>
             </a:r>
-            <a:endParaRPr lang="en-US" sz="950" dirty="0"/>
+            <a:endParaRPr lang="en-US" sz="850" dirty="0"/>
           </a:p>
         </p:txBody>
       </p:sp>
@@ -10932,12 +10845,12 @@
         </p:nvSpPr>
         <p:spPr>
           <a:xfrm>
-            <a:off x="7543800" y="3182112"/>
-            <a:ext cx="2011680" cy="1280160"/>
+            <a:off x="6537960" y="3108960"/>
+            <a:ext cx="2532888" cy="1188720"/>
           </a:xfrm>
           <a:prstGeom prst="roundRect">
             <a:avLst>
-              <a:gd name="adj" fmla="val 5714"/>
+              <a:gd name="adj" fmla="val 6154"/>
             </a:avLst>
           </a:prstGeom>
           <a:solidFill>
@@ -10959,24 +10872,24 @@
         </p:nvSpPr>
         <p:spPr>
           <a:xfrm>
-            <a:off x="7708392" y="3310128"/>
-            <a:ext cx="1682496" cy="219456"/>
-          </a:xfrm>
-          <a:prstGeom prst="rect">
-            <a:avLst/>
-          </a:prstGeom>
-          <a:noFill/>
-          <a:ln/>
-        </p:spPr>
-        <p:txBody>
-          <a:bodyPr wrap="square" rtlCol="0" anchor="ctr"/>
+            <a:off x="6702552" y="3227832"/>
+            <a:ext cx="2203704" cy="219456"/>
+          </a:xfrm>
+          <a:prstGeom prst="rect">
+            <a:avLst/>
+          </a:prstGeom>
+          <a:noFill/>
+          <a:ln/>
+        </p:spPr>
+        <p:txBody>
+          <a:bodyPr wrap="square" lIns="0" tIns="0" rIns="0" bIns="0" rtlCol="0" anchor="ctr"/>
           <a:lstStyle/>
           <a:p>
             <a:pPr indent="0" marL="0">
               <a:buNone/>
             </a:pPr>
             <a:r>
-              <a:rPr lang="en-US" sz="900" b="1" spc="100" kern="0" dirty="0">
+              <a:rPr lang="en-US" sz="900" b="1" spc="80" kern="0" dirty="0">
                 <a:solidFill>
                   <a:srgbClr val="6B819A"/>
                 </a:solidFill>
@@ -10998,17 +10911,17 @@
         </p:nvSpPr>
         <p:spPr>
           <a:xfrm>
-            <a:off x="7708392" y="3529584"/>
-            <a:ext cx="1682496" cy="457200"/>
-          </a:xfrm>
-          <a:prstGeom prst="rect">
-            <a:avLst/>
-          </a:prstGeom>
-          <a:noFill/>
-          <a:ln/>
-        </p:spPr>
-        <p:txBody>
-          <a:bodyPr wrap="square" rtlCol="0" anchor="ctr"/>
+            <a:off x="6702552" y="3474720"/>
+            <a:ext cx="2203704" cy="420624"/>
+          </a:xfrm>
+          <a:prstGeom prst="rect">
+            <a:avLst/>
+          </a:prstGeom>
+          <a:noFill/>
+          <a:ln/>
+        </p:spPr>
+        <p:txBody>
+          <a:bodyPr wrap="square" lIns="0" tIns="0" rIns="0" bIns="0" rtlCol="0" anchor="ctr"/>
           <a:lstStyle/>
           <a:p>
             <a:pPr indent="0" marL="0">
@@ -11037,20 +10950,23 @@
         </p:nvSpPr>
         <p:spPr>
           <a:xfrm>
-            <a:off x="7708392" y="4005072"/>
-            <a:ext cx="1682496" cy="347472"/>
-          </a:xfrm>
-          <a:prstGeom prst="rect">
-            <a:avLst/>
-          </a:prstGeom>
-          <a:noFill/>
-          <a:ln/>
-        </p:spPr>
-        <p:txBody>
-          <a:bodyPr wrap="square" rtlCol="0" anchor="t"/>
+            <a:off x="6702552" y="3931920"/>
+            <a:ext cx="2203704" cy="256032"/>
+          </a:xfrm>
+          <a:prstGeom prst="rect">
+            <a:avLst/>
+          </a:prstGeom>
+          <a:noFill/>
+          <a:ln/>
+        </p:spPr>
+        <p:txBody>
+          <a:bodyPr wrap="square" lIns="0" tIns="0" rIns="0" bIns="0" rtlCol="0" anchor="t"/>
           <a:lstStyle/>
           <a:p>
             <a:pPr indent="0" marL="0">
+              <a:lnSpc>
+                <a:spcPts val="1188"/>
+              </a:lnSpc>
               <a:buNone/>
             </a:pPr>
             <a:r>
@@ -11076,12 +10992,12 @@
         </p:nvSpPr>
         <p:spPr>
           <a:xfrm>
-            <a:off x="9710928" y="3182112"/>
-            <a:ext cx="2011680" cy="1280160"/>
+            <a:off x="9189720" y="3108960"/>
+            <a:ext cx="2532888" cy="1188720"/>
           </a:xfrm>
           <a:prstGeom prst="roundRect">
             <a:avLst>
-              <a:gd name="adj" fmla="val 5714"/>
+              <a:gd name="adj" fmla="val 6154"/>
             </a:avLst>
           </a:prstGeom>
           <a:solidFill>
@@ -11103,24 +11019,24 @@
         </p:nvSpPr>
         <p:spPr>
           <a:xfrm>
-            <a:off x="9875520" y="3310128"/>
-            <a:ext cx="1682496" cy="219456"/>
-          </a:xfrm>
-          <a:prstGeom prst="rect">
-            <a:avLst/>
-          </a:prstGeom>
-          <a:noFill/>
-          <a:ln/>
-        </p:spPr>
-        <p:txBody>
-          <a:bodyPr wrap="square" rtlCol="0" anchor="ctr"/>
+            <a:off x="9354312" y="3227832"/>
+            <a:ext cx="2203704" cy="219456"/>
+          </a:xfrm>
+          <a:prstGeom prst="rect">
+            <a:avLst/>
+          </a:prstGeom>
+          <a:noFill/>
+          <a:ln/>
+        </p:spPr>
+        <p:txBody>
+          <a:bodyPr wrap="square" lIns="0" tIns="0" rIns="0" bIns="0" rtlCol="0" anchor="ctr"/>
           <a:lstStyle/>
           <a:p>
             <a:pPr indent="0" marL="0">
               <a:buNone/>
             </a:pPr>
             <a:r>
-              <a:rPr lang="en-US" sz="900" b="1" spc="100" kern="0" dirty="0">
+              <a:rPr lang="en-US" sz="900" b="1" spc="80" kern="0" dirty="0">
                 <a:solidFill>
                   <a:srgbClr val="6B819A"/>
                 </a:solidFill>
@@ -11142,17 +11058,17 @@
         </p:nvSpPr>
         <p:spPr>
           <a:xfrm>
-            <a:off x="9875520" y="3529584"/>
-            <a:ext cx="1682496" cy="457200"/>
-          </a:xfrm>
-          <a:prstGeom prst="rect">
-            <a:avLst/>
-          </a:prstGeom>
-          <a:noFill/>
-          <a:ln/>
-        </p:spPr>
-        <p:txBody>
-          <a:bodyPr wrap="square" rtlCol="0" anchor="ctr"/>
+            <a:off x="9354312" y="3474720"/>
+            <a:ext cx="2203704" cy="420624"/>
+          </a:xfrm>
+          <a:prstGeom prst="rect">
+            <a:avLst/>
+          </a:prstGeom>
+          <a:noFill/>
+          <a:ln/>
+        </p:spPr>
+        <p:txBody>
+          <a:bodyPr wrap="square" lIns="0" tIns="0" rIns="0" bIns="0" rtlCol="0" anchor="ctr"/>
           <a:lstStyle/>
           <a:p>
             <a:pPr indent="0" marL="0">
@@ -11181,24 +11097,27 @@
         </p:nvSpPr>
         <p:spPr>
           <a:xfrm>
-            <a:off x="9875520" y="4005072"/>
-            <a:ext cx="1682496" cy="347472"/>
-          </a:xfrm>
-          <a:prstGeom prst="rect">
-            <a:avLst/>
-          </a:prstGeom>
-          <a:noFill/>
-          <a:ln/>
-        </p:spPr>
-        <p:txBody>
-          <a:bodyPr wrap="square" rtlCol="0" anchor="t"/>
+            <a:off x="9354312" y="3931920"/>
+            <a:ext cx="2203704" cy="256032"/>
+          </a:xfrm>
+          <a:prstGeom prst="rect">
+            <a:avLst/>
+          </a:prstGeom>
+          <a:noFill/>
+          <a:ln/>
+        </p:spPr>
+        <p:txBody>
+          <a:bodyPr wrap="square" lIns="0" tIns="0" rIns="0" bIns="0" rtlCol="0" anchor="t"/>
           <a:lstStyle/>
           <a:p>
             <a:pPr indent="0" marL="0">
-              <a:buNone/>
-            </a:pPr>
-            <a:r>
-              <a:rPr lang="en-US" sz="950" dirty="0">
+              <a:lnSpc>
+                <a:spcPts val="938"/>
+              </a:lnSpc>
+              <a:buNone/>
+            </a:pPr>
+            <a:r>
+              <a:rPr lang="en-US" sz="750" dirty="0">
                 <a:solidFill>
                   <a:srgbClr val="9DB2C8"/>
                 </a:solidFill>
@@ -11208,7 +11127,7 @@
               </a:rPr>
               <a:t>one possession serving several departments</a:t>
             </a:r>
-            <a:endParaRPr lang="en-US" sz="950" dirty="0"/>
+            <a:endParaRPr lang="en-US" sz="750" dirty="0"/>
           </a:p>
         </p:txBody>
       </p:sp>
@@ -11220,12 +11139,12 @@
         </p:nvSpPr>
         <p:spPr>
           <a:xfrm>
-            <a:off x="7543800" y="4690872"/>
-            <a:ext cx="4178808" cy="2057400"/>
+            <a:off x="6537960" y="4434840"/>
+            <a:ext cx="5184648" cy="1691640"/>
           </a:xfrm>
           <a:prstGeom prst="roundRect">
             <a:avLst>
-              <a:gd name="adj" fmla="val 3556"/>
+              <a:gd name="adj" fmla="val 4324"/>
             </a:avLst>
           </a:prstGeom>
           <a:solidFill>
@@ -11247,7 +11166,7 @@
         </p:nvSpPr>
         <p:spPr>
           <a:xfrm>
-            <a:off x="7543800" y="4892040"/>
+            <a:off x="6537960" y="4617720"/>
             <a:ext cx="45720" cy="256032"/>
           </a:xfrm>
           <a:prstGeom prst="rect">
@@ -11267,17 +11186,17 @@
         </p:nvSpPr>
         <p:spPr>
           <a:xfrm>
-            <a:off x="7763256" y="4873752"/>
-            <a:ext cx="3776472" cy="274320"/>
-          </a:xfrm>
-          <a:prstGeom prst="rect">
-            <a:avLst/>
-          </a:prstGeom>
-          <a:noFill/>
-          <a:ln/>
-        </p:spPr>
-        <p:txBody>
-          <a:bodyPr wrap="square" rtlCol="0" anchor="ctr"/>
+            <a:off x="6757416" y="4599432"/>
+            <a:ext cx="4782312" cy="274320"/>
+          </a:xfrm>
+          <a:prstGeom prst="rect">
+            <a:avLst/>
+          </a:prstGeom>
+          <a:noFill/>
+          <a:ln/>
+        </p:spPr>
+        <p:txBody>
+          <a:bodyPr wrap="square" lIns="0" tIns="0" rIns="0" bIns="0" rtlCol="0" anchor="ctr"/>
           <a:lstStyle/>
           <a:p>
             <a:pPr indent="0" marL="0">
@@ -11306,28 +11225,28 @@
         </p:nvSpPr>
         <p:spPr>
           <a:xfrm>
-            <a:off x="7799832" y="5276088"/>
-            <a:ext cx="3721608" cy="1325880"/>
-          </a:xfrm>
-          <a:prstGeom prst="rect">
-            <a:avLst/>
-          </a:prstGeom>
-          <a:noFill/>
-          <a:ln/>
-        </p:spPr>
-        <p:txBody>
-          <a:bodyPr wrap="square" rtlCol="0" anchor="t"/>
+            <a:off x="6775704" y="4983480"/>
+            <a:ext cx="4745736" cy="1014984"/>
+          </a:xfrm>
+          <a:prstGeom prst="rect">
+            <a:avLst/>
+          </a:prstGeom>
+          <a:noFill/>
+          <a:ln/>
+        </p:spPr>
+        <p:txBody>
+          <a:bodyPr wrap="square" lIns="0" tIns="0" rIns="0" bIns="0" rtlCol="0" anchor="t"/>
           <a:lstStyle/>
           <a:p>
             <a:pPr marL="342900" indent="-342900">
               <a:lnSpc>
-                <a:spcPts val="1800"/>
+                <a:spcPts val="1122"/>
               </a:lnSpc>
               <a:buSzPct val="100000"/>
               <a:buChar char="•"/>
             </a:pPr>
             <a:r>
-              <a:rPr lang="en-US" sz="1100" dirty="0">
+              <a:rPr lang="en-US" sz="850" dirty="0">
                 <a:solidFill>
                   <a:srgbClr val="9DB2C8"/>
                 </a:solidFill>
@@ -11337,18 +11256,18 @@
               </a:rPr>
               <a:t>84 jobs left out, each with a reason code attached.</a:t>
             </a:r>
-            <a:endParaRPr lang="en-US" sz="1100" dirty="0"/>
+            <a:endParaRPr lang="en-US" sz="850" dirty="0"/>
           </a:p>
           <a:p>
             <a:pPr marL="342900" indent="-342900">
               <a:lnSpc>
-                <a:spcPts val="1800"/>
+                <a:spcPts val="1122"/>
               </a:lnSpc>
               <a:buSzPct val="100000"/>
               <a:buChar char="•"/>
             </a:pPr>
             <a:r>
-              <a:rPr lang="en-US" sz="1100" dirty="0">
+              <a:rPr lang="en-US" sz="850" dirty="0">
                 <a:solidFill>
                   <a:srgbClr val="9DB2C8"/>
                 </a:solidFill>
@@ -11358,18 +11277,18 @@
               </a:rPr>
               <a:t>3 critical jobs still have no safe slot — the constraints were not relaxed to fit them in.</a:t>
             </a:r>
-            <a:endParaRPr lang="en-US" sz="1100" dirty="0"/>
+            <a:endParaRPr lang="en-US" sz="850" dirty="0"/>
           </a:p>
           <a:p>
             <a:pPr marL="342900" indent="-342900">
               <a:lnSpc>
-                <a:spcPts val="1800"/>
+                <a:spcPts val="1122"/>
               </a:lnSpc>
               <a:buSzPct val="100000"/>
               <a:buChar char="•"/>
             </a:pPr>
             <a:r>
-              <a:rPr lang="en-US" sz="1100" dirty="0">
+              <a:rPr lang="en-US" sz="850" dirty="0">
                 <a:solidFill>
                   <a:srgbClr val="9DB2C8"/>
                 </a:solidFill>
@@ -11379,7 +11298,7 @@
               </a:rPr>
               <a:t>An independent validator re-derives every rule afterwards and rejects a plan with a train conflict, a task outside a block, a missing power or disconnection requirement, a duplicate assignment, or a block outside the horizon.</a:t>
             </a:r>
-            <a:endParaRPr lang="en-US" sz="1100" dirty="0"/>
+            <a:endParaRPr lang="en-US" sz="850" dirty="0"/>
           </a:p>
         </p:txBody>
       </p:sp>
@@ -11590,7 +11509,7 @@
         <p:spPr>
           <a:xfrm>
             <a:off x="502920" y="1810512"/>
-            <a:ext cx="6766560" cy="4699000"/>
+            <a:ext cx="5806440" cy="4032250"/>
           </a:xfrm>
           <a:prstGeom prst="rect">
             <a:avLst/>
@@ -11606,7 +11525,7 @@
         <p:spPr>
           <a:xfrm>
             <a:off x="502920" y="1810512"/>
-            <a:ext cx="6766560" cy="4699000"/>
+            <a:ext cx="5806440" cy="4032250"/>
           </a:xfrm>
           <a:prstGeom prst="rect">
             <a:avLst/>
@@ -11627,8 +11546,8 @@
         </p:nvSpPr>
         <p:spPr>
           <a:xfrm>
-            <a:off x="502920" y="6564376"/>
-            <a:ext cx="6766560" cy="256032"/>
+            <a:off x="502920" y="5897626"/>
+            <a:ext cx="5806440" cy="256032"/>
           </a:xfrm>
           <a:prstGeom prst="rect">
             <a:avLst/>
@@ -11666,12 +11585,12 @@
         </p:nvSpPr>
         <p:spPr>
           <a:xfrm>
-            <a:off x="7543800" y="1810512"/>
-            <a:ext cx="2011680" cy="1280160"/>
+            <a:off x="6537960" y="1810512"/>
+            <a:ext cx="2532888" cy="1188720"/>
           </a:xfrm>
           <a:prstGeom prst="roundRect">
             <a:avLst>
-              <a:gd name="adj" fmla="val 5714"/>
+              <a:gd name="adj" fmla="val 6154"/>
             </a:avLst>
           </a:prstGeom>
           <a:solidFill>
@@ -11693,24 +11612,24 @@
         </p:nvSpPr>
         <p:spPr>
           <a:xfrm>
-            <a:off x="7708392" y="1938528"/>
-            <a:ext cx="1682496" cy="219456"/>
-          </a:xfrm>
-          <a:prstGeom prst="rect">
-            <a:avLst/>
-          </a:prstGeom>
-          <a:noFill/>
-          <a:ln/>
-        </p:spPr>
-        <p:txBody>
-          <a:bodyPr wrap="square" rtlCol="0" anchor="ctr"/>
+            <a:off x="6702552" y="1929384"/>
+            <a:ext cx="2203704" cy="219456"/>
+          </a:xfrm>
+          <a:prstGeom prst="rect">
+            <a:avLst/>
+          </a:prstGeom>
+          <a:noFill/>
+          <a:ln/>
+        </p:spPr>
+        <p:txBody>
+          <a:bodyPr wrap="square" lIns="0" tIns="0" rIns="0" bIns="0" rtlCol="0" anchor="ctr"/>
           <a:lstStyle/>
           <a:p>
             <a:pPr indent="0" marL="0">
               <a:buNone/>
             </a:pPr>
             <a:r>
-              <a:rPr lang="en-US" sz="900" b="1" spc="100" kern="0" dirty="0">
+              <a:rPr lang="en-US" sz="900" b="1" spc="80" kern="0" dirty="0">
                 <a:solidFill>
                   <a:srgbClr val="6B819A"/>
                 </a:solidFill>
@@ -11732,17 +11651,17 @@
         </p:nvSpPr>
         <p:spPr>
           <a:xfrm>
-            <a:off x="7708392" y="2157984"/>
-            <a:ext cx="1682496" cy="457200"/>
-          </a:xfrm>
-          <a:prstGeom prst="rect">
-            <a:avLst/>
-          </a:prstGeom>
-          <a:noFill/>
-          <a:ln/>
-        </p:spPr>
-        <p:txBody>
-          <a:bodyPr wrap="square" rtlCol="0" anchor="ctr"/>
+            <a:off x="6702552" y="2176272"/>
+            <a:ext cx="2203704" cy="420624"/>
+          </a:xfrm>
+          <a:prstGeom prst="rect">
+            <a:avLst/>
+          </a:prstGeom>
+          <a:noFill/>
+          <a:ln/>
+        </p:spPr>
+        <p:txBody>
+          <a:bodyPr wrap="square" lIns="0" tIns="0" rIns="0" bIns="0" rtlCol="0" anchor="ctr"/>
           <a:lstStyle/>
           <a:p>
             <a:pPr indent="0" marL="0">
@@ -11771,20 +11690,23 @@
         </p:nvSpPr>
         <p:spPr>
           <a:xfrm>
-            <a:off x="7708392" y="2633472"/>
-            <a:ext cx="1682496" cy="347472"/>
-          </a:xfrm>
-          <a:prstGeom prst="rect">
-            <a:avLst/>
-          </a:prstGeom>
-          <a:noFill/>
-          <a:ln/>
-        </p:spPr>
-        <p:txBody>
-          <a:bodyPr wrap="square" rtlCol="0" anchor="t"/>
+            <a:off x="6702552" y="2633472"/>
+            <a:ext cx="2203704" cy="256032"/>
+          </a:xfrm>
+          <a:prstGeom prst="rect">
+            <a:avLst/>
+          </a:prstGeom>
+          <a:noFill/>
+          <a:ln/>
+        </p:spPr>
+        <p:txBody>
+          <a:bodyPr wrap="square" lIns="0" tIns="0" rIns="0" bIns="0" rtlCol="0" anchor="t"/>
           <a:lstStyle/>
           <a:p>
             <a:pPr indent="0" marL="0">
+              <a:lnSpc>
+                <a:spcPts val="1188"/>
+              </a:lnSpc>
               <a:buNone/>
             </a:pPr>
             <a:r>
@@ -11810,12 +11732,12 @@
         </p:nvSpPr>
         <p:spPr>
           <a:xfrm>
-            <a:off x="9710928" y="1810512"/>
-            <a:ext cx="2011680" cy="1280160"/>
+            <a:off x="9189720" y="1810512"/>
+            <a:ext cx="2532888" cy="1188720"/>
           </a:xfrm>
           <a:prstGeom prst="roundRect">
             <a:avLst>
-              <a:gd name="adj" fmla="val 5714"/>
+              <a:gd name="adj" fmla="val 6154"/>
             </a:avLst>
           </a:prstGeom>
           <a:solidFill>
@@ -11837,24 +11759,24 @@
         </p:nvSpPr>
         <p:spPr>
           <a:xfrm>
-            <a:off x="9875520" y="1938528"/>
-            <a:ext cx="1682496" cy="219456"/>
-          </a:xfrm>
-          <a:prstGeom prst="rect">
-            <a:avLst/>
-          </a:prstGeom>
-          <a:noFill/>
-          <a:ln/>
-        </p:spPr>
-        <p:txBody>
-          <a:bodyPr wrap="square" rtlCol="0" anchor="ctr"/>
+            <a:off x="9354312" y="1929384"/>
+            <a:ext cx="2203704" cy="219456"/>
+          </a:xfrm>
+          <a:prstGeom prst="rect">
+            <a:avLst/>
+          </a:prstGeom>
+          <a:noFill/>
+          <a:ln/>
+        </p:spPr>
+        <p:txBody>
+          <a:bodyPr wrap="square" lIns="0" tIns="0" rIns="0" bIns="0" rtlCol="0" anchor="ctr"/>
           <a:lstStyle/>
           <a:p>
             <a:pPr indent="0" marL="0">
               <a:buNone/>
             </a:pPr>
             <a:r>
-              <a:rPr lang="en-US" sz="900" b="1" spc="100" kern="0" dirty="0">
+              <a:rPr lang="en-US" sz="900" b="1" spc="80" kern="0" dirty="0">
                 <a:solidFill>
                   <a:srgbClr val="6B819A"/>
                 </a:solidFill>
@@ -11876,17 +11798,17 @@
         </p:nvSpPr>
         <p:spPr>
           <a:xfrm>
-            <a:off x="9875520" y="2157984"/>
-            <a:ext cx="1682496" cy="457200"/>
-          </a:xfrm>
-          <a:prstGeom prst="rect">
-            <a:avLst/>
-          </a:prstGeom>
-          <a:noFill/>
-          <a:ln/>
-        </p:spPr>
-        <p:txBody>
-          <a:bodyPr wrap="square" rtlCol="0" anchor="ctr"/>
+            <a:off x="9354312" y="2176272"/>
+            <a:ext cx="2203704" cy="420624"/>
+          </a:xfrm>
+          <a:prstGeom prst="rect">
+            <a:avLst/>
+          </a:prstGeom>
+          <a:noFill/>
+          <a:ln/>
+        </p:spPr>
+        <p:txBody>
+          <a:bodyPr wrap="square" lIns="0" tIns="0" rIns="0" bIns="0" rtlCol="0" anchor="ctr"/>
           <a:lstStyle/>
           <a:p>
             <a:pPr indent="0" marL="0">
@@ -11915,20 +11837,23 @@
         </p:nvSpPr>
         <p:spPr>
           <a:xfrm>
-            <a:off x="9875520" y="2633472"/>
-            <a:ext cx="1682496" cy="347472"/>
-          </a:xfrm>
-          <a:prstGeom prst="rect">
-            <a:avLst/>
-          </a:prstGeom>
-          <a:noFill/>
-          <a:ln/>
-        </p:spPr>
-        <p:txBody>
-          <a:bodyPr wrap="square" rtlCol="0" anchor="t"/>
+            <a:off x="9354312" y="2633472"/>
+            <a:ext cx="2203704" cy="256032"/>
+          </a:xfrm>
+          <a:prstGeom prst="rect">
+            <a:avLst/>
+          </a:prstGeom>
+          <a:noFill/>
+          <a:ln/>
+        </p:spPr>
+        <p:txBody>
+          <a:bodyPr wrap="square" lIns="0" tIns="0" rIns="0" bIns="0" rtlCol="0" anchor="t"/>
           <a:lstStyle/>
           <a:p>
             <a:pPr indent="0" marL="0">
+              <a:lnSpc>
+                <a:spcPts val="1188"/>
+              </a:lnSpc>
               <a:buNone/>
             </a:pPr>
             <a:r>
@@ -11954,12 +11879,12 @@
         </p:nvSpPr>
         <p:spPr>
           <a:xfrm>
-            <a:off x="7543800" y="3227832"/>
-            <a:ext cx="4178808" cy="1828800"/>
+            <a:off x="6537960" y="3136392"/>
+            <a:ext cx="5184648" cy="1417320"/>
           </a:xfrm>
           <a:prstGeom prst="roundRect">
             <a:avLst>
-              <a:gd name="adj" fmla="val 4000"/>
+              <a:gd name="adj" fmla="val 5161"/>
             </a:avLst>
           </a:prstGeom>
           <a:solidFill>
@@ -11981,7 +11906,7 @@
         </p:nvSpPr>
         <p:spPr>
           <a:xfrm>
-            <a:off x="7543800" y="3429000"/>
+            <a:off x="6537960" y="3319272"/>
             <a:ext cx="45720" cy="256032"/>
           </a:xfrm>
           <a:prstGeom prst="rect">
@@ -12001,17 +11926,17 @@
         </p:nvSpPr>
         <p:spPr>
           <a:xfrm>
-            <a:off x="7763256" y="3410712"/>
-            <a:ext cx="3776472" cy="274320"/>
-          </a:xfrm>
-          <a:prstGeom prst="rect">
-            <a:avLst/>
-          </a:prstGeom>
-          <a:noFill/>
-          <a:ln/>
-        </p:spPr>
-        <p:txBody>
-          <a:bodyPr wrap="square" rtlCol="0" anchor="ctr"/>
+            <a:off x="6757416" y="3300984"/>
+            <a:ext cx="4782312" cy="274320"/>
+          </a:xfrm>
+          <a:prstGeom prst="rect">
+            <a:avLst/>
+          </a:prstGeom>
+          <a:noFill/>
+          <a:ln/>
+        </p:spPr>
+        <p:txBody>
+          <a:bodyPr wrap="square" lIns="0" tIns="0" rIns="0" bIns="0" rtlCol="0" anchor="ctr"/>
           <a:lstStyle/>
           <a:p>
             <a:pPr indent="0" marL="0">
@@ -12040,28 +11965,28 @@
         </p:nvSpPr>
         <p:spPr>
           <a:xfrm>
-            <a:off x="7799832" y="3813048"/>
-            <a:ext cx="3721608" cy="1097280"/>
-          </a:xfrm>
-          <a:prstGeom prst="rect">
-            <a:avLst/>
-          </a:prstGeom>
-          <a:noFill/>
-          <a:ln/>
-        </p:spPr>
-        <p:txBody>
-          <a:bodyPr wrap="square" rtlCol="0" anchor="t"/>
+            <a:off x="6775704" y="3685032"/>
+            <a:ext cx="4745736" cy="740664"/>
+          </a:xfrm>
+          <a:prstGeom prst="rect">
+            <a:avLst/>
+          </a:prstGeom>
+          <a:noFill/>
+          <a:ln/>
+        </p:spPr>
+        <p:txBody>
+          <a:bodyPr wrap="square" lIns="0" tIns="0" rIns="0" bIns="0" rtlCol="0" anchor="t"/>
           <a:lstStyle/>
           <a:p>
             <a:pPr marL="342900" indent="-342900">
               <a:lnSpc>
-                <a:spcPts val="1800"/>
+                <a:spcPts val="1122"/>
               </a:lnSpc>
               <a:buSzPct val="100000"/>
               <a:buChar char="•"/>
             </a:pPr>
             <a:r>
-              <a:rPr lang="en-US" sz="1100" dirty="0">
+              <a:rPr lang="en-US" sz="850" dirty="0">
                 <a:solidFill>
                   <a:srgbClr val="9DB2C8"/>
                 </a:solidFill>
@@ -12071,18 +11996,18 @@
               </a:rPr>
               <a:t>The baseline places more tasks (145 vs 90) — by taking 2.6× more track time.</a:t>
             </a:r>
-            <a:endParaRPr lang="en-US" sz="1100" dirty="0"/>
+            <a:endParaRPr lang="en-US" sz="850" dirty="0"/>
           </a:p>
           <a:p>
             <a:pPr marL="342900" indent="-342900">
               <a:lnSpc>
-                <a:spcPts val="1800"/>
+                <a:spcPts val="1122"/>
               </a:lnSpc>
               <a:buSzPct val="100000"/>
               <a:buChar char="•"/>
             </a:pPr>
             <a:r>
-              <a:rPr lang="en-US" sz="1100" dirty="0">
+              <a:rPr lang="en-US" sz="850" dirty="0">
                 <a:solidFill>
                   <a:srgbClr val="9DB2C8"/>
                 </a:solidFill>
@@ -12092,18 +12017,18 @@
               </a:rPr>
               <a:t>Coordination buys back 11,400 block minutes and closes the line far less often.</a:t>
             </a:r>
-            <a:endParaRPr lang="en-US" sz="1100" dirty="0"/>
+            <a:endParaRPr lang="en-US" sz="850" dirty="0"/>
           </a:p>
           <a:p>
             <a:pPr marL="342900" indent="-342900">
               <a:lnSpc>
-                <a:spcPts val="1800"/>
+                <a:spcPts val="1122"/>
               </a:lnSpc>
               <a:buSzPct val="100000"/>
               <a:buChar char="•"/>
             </a:pPr>
             <a:r>
-              <a:rPr lang="en-US" sz="1100" dirty="0">
+              <a:rPr lang="en-US" sz="850" dirty="0">
                 <a:solidFill>
                   <a:srgbClr val="9DB2C8"/>
                 </a:solidFill>
@@ -12113,7 +12038,7 @@
               </a:rPr>
               <a:t>Critical coverage is unchanged: 27 scheduled, 2 unscheduled, on both sides.</a:t>
             </a:r>
-            <a:endParaRPr lang="en-US" sz="1100" dirty="0"/>
+            <a:endParaRPr lang="en-US" sz="850" dirty="0"/>
           </a:p>
         </p:txBody>
       </p:sp>
@@ -12125,12 +12050,12 @@
         </p:nvSpPr>
         <p:spPr>
           <a:xfrm>
-            <a:off x="7543800" y="5193792"/>
-            <a:ext cx="4178808" cy="1554480"/>
+            <a:off x="6537960" y="4663440"/>
+            <a:ext cx="5184648" cy="1463040"/>
           </a:xfrm>
           <a:prstGeom prst="roundRect">
             <a:avLst>
-              <a:gd name="adj" fmla="val 4706"/>
+              <a:gd name="adj" fmla="val 5000"/>
             </a:avLst>
           </a:prstGeom>
           <a:solidFill>
@@ -12152,7 +12077,7 @@
         </p:nvSpPr>
         <p:spPr>
           <a:xfrm>
-            <a:off x="7543800" y="5394960"/>
+            <a:off x="6537960" y="4846320"/>
             <a:ext cx="45720" cy="256032"/>
           </a:xfrm>
           <a:prstGeom prst="rect">
@@ -12172,17 +12097,17 @@
         </p:nvSpPr>
         <p:spPr>
           <a:xfrm>
-            <a:off x="7763256" y="5376672"/>
-            <a:ext cx="3776472" cy="274320"/>
-          </a:xfrm>
-          <a:prstGeom prst="rect">
-            <a:avLst/>
-          </a:prstGeom>
-          <a:noFill/>
-          <a:ln/>
-        </p:spPr>
-        <p:txBody>
-          <a:bodyPr wrap="square" rtlCol="0" anchor="ctr"/>
+            <a:off x="6757416" y="4828032"/>
+            <a:ext cx="4782312" cy="274320"/>
+          </a:xfrm>
+          <a:prstGeom prst="rect">
+            <a:avLst/>
+          </a:prstGeom>
+          <a:noFill/>
+          <a:ln/>
+        </p:spPr>
+        <p:txBody>
+          <a:bodyPr wrap="square" lIns="0" tIns="0" rIns="0" bIns="0" rtlCol="0" anchor="ctr"/>
           <a:lstStyle/>
           <a:p>
             <a:pPr indent="0" marL="0">
@@ -12211,28 +12136,28 @@
         </p:nvSpPr>
         <p:spPr>
           <a:xfrm>
-            <a:off x="7799832" y="5779008"/>
-            <a:ext cx="3721608" cy="822960"/>
-          </a:xfrm>
-          <a:prstGeom prst="rect">
-            <a:avLst/>
-          </a:prstGeom>
-          <a:noFill/>
-          <a:ln/>
-        </p:spPr>
-        <p:txBody>
-          <a:bodyPr wrap="square" rtlCol="0" anchor="t"/>
+            <a:off x="6775704" y="5212080"/>
+            <a:ext cx="4745736" cy="786384"/>
+          </a:xfrm>
+          <a:prstGeom prst="rect">
+            <a:avLst/>
+          </a:prstGeom>
+          <a:noFill/>
+          <a:ln/>
+        </p:spPr>
+        <p:txBody>
+          <a:bodyPr wrap="square" lIns="0" tIns="0" rIns="0" bIns="0" rtlCol="0" anchor="t"/>
           <a:lstStyle/>
           <a:p>
             <a:pPr marL="342900" indent="-342900">
               <a:lnSpc>
-                <a:spcPts val="1800"/>
+                <a:spcPts val="1122"/>
               </a:lnSpc>
               <a:buSzPct val="100000"/>
               <a:buChar char="•"/>
             </a:pPr>
             <a:r>
-              <a:rPr lang="en-US" sz="1100" dirty="0">
+              <a:rPr lang="en-US" sz="850" dirty="0">
                 <a:solidFill>
                   <a:srgbClr val="9DB2C8"/>
                 </a:solidFill>
@@ -12242,18 +12167,18 @@
               </a:rPr>
               <a:t>Both plans are computed at run time from the same inputs.</a:t>
             </a:r>
-            <a:endParaRPr lang="en-US" sz="1100" dirty="0"/>
+            <a:endParaRPr lang="en-US" sz="850" dirty="0"/>
           </a:p>
           <a:p>
             <a:pPr marL="342900" indent="-342900">
               <a:lnSpc>
-                <a:spcPts val="1800"/>
+                <a:spcPts val="1122"/>
               </a:lnSpc>
               <a:buSzPct val="100000"/>
               <a:buChar char="•"/>
             </a:pPr>
             <a:r>
-              <a:rPr lang="en-US" sz="1100" dirty="0">
+              <a:rPr lang="en-US" sz="850" dirty="0">
                 <a:solidFill>
                   <a:srgbClr val="9DB2C8"/>
                 </a:solidFill>
@@ -12263,18 +12188,18 @@
               </a:rPr>
               <a:t>Change a weight or the train buffer, press Generate, and every figure moves.</a:t>
             </a:r>
-            <a:endParaRPr lang="en-US" sz="1100" dirty="0"/>
+            <a:endParaRPr lang="en-US" sz="850" dirty="0"/>
           </a:p>
           <a:p>
             <a:pPr marL="342900" indent="-342900">
               <a:lnSpc>
-                <a:spcPts val="1800"/>
+                <a:spcPts val="1122"/>
               </a:lnSpc>
               <a:buSzPct val="100000"/>
               <a:buChar char="•"/>
             </a:pPr>
             <a:r>
-              <a:rPr lang="en-US" sz="1100" dirty="0">
+              <a:rPr lang="en-US" sz="850" dirty="0">
                 <a:solidFill>
                   <a:srgbClr val="9DB2C8"/>
                 </a:solidFill>
@@ -12284,7 +12209,7 @@
               </a:rPr>
               <a:t>Asset availability is derived from horizon minutes and section count, not asserted.</a:t>
             </a:r>
-            <a:endParaRPr lang="en-US" sz="1100" dirty="0"/>
+            <a:endParaRPr lang="en-US" sz="850" dirty="0"/>
           </a:p>
         </p:txBody>
       </p:sp>
@@ -12487,11 +12412,11 @@
         <p:spPr>
           <a:xfrm>
             <a:off x="502920" y="1920240"/>
-            <a:ext cx="5532120" cy="2423160"/>
+            <a:ext cx="5532120" cy="2148840"/>
           </a:xfrm>
           <a:prstGeom prst="roundRect">
             <a:avLst>
-              <a:gd name="adj" fmla="val 3019"/>
+              <a:gd name="adj" fmla="val 3404"/>
             </a:avLst>
           </a:prstGeom>
           <a:solidFill>
@@ -12591,22 +12516,22 @@
         </p:nvSpPr>
         <p:spPr>
           <a:xfrm>
-            <a:off x="914400" y="2834640"/>
-            <a:ext cx="4754880" cy="1371600"/>
-          </a:xfrm>
-          <a:prstGeom prst="rect">
-            <a:avLst/>
-          </a:prstGeom>
-          <a:noFill/>
-          <a:ln/>
-        </p:spPr>
-        <p:txBody>
-          <a:bodyPr wrap="square" rtlCol="0" anchor="ctr"/>
+            <a:off x="914400" y="2816352"/>
+            <a:ext cx="4892040" cy="1371600"/>
+          </a:xfrm>
+          <a:prstGeom prst="rect">
+            <a:avLst/>
+          </a:prstGeom>
+          <a:noFill/>
+          <a:ln/>
+        </p:spPr>
+        <p:txBody>
+          <a:bodyPr wrap="square" lIns="0" tIns="0" rIns="0" bIns="0" rtlCol="0" anchor="t"/>
           <a:lstStyle/>
           <a:p>
             <a:pPr marL="342900" indent="-342900">
               <a:lnSpc>
-                <a:spcPts val="1900"/>
+                <a:spcPts val="1518"/>
               </a:lnSpc>
               <a:buSzPct val="100000"/>
               <a:buChar char="•"/>
@@ -12627,7 +12552,7 @@
           <a:p>
             <a:pPr marL="342900" indent="-342900">
               <a:lnSpc>
-                <a:spcPts val="1900"/>
+                <a:spcPts val="1518"/>
               </a:lnSpc>
               <a:buSzPct val="100000"/>
               <a:buChar char="•"/>
@@ -12648,7 +12573,7 @@
           <a:p>
             <a:pPr marL="342900" indent="-342900">
               <a:lnSpc>
-                <a:spcPts val="1900"/>
+                <a:spcPts val="1518"/>
               </a:lnSpc>
               <a:buSzPct val="100000"/>
               <a:buChar char="•"/>
@@ -12677,11 +12602,11 @@
         <p:spPr>
           <a:xfrm>
             <a:off x="6190488" y="1920240"/>
-            <a:ext cx="5532120" cy="2423160"/>
+            <a:ext cx="5532120" cy="2148840"/>
           </a:xfrm>
           <a:prstGeom prst="roundRect">
             <a:avLst>
-              <a:gd name="adj" fmla="val 3019"/>
+              <a:gd name="adj" fmla="val 3404"/>
             </a:avLst>
           </a:prstGeom>
           <a:solidFill>
@@ -12781,22 +12706,22 @@
         </p:nvSpPr>
         <p:spPr>
           <a:xfrm>
-            <a:off x="6601968" y="2834640"/>
-            <a:ext cx="4754880" cy="1371600"/>
-          </a:xfrm>
-          <a:prstGeom prst="rect">
-            <a:avLst/>
-          </a:prstGeom>
-          <a:noFill/>
-          <a:ln/>
-        </p:spPr>
-        <p:txBody>
-          <a:bodyPr wrap="square" rtlCol="0" anchor="ctr"/>
+            <a:off x="6601968" y="2816352"/>
+            <a:ext cx="4892040" cy="1371600"/>
+          </a:xfrm>
+          <a:prstGeom prst="rect">
+            <a:avLst/>
+          </a:prstGeom>
+          <a:noFill/>
+          <a:ln/>
+        </p:spPr>
+        <p:txBody>
+          <a:bodyPr wrap="square" lIns="0" tIns="0" rIns="0" bIns="0" rtlCol="0" anchor="t"/>
           <a:lstStyle/>
           <a:p>
             <a:pPr marL="342900" indent="-342900">
               <a:lnSpc>
-                <a:spcPts val="1900"/>
+                <a:spcPts val="1518"/>
               </a:lnSpc>
               <a:buSzPct val="100000"/>
               <a:buChar char="•"/>
@@ -12817,7 +12742,7 @@
           <a:p>
             <a:pPr marL="342900" indent="-342900">
               <a:lnSpc>
-                <a:spcPts val="1900"/>
+                <a:spcPts val="1518"/>
               </a:lnSpc>
               <a:buSzPct val="100000"/>
               <a:buChar char="•"/>
@@ -12838,7 +12763,7 @@
           <a:p>
             <a:pPr marL="342900" indent="-342900">
               <a:lnSpc>
-                <a:spcPts val="1900"/>
+                <a:spcPts val="1518"/>
               </a:lnSpc>
               <a:buSzPct val="100000"/>
               <a:buChar char="•"/>
@@ -12893,7 +12818,7 @@
         </p:nvSpPr>
         <p:spPr>
           <a:xfrm>
-            <a:off x="667512" y="4700016"/>
+            <a:off x="667512" y="4690872"/>
             <a:ext cx="2322576" cy="219456"/>
           </a:xfrm>
           <a:prstGeom prst="rect">
@@ -12903,14 +12828,14 @@
           <a:ln/>
         </p:spPr>
         <p:txBody>
-          <a:bodyPr wrap="square" rtlCol="0" anchor="ctr"/>
+          <a:bodyPr wrap="square" lIns="0" tIns="0" rIns="0" bIns="0" rtlCol="0" anchor="ctr"/>
           <a:lstStyle/>
           <a:p>
             <a:pPr indent="0" marL="0">
               <a:buNone/>
             </a:pPr>
             <a:r>
-              <a:rPr lang="en-US" sz="900" b="1" spc="100" kern="0" dirty="0">
+              <a:rPr lang="en-US" sz="900" b="1" spc="80" kern="0" dirty="0">
                 <a:solidFill>
                   <a:srgbClr val="6B819A"/>
                 </a:solidFill>
@@ -12932,17 +12857,17 @@
         </p:nvSpPr>
         <p:spPr>
           <a:xfrm>
-            <a:off x="667512" y="4919472"/>
-            <a:ext cx="2322576" cy="457200"/>
-          </a:xfrm>
-          <a:prstGeom prst="rect">
-            <a:avLst/>
-          </a:prstGeom>
-          <a:noFill/>
-          <a:ln/>
-        </p:spPr>
-        <p:txBody>
-          <a:bodyPr wrap="square" rtlCol="0" anchor="ctr"/>
+            <a:off x="667512" y="4937760"/>
+            <a:ext cx="2322576" cy="420624"/>
+          </a:xfrm>
+          <a:prstGeom prst="rect">
+            <a:avLst/>
+          </a:prstGeom>
+          <a:noFill/>
+          <a:ln/>
+        </p:spPr>
+        <p:txBody>
+          <a:bodyPr wrap="square" lIns="0" tIns="0" rIns="0" bIns="0" rtlCol="0" anchor="ctr"/>
           <a:lstStyle/>
           <a:p>
             <a:pPr indent="0" marL="0">
@@ -12981,10 +12906,13 @@
           <a:ln/>
         </p:spPr>
         <p:txBody>
-          <a:bodyPr wrap="square" rtlCol="0" anchor="t"/>
+          <a:bodyPr wrap="square" lIns="0" tIns="0" rIns="0" bIns="0" rtlCol="0" anchor="t"/>
           <a:lstStyle/>
           <a:p>
             <a:pPr indent="0" marL="0">
+              <a:lnSpc>
+                <a:spcPts val="1188"/>
+              </a:lnSpc>
               <a:buNone/>
             </a:pPr>
             <a:r>
@@ -13037,7 +12965,7 @@
         </p:nvSpPr>
         <p:spPr>
           <a:xfrm>
-            <a:off x="3520440" y="4700016"/>
+            <a:off x="3520440" y="4690872"/>
             <a:ext cx="2322576" cy="219456"/>
           </a:xfrm>
           <a:prstGeom prst="rect">
@@ -13047,14 +12975,14 @@
           <a:ln/>
         </p:spPr>
         <p:txBody>
-          <a:bodyPr wrap="square" rtlCol="0" anchor="ctr"/>
+          <a:bodyPr wrap="square" lIns="0" tIns="0" rIns="0" bIns="0" rtlCol="0" anchor="ctr"/>
           <a:lstStyle/>
           <a:p>
             <a:pPr indent="0" marL="0">
               <a:buNone/>
             </a:pPr>
             <a:r>
-              <a:rPr lang="en-US" sz="900" b="1" spc="100" kern="0" dirty="0">
+              <a:rPr lang="en-US" sz="900" b="1" spc="80" kern="0" dirty="0">
                 <a:solidFill>
                   <a:srgbClr val="6B819A"/>
                 </a:solidFill>
@@ -13076,17 +13004,17 @@
         </p:nvSpPr>
         <p:spPr>
           <a:xfrm>
-            <a:off x="3520440" y="4919472"/>
-            <a:ext cx="2322576" cy="457200"/>
-          </a:xfrm>
-          <a:prstGeom prst="rect">
-            <a:avLst/>
-          </a:prstGeom>
-          <a:noFill/>
-          <a:ln/>
-        </p:spPr>
-        <p:txBody>
-          <a:bodyPr wrap="square" rtlCol="0" anchor="ctr"/>
+            <a:off x="3520440" y="4937760"/>
+            <a:ext cx="2322576" cy="420624"/>
+          </a:xfrm>
+          <a:prstGeom prst="rect">
+            <a:avLst/>
+          </a:prstGeom>
+          <a:noFill/>
+          <a:ln/>
+        </p:spPr>
+        <p:txBody>
+          <a:bodyPr wrap="square" lIns="0" tIns="0" rIns="0" bIns="0" rtlCol="0" anchor="ctr"/>
           <a:lstStyle/>
           <a:p>
             <a:pPr indent="0" marL="0">
@@ -13125,10 +13053,13 @@
           <a:ln/>
         </p:spPr>
         <p:txBody>
-          <a:bodyPr wrap="square" rtlCol="0" anchor="t"/>
+          <a:bodyPr wrap="square" lIns="0" tIns="0" rIns="0" bIns="0" rtlCol="0" anchor="t"/>
           <a:lstStyle/>
           <a:p>
             <a:pPr indent="0" marL="0">
+              <a:lnSpc>
+                <a:spcPts val="1188"/>
+              </a:lnSpc>
               <a:buNone/>
             </a:pPr>
             <a:r>
@@ -13181,7 +13112,7 @@
         </p:nvSpPr>
         <p:spPr>
           <a:xfrm>
-            <a:off x="6373368" y="4700016"/>
+            <a:off x="6373368" y="4690872"/>
             <a:ext cx="2322576" cy="219456"/>
           </a:xfrm>
           <a:prstGeom prst="rect">
@@ -13191,14 +13122,14 @@
           <a:ln/>
         </p:spPr>
         <p:txBody>
-          <a:bodyPr wrap="square" rtlCol="0" anchor="ctr"/>
+          <a:bodyPr wrap="square" lIns="0" tIns="0" rIns="0" bIns="0" rtlCol="0" anchor="ctr"/>
           <a:lstStyle/>
           <a:p>
             <a:pPr indent="0" marL="0">
               <a:buNone/>
             </a:pPr>
             <a:r>
-              <a:rPr lang="en-US" sz="900" b="1" spc="100" kern="0" dirty="0">
+              <a:rPr lang="en-US" sz="900" b="1" spc="80" kern="0" dirty="0">
                 <a:solidFill>
                   <a:srgbClr val="6B819A"/>
                 </a:solidFill>
@@ -13220,17 +13151,17 @@
         </p:nvSpPr>
         <p:spPr>
           <a:xfrm>
-            <a:off x="6373368" y="4919472"/>
-            <a:ext cx="2322576" cy="457200"/>
-          </a:xfrm>
-          <a:prstGeom prst="rect">
-            <a:avLst/>
-          </a:prstGeom>
-          <a:noFill/>
-          <a:ln/>
-        </p:spPr>
-        <p:txBody>
-          <a:bodyPr wrap="square" rtlCol="0" anchor="ctr"/>
+            <a:off x="6373368" y="4937760"/>
+            <a:ext cx="2322576" cy="420624"/>
+          </a:xfrm>
+          <a:prstGeom prst="rect">
+            <a:avLst/>
+          </a:prstGeom>
+          <a:noFill/>
+          <a:ln/>
+        </p:spPr>
+        <p:txBody>
+          <a:bodyPr wrap="square" lIns="0" tIns="0" rIns="0" bIns="0" rtlCol="0" anchor="ctr"/>
           <a:lstStyle/>
           <a:p>
             <a:pPr indent="0" marL="0">
@@ -13269,10 +13200,13 @@
           <a:ln/>
         </p:spPr>
         <p:txBody>
-          <a:bodyPr wrap="square" rtlCol="0" anchor="t"/>
+          <a:bodyPr wrap="square" lIns="0" tIns="0" rIns="0" bIns="0" rtlCol="0" anchor="t"/>
           <a:lstStyle/>
           <a:p>
             <a:pPr indent="0" marL="0">
+              <a:lnSpc>
+                <a:spcPts val="1188"/>
+              </a:lnSpc>
               <a:buNone/>
             </a:pPr>
             <a:r>
@@ -13325,7 +13259,7 @@
         </p:nvSpPr>
         <p:spPr>
           <a:xfrm>
-            <a:off x="9226296" y="4700016"/>
+            <a:off x="9226296" y="4690872"/>
             <a:ext cx="2322576" cy="219456"/>
           </a:xfrm>
           <a:prstGeom prst="rect">
@@ -13335,14 +13269,14 @@
           <a:ln/>
         </p:spPr>
         <p:txBody>
-          <a:bodyPr wrap="square" rtlCol="0" anchor="ctr"/>
+          <a:bodyPr wrap="square" lIns="0" tIns="0" rIns="0" bIns="0" rtlCol="0" anchor="ctr"/>
           <a:lstStyle/>
           <a:p>
             <a:pPr indent="0" marL="0">
               <a:buNone/>
             </a:pPr>
             <a:r>
-              <a:rPr lang="en-US" sz="900" b="1" spc="100" kern="0" dirty="0">
+              <a:rPr lang="en-US" sz="900" b="1" spc="80" kern="0" dirty="0">
                 <a:solidFill>
                   <a:srgbClr val="6B819A"/>
                 </a:solidFill>
@@ -13364,17 +13298,17 @@
         </p:nvSpPr>
         <p:spPr>
           <a:xfrm>
-            <a:off x="9226296" y="4919472"/>
-            <a:ext cx="2322576" cy="457200"/>
-          </a:xfrm>
-          <a:prstGeom prst="rect">
-            <a:avLst/>
-          </a:prstGeom>
-          <a:noFill/>
-          <a:ln/>
-        </p:spPr>
-        <p:txBody>
-          <a:bodyPr wrap="square" rtlCol="0" anchor="ctr"/>
+            <a:off x="9226296" y="4937760"/>
+            <a:ext cx="2322576" cy="420624"/>
+          </a:xfrm>
+          <a:prstGeom prst="rect">
+            <a:avLst/>
+          </a:prstGeom>
+          <a:noFill/>
+          <a:ln/>
+        </p:spPr>
+        <p:txBody>
+          <a:bodyPr wrap="square" lIns="0" tIns="0" rIns="0" bIns="0" rtlCol="0" anchor="ctr"/>
           <a:lstStyle/>
           <a:p>
             <a:pPr indent="0" marL="0">
@@ -13413,10 +13347,13 @@
           <a:ln/>
         </p:spPr>
         <p:txBody>
-          <a:bodyPr wrap="square" rtlCol="0" anchor="t"/>
+          <a:bodyPr wrap="square" lIns="0" tIns="0" rIns="0" bIns="0" rtlCol="0" anchor="t"/>
           <a:lstStyle/>
           <a:p>
             <a:pPr indent="0" marL="0">
+              <a:lnSpc>
+                <a:spcPts val="1188"/>
+              </a:lnSpc>
               <a:buNone/>
             </a:pPr>
             <a:r>
